--- a/materials/map.pptx
+++ b/materials/map.pptx
@@ -1,11 +1,13 @@
 
 <file path=ppt/presentation.xml><?xml version="1.0" encoding="utf-8"?>
-<p:presentation xmlns:a="http://schemas.openxmlformats.org/drawingml/2006/main" xmlns:r="http://schemas.openxmlformats.org/officeDocument/2006/relationships" xmlns:p="http://schemas.openxmlformats.org/presentationml/2006/main" saveSubsetFonts="1">
+<p:presentation xmlns:a="http://schemas.openxmlformats.org/drawingml/2006/main" xmlns:r="http://schemas.openxmlformats.org/officeDocument/2006/relationships" xmlns:p="http://schemas.openxmlformats.org/presentationml/2006/main">
   <p:sldMasterIdLst>
     <p:sldMasterId id="2147483648" r:id="rId1"/>
   </p:sldMasterIdLst>
   <p:sldIdLst>
-    <p:sldId id="256" r:id="rId2"/>
+    <p:sldId id="256" r:id="rId3"/>
+    <p:sldId id="257" r:id="rId4"/>
+    <p:sldId id="258" r:id="rId5"/>
   </p:sldIdLst>
   <p:sldSz cx="12192000" cy="6858000"/>
   <p:notesSz cx="6858000" cy="9144000"/>
@@ -126,13 +128,7 @@
       </p:grpSpPr>
       <p:sp>
         <p:nvSpPr>
-          <p:cNvPr id="2" name="タイトル 1">
-            <a:extLst>
-              <a:ext uri="{FF2B5EF4-FFF2-40B4-BE49-F238E27FC236}">
-                <a16:creationId xmlns:a16="http://schemas.microsoft.com/office/drawing/2014/main" id="{998E4351-12F1-491D-7612-439B577B9671}"/>
-              </a:ext>
-            </a:extLst>
-          </p:cNvPr>
+          <p:cNvPr id="2" name="タイトル 1"/>
           <p:cNvSpPr>
             <a:spLocks noGrp="1"/>
           </p:cNvSpPr>
@@ -158,18 +154,13 @@
               <a:rPr kumimoji="1" lang="ja-JP" altLang="en-US"/>
               <a:t>マスター タイトルの書式設定</a:t>
             </a:r>
-          </a:p>
-        </p:txBody>
-      </p:sp>
-      <p:sp>
-        <p:nvSpPr>
-          <p:cNvPr id="3" name="字幕 2">
-            <a:extLst>
-              <a:ext uri="{FF2B5EF4-FFF2-40B4-BE49-F238E27FC236}">
-                <a16:creationId xmlns:a16="http://schemas.microsoft.com/office/drawing/2014/main" id="{A4951ED2-65D1-4BCA-3105-B885F39CD40B}"/>
-              </a:ext>
-            </a:extLst>
-          </p:cNvPr>
+            <a:endParaRPr kumimoji="1" lang="ja-JP" altLang="en-US"/>
+          </a:p>
+        </p:txBody>
+      </p:sp>
+      <p:sp>
+        <p:nvSpPr>
+          <p:cNvPr id="3" name="字幕 2"/>
           <p:cNvSpPr>
             <a:spLocks noGrp="1"/>
           </p:cNvSpPr>
@@ -228,18 +219,13 @@
               <a:rPr kumimoji="1" lang="ja-JP" altLang="en-US"/>
               <a:t>マスター サブタイトルの書式設定</a:t>
             </a:r>
-          </a:p>
-        </p:txBody>
-      </p:sp>
-      <p:sp>
-        <p:nvSpPr>
-          <p:cNvPr id="4" name="日付プレースホルダー 3">
-            <a:extLst>
-              <a:ext uri="{FF2B5EF4-FFF2-40B4-BE49-F238E27FC236}">
-                <a16:creationId xmlns:a16="http://schemas.microsoft.com/office/drawing/2014/main" id="{9AC4A393-2803-0CB8-66C4-56ECE2688EB6}"/>
-              </a:ext>
-            </a:extLst>
-          </p:cNvPr>
+            <a:endParaRPr kumimoji="1" lang="ja-JP" altLang="en-US"/>
+          </a:p>
+        </p:txBody>
+      </p:sp>
+      <p:sp>
+        <p:nvSpPr>
+          <p:cNvPr id="4" name="日付プレースホルダー 3"/>
           <p:cNvSpPr>
             <a:spLocks noGrp="1"/>
           </p:cNvSpPr>
@@ -254,7 +240,6 @@
           <a:p>
             <a:fld id="{6D1A64C3-A488-44CE-A3F3-A08F41D23068}" type="datetimeFigureOut">
               <a:rPr kumimoji="1" lang="ja-JP" altLang="en-US" smtClean="0"/>
-              <a:t>2026/7/1</a:t>
             </a:fld>
             <a:endParaRPr kumimoji="1" lang="ja-JP" altLang="en-US"/>
           </a:p>
@@ -262,13 +247,7 @@
       </p:sp>
       <p:sp>
         <p:nvSpPr>
-          <p:cNvPr id="5" name="フッター プレースホルダー 4">
-            <a:extLst>
-              <a:ext uri="{FF2B5EF4-FFF2-40B4-BE49-F238E27FC236}">
-                <a16:creationId xmlns:a16="http://schemas.microsoft.com/office/drawing/2014/main" id="{CF8108F4-49A9-B91F-50CE-55DBFBBB89B6}"/>
-              </a:ext>
-            </a:extLst>
-          </p:cNvPr>
+          <p:cNvPr id="5" name="フッター プレースホルダー 4"/>
           <p:cNvSpPr>
             <a:spLocks noGrp="1"/>
           </p:cNvSpPr>
@@ -287,13 +266,7 @@
       </p:sp>
       <p:sp>
         <p:nvSpPr>
-          <p:cNvPr id="6" name="スライド番号プレースホルダー 5">
-            <a:extLst>
-              <a:ext uri="{FF2B5EF4-FFF2-40B4-BE49-F238E27FC236}">
-                <a16:creationId xmlns:a16="http://schemas.microsoft.com/office/drawing/2014/main" id="{28937E0C-B77F-A90B-55CA-34ED0B62CDE1}"/>
-              </a:ext>
-            </a:extLst>
-          </p:cNvPr>
+          <p:cNvPr id="6" name="スライド番号プレースホルダー 5"/>
           <p:cNvSpPr>
             <a:spLocks noGrp="1"/>
           </p:cNvSpPr>
@@ -308,18 +281,12 @@
           <a:p>
             <a:fld id="{DBFBB364-F735-42FF-8F06-BCF5AE141D6A}" type="slidenum">
               <a:rPr kumimoji="1" lang="ja-JP" altLang="en-US" smtClean="0"/>
-              <a:t>‹#›</a:t>
             </a:fld>
             <a:endParaRPr kumimoji="1" lang="ja-JP" altLang="en-US"/>
           </a:p>
         </p:txBody>
       </p:sp>
     </p:spTree>
-    <p:extLst>
-      <p:ext uri="{BB962C8B-B14F-4D97-AF65-F5344CB8AC3E}">
-        <p14:creationId xmlns:p14="http://schemas.microsoft.com/office/powerpoint/2010/main" val="319016899"/>
-      </p:ext>
-    </p:extLst>
   </p:cSld>
   <p:clrMapOvr>
     <a:masterClrMapping/>
@@ -346,13 +313,7 @@
       </p:grpSpPr>
       <p:sp>
         <p:nvSpPr>
-          <p:cNvPr id="2" name="タイトル 1">
-            <a:extLst>
-              <a:ext uri="{FF2B5EF4-FFF2-40B4-BE49-F238E27FC236}">
-                <a16:creationId xmlns:a16="http://schemas.microsoft.com/office/drawing/2014/main" id="{9D6AD49C-6171-9F60-7510-890D90F98E2E}"/>
-              </a:ext>
-            </a:extLst>
-          </p:cNvPr>
+          <p:cNvPr id="2" name="タイトル 1"/>
           <p:cNvSpPr>
             <a:spLocks noGrp="1"/>
           </p:cNvSpPr>
@@ -369,18 +330,13 @@
               <a:rPr kumimoji="1" lang="ja-JP" altLang="en-US"/>
               <a:t>マスター タイトルの書式設定</a:t>
             </a:r>
-          </a:p>
-        </p:txBody>
-      </p:sp>
-      <p:sp>
-        <p:nvSpPr>
-          <p:cNvPr id="3" name="縦書きテキスト プレースホルダー 2">
-            <a:extLst>
-              <a:ext uri="{FF2B5EF4-FFF2-40B4-BE49-F238E27FC236}">
-                <a16:creationId xmlns:a16="http://schemas.microsoft.com/office/drawing/2014/main" id="{9AC388F7-3B26-5FC0-EAC0-4B3B083877BF}"/>
-              </a:ext>
-            </a:extLst>
-          </p:cNvPr>
+            <a:endParaRPr kumimoji="1" lang="ja-JP" altLang="en-US"/>
+          </a:p>
+        </p:txBody>
+      </p:sp>
+      <p:sp>
+        <p:nvSpPr>
+          <p:cNvPr id="3" name="縦書きテキスト プレースホルダー 2"/>
           <p:cNvSpPr>
             <a:spLocks noGrp="1"/>
           </p:cNvSpPr>
@@ -398,6 +354,7 @@
               <a:rPr kumimoji="1" lang="ja-JP" altLang="en-US"/>
               <a:t>マスター テキストの書式設定</a:t>
             </a:r>
+            <a:endParaRPr kumimoji="1" lang="ja-JP" altLang="en-US"/>
           </a:p>
           <a:p>
             <a:pPr lvl="1"/>
@@ -413,6 +370,7 @@
               <a:rPr kumimoji="1" lang="ja-JP" altLang="en-US"/>
               <a:t>レベル</a:t>
             </a:r>
+            <a:endParaRPr kumimoji="1" lang="ja-JP" altLang="en-US"/>
           </a:p>
           <a:p>
             <a:pPr lvl="2"/>
@@ -428,6 +386,7 @@
               <a:rPr kumimoji="1" lang="ja-JP" altLang="en-US"/>
               <a:t>レベル</a:t>
             </a:r>
+            <a:endParaRPr kumimoji="1" lang="ja-JP" altLang="en-US"/>
           </a:p>
           <a:p>
             <a:pPr lvl="3"/>
@@ -443,6 +402,7 @@
               <a:rPr kumimoji="1" lang="ja-JP" altLang="en-US"/>
               <a:t>レベル</a:t>
             </a:r>
+            <a:endParaRPr kumimoji="1" lang="ja-JP" altLang="en-US"/>
           </a:p>
           <a:p>
             <a:pPr lvl="4"/>
@@ -458,18 +418,13 @@
               <a:rPr kumimoji="1" lang="ja-JP" altLang="en-US"/>
               <a:t>レベル</a:t>
             </a:r>
-          </a:p>
-        </p:txBody>
-      </p:sp>
-      <p:sp>
-        <p:nvSpPr>
-          <p:cNvPr id="4" name="日付プレースホルダー 3">
-            <a:extLst>
-              <a:ext uri="{FF2B5EF4-FFF2-40B4-BE49-F238E27FC236}">
-                <a16:creationId xmlns:a16="http://schemas.microsoft.com/office/drawing/2014/main" id="{C923A647-FD39-1472-05B0-C72878976A27}"/>
-              </a:ext>
-            </a:extLst>
-          </p:cNvPr>
+            <a:endParaRPr kumimoji="1" lang="ja-JP" altLang="en-US"/>
+          </a:p>
+        </p:txBody>
+      </p:sp>
+      <p:sp>
+        <p:nvSpPr>
+          <p:cNvPr id="4" name="日付プレースホルダー 3"/>
           <p:cNvSpPr>
             <a:spLocks noGrp="1"/>
           </p:cNvSpPr>
@@ -484,7 +439,6 @@
           <a:p>
             <a:fld id="{6D1A64C3-A488-44CE-A3F3-A08F41D23068}" type="datetimeFigureOut">
               <a:rPr kumimoji="1" lang="ja-JP" altLang="en-US" smtClean="0"/>
-              <a:t>2026/7/1</a:t>
             </a:fld>
             <a:endParaRPr kumimoji="1" lang="ja-JP" altLang="en-US"/>
           </a:p>
@@ -492,13 +446,7 @@
       </p:sp>
       <p:sp>
         <p:nvSpPr>
-          <p:cNvPr id="5" name="フッター プレースホルダー 4">
-            <a:extLst>
-              <a:ext uri="{FF2B5EF4-FFF2-40B4-BE49-F238E27FC236}">
-                <a16:creationId xmlns:a16="http://schemas.microsoft.com/office/drawing/2014/main" id="{52516786-47C4-F265-568D-1012534865D2}"/>
-              </a:ext>
-            </a:extLst>
-          </p:cNvPr>
+          <p:cNvPr id="5" name="フッター プレースホルダー 4"/>
           <p:cNvSpPr>
             <a:spLocks noGrp="1"/>
           </p:cNvSpPr>
@@ -517,13 +465,7 @@
       </p:sp>
       <p:sp>
         <p:nvSpPr>
-          <p:cNvPr id="6" name="スライド番号プレースホルダー 5">
-            <a:extLst>
-              <a:ext uri="{FF2B5EF4-FFF2-40B4-BE49-F238E27FC236}">
-                <a16:creationId xmlns:a16="http://schemas.microsoft.com/office/drawing/2014/main" id="{D66694DD-C991-8158-3B80-D93F8C157CBC}"/>
-              </a:ext>
-            </a:extLst>
-          </p:cNvPr>
+          <p:cNvPr id="6" name="スライド番号プレースホルダー 5"/>
           <p:cNvSpPr>
             <a:spLocks noGrp="1"/>
           </p:cNvSpPr>
@@ -538,18 +480,12 @@
           <a:p>
             <a:fld id="{DBFBB364-F735-42FF-8F06-BCF5AE141D6A}" type="slidenum">
               <a:rPr kumimoji="1" lang="ja-JP" altLang="en-US" smtClean="0"/>
-              <a:t>‹#›</a:t>
             </a:fld>
             <a:endParaRPr kumimoji="1" lang="ja-JP" altLang="en-US"/>
           </a:p>
         </p:txBody>
       </p:sp>
     </p:spTree>
-    <p:extLst>
-      <p:ext uri="{BB962C8B-B14F-4D97-AF65-F5344CB8AC3E}">
-        <p14:creationId xmlns:p14="http://schemas.microsoft.com/office/powerpoint/2010/main" val="1059949376"/>
-      </p:ext>
-    </p:extLst>
   </p:cSld>
   <p:clrMapOvr>
     <a:masterClrMapping/>
@@ -576,13 +512,7 @@
       </p:grpSpPr>
       <p:sp>
         <p:nvSpPr>
-          <p:cNvPr id="2" name="縦書きタイトル 1">
-            <a:extLst>
-              <a:ext uri="{FF2B5EF4-FFF2-40B4-BE49-F238E27FC236}">
-                <a16:creationId xmlns:a16="http://schemas.microsoft.com/office/drawing/2014/main" id="{058B26D6-CBFE-D2D0-DBC6-2AD5B34825C3}"/>
-              </a:ext>
-            </a:extLst>
-          </p:cNvPr>
+          <p:cNvPr id="2" name="縦書きタイトル 1"/>
           <p:cNvSpPr>
             <a:spLocks noGrp="1"/>
           </p:cNvSpPr>
@@ -604,18 +534,13 @@
               <a:rPr kumimoji="1" lang="ja-JP" altLang="en-US"/>
               <a:t>マスター タイトルの書式設定</a:t>
             </a:r>
-          </a:p>
-        </p:txBody>
-      </p:sp>
-      <p:sp>
-        <p:nvSpPr>
-          <p:cNvPr id="3" name="縦書きテキスト プレースホルダー 2">
-            <a:extLst>
-              <a:ext uri="{FF2B5EF4-FFF2-40B4-BE49-F238E27FC236}">
-                <a16:creationId xmlns:a16="http://schemas.microsoft.com/office/drawing/2014/main" id="{65FF3DCC-5407-3ACA-ABD5-25DBABAB8D51}"/>
-              </a:ext>
-            </a:extLst>
-          </p:cNvPr>
+            <a:endParaRPr kumimoji="1" lang="ja-JP" altLang="en-US"/>
+          </a:p>
+        </p:txBody>
+      </p:sp>
+      <p:sp>
+        <p:nvSpPr>
+          <p:cNvPr id="3" name="縦書きテキスト プレースホルダー 2"/>
           <p:cNvSpPr>
             <a:spLocks noGrp="1"/>
           </p:cNvSpPr>
@@ -638,6 +563,7 @@
               <a:rPr kumimoji="1" lang="ja-JP" altLang="en-US"/>
               <a:t>マスター テキストの書式設定</a:t>
             </a:r>
+            <a:endParaRPr kumimoji="1" lang="ja-JP" altLang="en-US"/>
           </a:p>
           <a:p>
             <a:pPr lvl="1"/>
@@ -653,6 +579,7 @@
               <a:rPr kumimoji="1" lang="ja-JP" altLang="en-US"/>
               <a:t>レベル</a:t>
             </a:r>
+            <a:endParaRPr kumimoji="1" lang="ja-JP" altLang="en-US"/>
           </a:p>
           <a:p>
             <a:pPr lvl="2"/>
@@ -668,6 +595,7 @@
               <a:rPr kumimoji="1" lang="ja-JP" altLang="en-US"/>
               <a:t>レベル</a:t>
             </a:r>
+            <a:endParaRPr kumimoji="1" lang="ja-JP" altLang="en-US"/>
           </a:p>
           <a:p>
             <a:pPr lvl="3"/>
@@ -683,6 +611,7 @@
               <a:rPr kumimoji="1" lang="ja-JP" altLang="en-US"/>
               <a:t>レベル</a:t>
             </a:r>
+            <a:endParaRPr kumimoji="1" lang="ja-JP" altLang="en-US"/>
           </a:p>
           <a:p>
             <a:pPr lvl="4"/>
@@ -698,18 +627,13 @@
               <a:rPr kumimoji="1" lang="ja-JP" altLang="en-US"/>
               <a:t>レベル</a:t>
             </a:r>
-          </a:p>
-        </p:txBody>
-      </p:sp>
-      <p:sp>
-        <p:nvSpPr>
-          <p:cNvPr id="4" name="日付プレースホルダー 3">
-            <a:extLst>
-              <a:ext uri="{FF2B5EF4-FFF2-40B4-BE49-F238E27FC236}">
-                <a16:creationId xmlns:a16="http://schemas.microsoft.com/office/drawing/2014/main" id="{B824157E-AB1C-471D-EB62-0737EFEC1F11}"/>
-              </a:ext>
-            </a:extLst>
-          </p:cNvPr>
+            <a:endParaRPr kumimoji="1" lang="ja-JP" altLang="en-US"/>
+          </a:p>
+        </p:txBody>
+      </p:sp>
+      <p:sp>
+        <p:nvSpPr>
+          <p:cNvPr id="4" name="日付プレースホルダー 3"/>
           <p:cNvSpPr>
             <a:spLocks noGrp="1"/>
           </p:cNvSpPr>
@@ -724,7 +648,6 @@
           <a:p>
             <a:fld id="{6D1A64C3-A488-44CE-A3F3-A08F41D23068}" type="datetimeFigureOut">
               <a:rPr kumimoji="1" lang="ja-JP" altLang="en-US" smtClean="0"/>
-              <a:t>2026/7/1</a:t>
             </a:fld>
             <a:endParaRPr kumimoji="1" lang="ja-JP" altLang="en-US"/>
           </a:p>
@@ -732,13 +655,7 @@
       </p:sp>
       <p:sp>
         <p:nvSpPr>
-          <p:cNvPr id="5" name="フッター プレースホルダー 4">
-            <a:extLst>
-              <a:ext uri="{FF2B5EF4-FFF2-40B4-BE49-F238E27FC236}">
-                <a16:creationId xmlns:a16="http://schemas.microsoft.com/office/drawing/2014/main" id="{F7525BF3-E0B0-8D67-399C-052240013CA0}"/>
-              </a:ext>
-            </a:extLst>
-          </p:cNvPr>
+          <p:cNvPr id="5" name="フッター プレースホルダー 4"/>
           <p:cNvSpPr>
             <a:spLocks noGrp="1"/>
           </p:cNvSpPr>
@@ -757,13 +674,7 @@
       </p:sp>
       <p:sp>
         <p:nvSpPr>
-          <p:cNvPr id="6" name="スライド番号プレースホルダー 5">
-            <a:extLst>
-              <a:ext uri="{FF2B5EF4-FFF2-40B4-BE49-F238E27FC236}">
-                <a16:creationId xmlns:a16="http://schemas.microsoft.com/office/drawing/2014/main" id="{F4165197-5C72-E8D2-6F36-742E1F2FC992}"/>
-              </a:ext>
-            </a:extLst>
-          </p:cNvPr>
+          <p:cNvPr id="6" name="スライド番号プレースホルダー 5"/>
           <p:cNvSpPr>
             <a:spLocks noGrp="1"/>
           </p:cNvSpPr>
@@ -778,18 +689,12 @@
           <a:p>
             <a:fld id="{DBFBB364-F735-42FF-8F06-BCF5AE141D6A}" type="slidenum">
               <a:rPr kumimoji="1" lang="ja-JP" altLang="en-US" smtClean="0"/>
-              <a:t>‹#›</a:t>
             </a:fld>
             <a:endParaRPr kumimoji="1" lang="ja-JP" altLang="en-US"/>
           </a:p>
         </p:txBody>
       </p:sp>
     </p:spTree>
-    <p:extLst>
-      <p:ext uri="{BB962C8B-B14F-4D97-AF65-F5344CB8AC3E}">
-        <p14:creationId xmlns:p14="http://schemas.microsoft.com/office/powerpoint/2010/main" val="427553971"/>
-      </p:ext>
-    </p:extLst>
   </p:cSld>
   <p:clrMapOvr>
     <a:masterClrMapping/>
@@ -816,13 +721,7 @@
       </p:grpSpPr>
       <p:sp>
         <p:nvSpPr>
-          <p:cNvPr id="2" name="タイトル 1">
-            <a:extLst>
-              <a:ext uri="{FF2B5EF4-FFF2-40B4-BE49-F238E27FC236}">
-                <a16:creationId xmlns:a16="http://schemas.microsoft.com/office/drawing/2014/main" id="{201C93D7-6029-2627-9947-6FFAFF3AF364}"/>
-              </a:ext>
-            </a:extLst>
-          </p:cNvPr>
+          <p:cNvPr id="2" name="タイトル 1"/>
           <p:cNvSpPr>
             <a:spLocks noGrp="1"/>
           </p:cNvSpPr>
@@ -839,18 +738,13 @@
               <a:rPr kumimoji="1" lang="ja-JP" altLang="en-US"/>
               <a:t>マスター タイトルの書式設定</a:t>
             </a:r>
-          </a:p>
-        </p:txBody>
-      </p:sp>
-      <p:sp>
-        <p:nvSpPr>
-          <p:cNvPr id="3" name="コンテンツ プレースホルダー 2">
-            <a:extLst>
-              <a:ext uri="{FF2B5EF4-FFF2-40B4-BE49-F238E27FC236}">
-                <a16:creationId xmlns:a16="http://schemas.microsoft.com/office/drawing/2014/main" id="{76BD4B36-4C9E-D95F-2CFC-E094F2E82029}"/>
-              </a:ext>
-            </a:extLst>
-          </p:cNvPr>
+            <a:endParaRPr kumimoji="1" lang="ja-JP" altLang="en-US"/>
+          </a:p>
+        </p:txBody>
+      </p:sp>
+      <p:sp>
+        <p:nvSpPr>
+          <p:cNvPr id="3" name="コンテンツ プレースホルダー 2"/>
           <p:cNvSpPr>
             <a:spLocks noGrp="1"/>
           </p:cNvSpPr>
@@ -868,6 +762,7 @@
               <a:rPr kumimoji="1" lang="ja-JP" altLang="en-US"/>
               <a:t>マスター テキストの書式設定</a:t>
             </a:r>
+            <a:endParaRPr kumimoji="1" lang="ja-JP" altLang="en-US"/>
           </a:p>
           <a:p>
             <a:pPr lvl="1"/>
@@ -883,6 +778,7 @@
               <a:rPr kumimoji="1" lang="ja-JP" altLang="en-US"/>
               <a:t>レベル</a:t>
             </a:r>
+            <a:endParaRPr kumimoji="1" lang="ja-JP" altLang="en-US"/>
           </a:p>
           <a:p>
             <a:pPr lvl="2"/>
@@ -898,6 +794,7 @@
               <a:rPr kumimoji="1" lang="ja-JP" altLang="en-US"/>
               <a:t>レベル</a:t>
             </a:r>
+            <a:endParaRPr kumimoji="1" lang="ja-JP" altLang="en-US"/>
           </a:p>
           <a:p>
             <a:pPr lvl="3"/>
@@ -913,6 +810,7 @@
               <a:rPr kumimoji="1" lang="ja-JP" altLang="en-US"/>
               <a:t>レベル</a:t>
             </a:r>
+            <a:endParaRPr kumimoji="1" lang="ja-JP" altLang="en-US"/>
           </a:p>
           <a:p>
             <a:pPr lvl="4"/>
@@ -928,18 +826,13 @@
               <a:rPr kumimoji="1" lang="ja-JP" altLang="en-US"/>
               <a:t>レベル</a:t>
             </a:r>
-          </a:p>
-        </p:txBody>
-      </p:sp>
-      <p:sp>
-        <p:nvSpPr>
-          <p:cNvPr id="4" name="日付プレースホルダー 3">
-            <a:extLst>
-              <a:ext uri="{FF2B5EF4-FFF2-40B4-BE49-F238E27FC236}">
-                <a16:creationId xmlns:a16="http://schemas.microsoft.com/office/drawing/2014/main" id="{BAAFB72C-DBC2-5F23-F5FF-D1825DE80ADD}"/>
-              </a:ext>
-            </a:extLst>
-          </p:cNvPr>
+            <a:endParaRPr kumimoji="1" lang="ja-JP" altLang="en-US"/>
+          </a:p>
+        </p:txBody>
+      </p:sp>
+      <p:sp>
+        <p:nvSpPr>
+          <p:cNvPr id="4" name="日付プレースホルダー 3"/>
           <p:cNvSpPr>
             <a:spLocks noGrp="1"/>
           </p:cNvSpPr>
@@ -954,7 +847,6 @@
           <a:p>
             <a:fld id="{6D1A64C3-A488-44CE-A3F3-A08F41D23068}" type="datetimeFigureOut">
               <a:rPr kumimoji="1" lang="ja-JP" altLang="en-US" smtClean="0"/>
-              <a:t>2026/7/1</a:t>
             </a:fld>
             <a:endParaRPr kumimoji="1" lang="ja-JP" altLang="en-US"/>
           </a:p>
@@ -962,13 +854,7 @@
       </p:sp>
       <p:sp>
         <p:nvSpPr>
-          <p:cNvPr id="5" name="フッター プレースホルダー 4">
-            <a:extLst>
-              <a:ext uri="{FF2B5EF4-FFF2-40B4-BE49-F238E27FC236}">
-                <a16:creationId xmlns:a16="http://schemas.microsoft.com/office/drawing/2014/main" id="{91B118F7-E1A0-E370-3FC0-E1BD79566095}"/>
-              </a:ext>
-            </a:extLst>
-          </p:cNvPr>
+          <p:cNvPr id="5" name="フッター プレースホルダー 4"/>
           <p:cNvSpPr>
             <a:spLocks noGrp="1"/>
           </p:cNvSpPr>
@@ -987,13 +873,7 @@
       </p:sp>
       <p:sp>
         <p:nvSpPr>
-          <p:cNvPr id="6" name="スライド番号プレースホルダー 5">
-            <a:extLst>
-              <a:ext uri="{FF2B5EF4-FFF2-40B4-BE49-F238E27FC236}">
-                <a16:creationId xmlns:a16="http://schemas.microsoft.com/office/drawing/2014/main" id="{EAF5C9C6-75BE-7923-81C2-BCBF749CFE50}"/>
-              </a:ext>
-            </a:extLst>
-          </p:cNvPr>
+          <p:cNvPr id="6" name="スライド番号プレースホルダー 5"/>
           <p:cNvSpPr>
             <a:spLocks noGrp="1"/>
           </p:cNvSpPr>
@@ -1008,18 +888,12 @@
           <a:p>
             <a:fld id="{DBFBB364-F735-42FF-8F06-BCF5AE141D6A}" type="slidenum">
               <a:rPr kumimoji="1" lang="ja-JP" altLang="en-US" smtClean="0"/>
-              <a:t>‹#›</a:t>
             </a:fld>
             <a:endParaRPr kumimoji="1" lang="ja-JP" altLang="en-US"/>
           </a:p>
         </p:txBody>
       </p:sp>
     </p:spTree>
-    <p:extLst>
-      <p:ext uri="{BB962C8B-B14F-4D97-AF65-F5344CB8AC3E}">
-        <p14:creationId xmlns:p14="http://schemas.microsoft.com/office/powerpoint/2010/main" val="2461956741"/>
-      </p:ext>
-    </p:extLst>
   </p:cSld>
   <p:clrMapOvr>
     <a:masterClrMapping/>
@@ -1046,13 +920,7 @@
       </p:grpSpPr>
       <p:sp>
         <p:nvSpPr>
-          <p:cNvPr id="2" name="タイトル 1">
-            <a:extLst>
-              <a:ext uri="{FF2B5EF4-FFF2-40B4-BE49-F238E27FC236}">
-                <a16:creationId xmlns:a16="http://schemas.microsoft.com/office/drawing/2014/main" id="{E3BA4857-3E1D-7C58-9E04-3DBDE22E4C6D}"/>
-              </a:ext>
-            </a:extLst>
-          </p:cNvPr>
+          <p:cNvPr id="2" name="タイトル 1"/>
           <p:cNvSpPr>
             <a:spLocks noGrp="1"/>
           </p:cNvSpPr>
@@ -1078,18 +946,13 @@
               <a:rPr kumimoji="1" lang="ja-JP" altLang="en-US"/>
               <a:t>マスター タイトルの書式設定</a:t>
             </a:r>
-          </a:p>
-        </p:txBody>
-      </p:sp>
-      <p:sp>
-        <p:nvSpPr>
-          <p:cNvPr id="3" name="テキスト プレースホルダー 2">
-            <a:extLst>
-              <a:ext uri="{FF2B5EF4-FFF2-40B4-BE49-F238E27FC236}">
-                <a16:creationId xmlns:a16="http://schemas.microsoft.com/office/drawing/2014/main" id="{7617B89B-D052-6169-0EAE-1E2AF99E024A}"/>
-              </a:ext>
-            </a:extLst>
-          </p:cNvPr>
+            <a:endParaRPr kumimoji="1" lang="ja-JP" altLang="en-US"/>
+          </a:p>
+        </p:txBody>
+      </p:sp>
+      <p:sp>
+        <p:nvSpPr>
+          <p:cNvPr id="3" name="テキスト プレースホルダー 2"/>
           <p:cNvSpPr>
             <a:spLocks noGrp="1"/>
           </p:cNvSpPr>
@@ -1203,18 +1066,13 @@
               <a:rPr kumimoji="1" lang="ja-JP" altLang="en-US"/>
               <a:t>マスター テキストの書式設定</a:t>
             </a:r>
-          </a:p>
-        </p:txBody>
-      </p:sp>
-      <p:sp>
-        <p:nvSpPr>
-          <p:cNvPr id="4" name="日付プレースホルダー 3">
-            <a:extLst>
-              <a:ext uri="{FF2B5EF4-FFF2-40B4-BE49-F238E27FC236}">
-                <a16:creationId xmlns:a16="http://schemas.microsoft.com/office/drawing/2014/main" id="{86E96B3A-A51E-4638-C63B-12F87FDA320D}"/>
-              </a:ext>
-            </a:extLst>
-          </p:cNvPr>
+            <a:endParaRPr kumimoji="1" lang="ja-JP" altLang="en-US"/>
+          </a:p>
+        </p:txBody>
+      </p:sp>
+      <p:sp>
+        <p:nvSpPr>
+          <p:cNvPr id="4" name="日付プレースホルダー 3"/>
           <p:cNvSpPr>
             <a:spLocks noGrp="1"/>
           </p:cNvSpPr>
@@ -1229,7 +1087,6 @@
           <a:p>
             <a:fld id="{6D1A64C3-A488-44CE-A3F3-A08F41D23068}" type="datetimeFigureOut">
               <a:rPr kumimoji="1" lang="ja-JP" altLang="en-US" smtClean="0"/>
-              <a:t>2026/7/1</a:t>
             </a:fld>
             <a:endParaRPr kumimoji="1" lang="ja-JP" altLang="en-US"/>
           </a:p>
@@ -1237,13 +1094,7 @@
       </p:sp>
       <p:sp>
         <p:nvSpPr>
-          <p:cNvPr id="5" name="フッター プレースホルダー 4">
-            <a:extLst>
-              <a:ext uri="{FF2B5EF4-FFF2-40B4-BE49-F238E27FC236}">
-                <a16:creationId xmlns:a16="http://schemas.microsoft.com/office/drawing/2014/main" id="{D8F999F8-9A7B-3920-1A05-1EA015E3174C}"/>
-              </a:ext>
-            </a:extLst>
-          </p:cNvPr>
+          <p:cNvPr id="5" name="フッター プレースホルダー 4"/>
           <p:cNvSpPr>
             <a:spLocks noGrp="1"/>
           </p:cNvSpPr>
@@ -1262,13 +1113,7 @@
       </p:sp>
       <p:sp>
         <p:nvSpPr>
-          <p:cNvPr id="6" name="スライド番号プレースホルダー 5">
-            <a:extLst>
-              <a:ext uri="{FF2B5EF4-FFF2-40B4-BE49-F238E27FC236}">
-                <a16:creationId xmlns:a16="http://schemas.microsoft.com/office/drawing/2014/main" id="{E718075F-1798-FAB9-91CC-15183AD9B009}"/>
-              </a:ext>
-            </a:extLst>
-          </p:cNvPr>
+          <p:cNvPr id="6" name="スライド番号プレースホルダー 5"/>
           <p:cNvSpPr>
             <a:spLocks noGrp="1"/>
           </p:cNvSpPr>
@@ -1283,18 +1128,12 @@
           <a:p>
             <a:fld id="{DBFBB364-F735-42FF-8F06-BCF5AE141D6A}" type="slidenum">
               <a:rPr kumimoji="1" lang="ja-JP" altLang="en-US" smtClean="0"/>
-              <a:t>‹#›</a:t>
             </a:fld>
             <a:endParaRPr kumimoji="1" lang="ja-JP" altLang="en-US"/>
           </a:p>
         </p:txBody>
       </p:sp>
     </p:spTree>
-    <p:extLst>
-      <p:ext uri="{BB962C8B-B14F-4D97-AF65-F5344CB8AC3E}">
-        <p14:creationId xmlns:p14="http://schemas.microsoft.com/office/powerpoint/2010/main" val="2116514426"/>
-      </p:ext>
-    </p:extLst>
   </p:cSld>
   <p:clrMapOvr>
     <a:masterClrMapping/>
@@ -1321,13 +1160,7 @@
       </p:grpSpPr>
       <p:sp>
         <p:nvSpPr>
-          <p:cNvPr id="2" name="タイトル 1">
-            <a:extLst>
-              <a:ext uri="{FF2B5EF4-FFF2-40B4-BE49-F238E27FC236}">
-                <a16:creationId xmlns:a16="http://schemas.microsoft.com/office/drawing/2014/main" id="{F86AF5D4-DA9B-05EA-4240-F3029788B9B6}"/>
-              </a:ext>
-            </a:extLst>
-          </p:cNvPr>
+          <p:cNvPr id="2" name="タイトル 1"/>
           <p:cNvSpPr>
             <a:spLocks noGrp="1"/>
           </p:cNvSpPr>
@@ -1344,18 +1177,13 @@
               <a:rPr kumimoji="1" lang="ja-JP" altLang="en-US"/>
               <a:t>マスター タイトルの書式設定</a:t>
             </a:r>
-          </a:p>
-        </p:txBody>
-      </p:sp>
-      <p:sp>
-        <p:nvSpPr>
-          <p:cNvPr id="3" name="コンテンツ プレースホルダー 2">
-            <a:extLst>
-              <a:ext uri="{FF2B5EF4-FFF2-40B4-BE49-F238E27FC236}">
-                <a16:creationId xmlns:a16="http://schemas.microsoft.com/office/drawing/2014/main" id="{205F506C-17D9-ACBC-F3CD-ADC1FE9764A9}"/>
-              </a:ext>
-            </a:extLst>
-          </p:cNvPr>
+            <a:endParaRPr kumimoji="1" lang="ja-JP" altLang="en-US"/>
+          </a:p>
+        </p:txBody>
+      </p:sp>
+      <p:sp>
+        <p:nvSpPr>
+          <p:cNvPr id="3" name="コンテンツ プレースホルダー 2"/>
           <p:cNvSpPr>
             <a:spLocks noGrp="1"/>
           </p:cNvSpPr>
@@ -1378,6 +1206,7 @@
               <a:rPr kumimoji="1" lang="ja-JP" altLang="en-US"/>
               <a:t>マスター テキストの書式設定</a:t>
             </a:r>
+            <a:endParaRPr kumimoji="1" lang="ja-JP" altLang="en-US"/>
           </a:p>
           <a:p>
             <a:pPr lvl="1"/>
@@ -1393,6 +1222,7 @@
               <a:rPr kumimoji="1" lang="ja-JP" altLang="en-US"/>
               <a:t>レベル</a:t>
             </a:r>
+            <a:endParaRPr kumimoji="1" lang="ja-JP" altLang="en-US"/>
           </a:p>
           <a:p>
             <a:pPr lvl="2"/>
@@ -1408,6 +1238,7 @@
               <a:rPr kumimoji="1" lang="ja-JP" altLang="en-US"/>
               <a:t>レベル</a:t>
             </a:r>
+            <a:endParaRPr kumimoji="1" lang="ja-JP" altLang="en-US"/>
           </a:p>
           <a:p>
             <a:pPr lvl="3"/>
@@ -1423,6 +1254,7 @@
               <a:rPr kumimoji="1" lang="ja-JP" altLang="en-US"/>
               <a:t>レベル</a:t>
             </a:r>
+            <a:endParaRPr kumimoji="1" lang="ja-JP" altLang="en-US"/>
           </a:p>
           <a:p>
             <a:pPr lvl="4"/>
@@ -1438,18 +1270,13 @@
               <a:rPr kumimoji="1" lang="ja-JP" altLang="en-US"/>
               <a:t>レベル</a:t>
             </a:r>
-          </a:p>
-        </p:txBody>
-      </p:sp>
-      <p:sp>
-        <p:nvSpPr>
-          <p:cNvPr id="4" name="コンテンツ プレースホルダー 3">
-            <a:extLst>
-              <a:ext uri="{FF2B5EF4-FFF2-40B4-BE49-F238E27FC236}">
-                <a16:creationId xmlns:a16="http://schemas.microsoft.com/office/drawing/2014/main" id="{F66F6ADB-821A-CD39-5F53-BEA515B1C4BB}"/>
-              </a:ext>
-            </a:extLst>
-          </p:cNvPr>
+            <a:endParaRPr kumimoji="1" lang="ja-JP" altLang="en-US"/>
+          </a:p>
+        </p:txBody>
+      </p:sp>
+      <p:sp>
+        <p:nvSpPr>
+          <p:cNvPr id="4" name="コンテンツ プレースホルダー 3"/>
           <p:cNvSpPr>
             <a:spLocks noGrp="1"/>
           </p:cNvSpPr>
@@ -1472,6 +1299,7 @@
               <a:rPr kumimoji="1" lang="ja-JP" altLang="en-US"/>
               <a:t>マスター テキストの書式設定</a:t>
             </a:r>
+            <a:endParaRPr kumimoji="1" lang="ja-JP" altLang="en-US"/>
           </a:p>
           <a:p>
             <a:pPr lvl="1"/>
@@ -1487,6 +1315,7 @@
               <a:rPr kumimoji="1" lang="ja-JP" altLang="en-US"/>
               <a:t>レベル</a:t>
             </a:r>
+            <a:endParaRPr kumimoji="1" lang="ja-JP" altLang="en-US"/>
           </a:p>
           <a:p>
             <a:pPr lvl="2"/>
@@ -1502,6 +1331,7 @@
               <a:rPr kumimoji="1" lang="ja-JP" altLang="en-US"/>
               <a:t>レベル</a:t>
             </a:r>
+            <a:endParaRPr kumimoji="1" lang="ja-JP" altLang="en-US"/>
           </a:p>
           <a:p>
             <a:pPr lvl="3"/>
@@ -1517,6 +1347,7 @@
               <a:rPr kumimoji="1" lang="ja-JP" altLang="en-US"/>
               <a:t>レベル</a:t>
             </a:r>
+            <a:endParaRPr kumimoji="1" lang="ja-JP" altLang="en-US"/>
           </a:p>
           <a:p>
             <a:pPr lvl="4"/>
@@ -1532,18 +1363,13 @@
               <a:rPr kumimoji="1" lang="ja-JP" altLang="en-US"/>
               <a:t>レベル</a:t>
             </a:r>
-          </a:p>
-        </p:txBody>
-      </p:sp>
-      <p:sp>
-        <p:nvSpPr>
-          <p:cNvPr id="5" name="日付プレースホルダー 4">
-            <a:extLst>
-              <a:ext uri="{FF2B5EF4-FFF2-40B4-BE49-F238E27FC236}">
-                <a16:creationId xmlns:a16="http://schemas.microsoft.com/office/drawing/2014/main" id="{F6517425-3093-5A77-7F16-05E1EF005844}"/>
-              </a:ext>
-            </a:extLst>
-          </p:cNvPr>
+            <a:endParaRPr kumimoji="1" lang="ja-JP" altLang="en-US"/>
+          </a:p>
+        </p:txBody>
+      </p:sp>
+      <p:sp>
+        <p:nvSpPr>
+          <p:cNvPr id="5" name="日付プレースホルダー 4"/>
           <p:cNvSpPr>
             <a:spLocks noGrp="1"/>
           </p:cNvSpPr>
@@ -1558,7 +1384,6 @@
           <a:p>
             <a:fld id="{6D1A64C3-A488-44CE-A3F3-A08F41D23068}" type="datetimeFigureOut">
               <a:rPr kumimoji="1" lang="ja-JP" altLang="en-US" smtClean="0"/>
-              <a:t>2026/7/1</a:t>
             </a:fld>
             <a:endParaRPr kumimoji="1" lang="ja-JP" altLang="en-US"/>
           </a:p>
@@ -1566,13 +1391,7 @@
       </p:sp>
       <p:sp>
         <p:nvSpPr>
-          <p:cNvPr id="6" name="フッター プレースホルダー 5">
-            <a:extLst>
-              <a:ext uri="{FF2B5EF4-FFF2-40B4-BE49-F238E27FC236}">
-                <a16:creationId xmlns:a16="http://schemas.microsoft.com/office/drawing/2014/main" id="{DD29344F-C80C-1092-5EC7-4DE6A390CF92}"/>
-              </a:ext>
-            </a:extLst>
-          </p:cNvPr>
+          <p:cNvPr id="6" name="フッター プレースホルダー 5"/>
           <p:cNvSpPr>
             <a:spLocks noGrp="1"/>
           </p:cNvSpPr>
@@ -1591,13 +1410,7 @@
       </p:sp>
       <p:sp>
         <p:nvSpPr>
-          <p:cNvPr id="7" name="スライド番号プレースホルダー 6">
-            <a:extLst>
-              <a:ext uri="{FF2B5EF4-FFF2-40B4-BE49-F238E27FC236}">
-                <a16:creationId xmlns:a16="http://schemas.microsoft.com/office/drawing/2014/main" id="{0F94FBEA-B3AA-4586-B959-C35B1737E815}"/>
-              </a:ext>
-            </a:extLst>
-          </p:cNvPr>
+          <p:cNvPr id="7" name="スライド番号プレースホルダー 6"/>
           <p:cNvSpPr>
             <a:spLocks noGrp="1"/>
           </p:cNvSpPr>
@@ -1612,18 +1425,12 @@
           <a:p>
             <a:fld id="{DBFBB364-F735-42FF-8F06-BCF5AE141D6A}" type="slidenum">
               <a:rPr kumimoji="1" lang="ja-JP" altLang="en-US" smtClean="0"/>
-              <a:t>‹#›</a:t>
             </a:fld>
             <a:endParaRPr kumimoji="1" lang="ja-JP" altLang="en-US"/>
           </a:p>
         </p:txBody>
       </p:sp>
     </p:spTree>
-    <p:extLst>
-      <p:ext uri="{BB962C8B-B14F-4D97-AF65-F5344CB8AC3E}">
-        <p14:creationId xmlns:p14="http://schemas.microsoft.com/office/powerpoint/2010/main" val="419976015"/>
-      </p:ext>
-    </p:extLst>
   </p:cSld>
   <p:clrMapOvr>
     <a:masterClrMapping/>
@@ -1650,13 +1457,7 @@
       </p:grpSpPr>
       <p:sp>
         <p:nvSpPr>
-          <p:cNvPr id="2" name="タイトル 1">
-            <a:extLst>
-              <a:ext uri="{FF2B5EF4-FFF2-40B4-BE49-F238E27FC236}">
-                <a16:creationId xmlns:a16="http://schemas.microsoft.com/office/drawing/2014/main" id="{82C878E5-E3DD-EADF-1922-634CCF9686AB}"/>
-              </a:ext>
-            </a:extLst>
-          </p:cNvPr>
+          <p:cNvPr id="2" name="タイトル 1"/>
           <p:cNvSpPr>
             <a:spLocks noGrp="1"/>
           </p:cNvSpPr>
@@ -1678,18 +1479,13 @@
               <a:rPr kumimoji="1" lang="ja-JP" altLang="en-US"/>
               <a:t>マスター タイトルの書式設定</a:t>
             </a:r>
-          </a:p>
-        </p:txBody>
-      </p:sp>
-      <p:sp>
-        <p:nvSpPr>
-          <p:cNvPr id="3" name="テキスト プレースホルダー 2">
-            <a:extLst>
-              <a:ext uri="{FF2B5EF4-FFF2-40B4-BE49-F238E27FC236}">
-                <a16:creationId xmlns:a16="http://schemas.microsoft.com/office/drawing/2014/main" id="{D1B8D036-0BA0-5455-5D2E-2A225926E3A8}"/>
-              </a:ext>
-            </a:extLst>
-          </p:cNvPr>
+            <a:endParaRPr kumimoji="1" lang="ja-JP" altLang="en-US"/>
+          </a:p>
+        </p:txBody>
+      </p:sp>
+      <p:sp>
+        <p:nvSpPr>
+          <p:cNvPr id="3" name="テキスト プレースホルダー 2"/>
           <p:cNvSpPr>
             <a:spLocks noGrp="1"/>
           </p:cNvSpPr>
@@ -1749,18 +1545,13 @@
               <a:rPr kumimoji="1" lang="ja-JP" altLang="en-US"/>
               <a:t>マスター テキストの書式設定</a:t>
             </a:r>
-          </a:p>
-        </p:txBody>
-      </p:sp>
-      <p:sp>
-        <p:nvSpPr>
-          <p:cNvPr id="4" name="コンテンツ プレースホルダー 3">
-            <a:extLst>
-              <a:ext uri="{FF2B5EF4-FFF2-40B4-BE49-F238E27FC236}">
-                <a16:creationId xmlns:a16="http://schemas.microsoft.com/office/drawing/2014/main" id="{7CDE41CC-CFE1-FB33-499F-E9CBB239E599}"/>
-              </a:ext>
-            </a:extLst>
-          </p:cNvPr>
+            <a:endParaRPr kumimoji="1" lang="ja-JP" altLang="en-US"/>
+          </a:p>
+        </p:txBody>
+      </p:sp>
+      <p:sp>
+        <p:nvSpPr>
+          <p:cNvPr id="4" name="コンテンツ プレースホルダー 3"/>
           <p:cNvSpPr>
             <a:spLocks noGrp="1"/>
           </p:cNvSpPr>
@@ -1783,6 +1574,7 @@
               <a:rPr kumimoji="1" lang="ja-JP" altLang="en-US"/>
               <a:t>マスター テキストの書式設定</a:t>
             </a:r>
+            <a:endParaRPr kumimoji="1" lang="ja-JP" altLang="en-US"/>
           </a:p>
           <a:p>
             <a:pPr lvl="1"/>
@@ -1798,6 +1590,7 @@
               <a:rPr kumimoji="1" lang="ja-JP" altLang="en-US"/>
               <a:t>レベル</a:t>
             </a:r>
+            <a:endParaRPr kumimoji="1" lang="ja-JP" altLang="en-US"/>
           </a:p>
           <a:p>
             <a:pPr lvl="2"/>
@@ -1813,6 +1606,7 @@
               <a:rPr kumimoji="1" lang="ja-JP" altLang="en-US"/>
               <a:t>レベル</a:t>
             </a:r>
+            <a:endParaRPr kumimoji="1" lang="ja-JP" altLang="en-US"/>
           </a:p>
           <a:p>
             <a:pPr lvl="3"/>
@@ -1828,6 +1622,7 @@
               <a:rPr kumimoji="1" lang="ja-JP" altLang="en-US"/>
               <a:t>レベル</a:t>
             </a:r>
+            <a:endParaRPr kumimoji="1" lang="ja-JP" altLang="en-US"/>
           </a:p>
           <a:p>
             <a:pPr lvl="4"/>
@@ -1843,18 +1638,13 @@
               <a:rPr kumimoji="1" lang="ja-JP" altLang="en-US"/>
               <a:t>レベル</a:t>
             </a:r>
-          </a:p>
-        </p:txBody>
-      </p:sp>
-      <p:sp>
-        <p:nvSpPr>
-          <p:cNvPr id="5" name="テキスト プレースホルダー 4">
-            <a:extLst>
-              <a:ext uri="{FF2B5EF4-FFF2-40B4-BE49-F238E27FC236}">
-                <a16:creationId xmlns:a16="http://schemas.microsoft.com/office/drawing/2014/main" id="{BFF2575C-C22D-2933-D885-E386185D8CD0}"/>
-              </a:ext>
-            </a:extLst>
-          </p:cNvPr>
+            <a:endParaRPr kumimoji="1" lang="ja-JP" altLang="en-US"/>
+          </a:p>
+        </p:txBody>
+      </p:sp>
+      <p:sp>
+        <p:nvSpPr>
+          <p:cNvPr id="5" name="テキスト プレースホルダー 4"/>
           <p:cNvSpPr>
             <a:spLocks noGrp="1"/>
           </p:cNvSpPr>
@@ -1914,18 +1704,13 @@
               <a:rPr kumimoji="1" lang="ja-JP" altLang="en-US"/>
               <a:t>マスター テキストの書式設定</a:t>
             </a:r>
-          </a:p>
-        </p:txBody>
-      </p:sp>
-      <p:sp>
-        <p:nvSpPr>
-          <p:cNvPr id="6" name="コンテンツ プレースホルダー 5">
-            <a:extLst>
-              <a:ext uri="{FF2B5EF4-FFF2-40B4-BE49-F238E27FC236}">
-                <a16:creationId xmlns:a16="http://schemas.microsoft.com/office/drawing/2014/main" id="{A57A6D63-3332-E5C0-CB2E-583FB8EE7783}"/>
-              </a:ext>
-            </a:extLst>
-          </p:cNvPr>
+            <a:endParaRPr kumimoji="1" lang="ja-JP" altLang="en-US"/>
+          </a:p>
+        </p:txBody>
+      </p:sp>
+      <p:sp>
+        <p:nvSpPr>
+          <p:cNvPr id="6" name="コンテンツ プレースホルダー 5"/>
           <p:cNvSpPr>
             <a:spLocks noGrp="1"/>
           </p:cNvSpPr>
@@ -1948,6 +1733,7 @@
               <a:rPr kumimoji="1" lang="ja-JP" altLang="en-US"/>
               <a:t>マスター テキストの書式設定</a:t>
             </a:r>
+            <a:endParaRPr kumimoji="1" lang="ja-JP" altLang="en-US"/>
           </a:p>
           <a:p>
             <a:pPr lvl="1"/>
@@ -1963,6 +1749,7 @@
               <a:rPr kumimoji="1" lang="ja-JP" altLang="en-US"/>
               <a:t>レベル</a:t>
             </a:r>
+            <a:endParaRPr kumimoji="1" lang="ja-JP" altLang="en-US"/>
           </a:p>
           <a:p>
             <a:pPr lvl="2"/>
@@ -1978,6 +1765,7 @@
               <a:rPr kumimoji="1" lang="ja-JP" altLang="en-US"/>
               <a:t>レベル</a:t>
             </a:r>
+            <a:endParaRPr kumimoji="1" lang="ja-JP" altLang="en-US"/>
           </a:p>
           <a:p>
             <a:pPr lvl="3"/>
@@ -1993,6 +1781,7 @@
               <a:rPr kumimoji="1" lang="ja-JP" altLang="en-US"/>
               <a:t>レベル</a:t>
             </a:r>
+            <a:endParaRPr kumimoji="1" lang="ja-JP" altLang="en-US"/>
           </a:p>
           <a:p>
             <a:pPr lvl="4"/>
@@ -2008,18 +1797,13 @@
               <a:rPr kumimoji="1" lang="ja-JP" altLang="en-US"/>
               <a:t>レベル</a:t>
             </a:r>
-          </a:p>
-        </p:txBody>
-      </p:sp>
-      <p:sp>
-        <p:nvSpPr>
-          <p:cNvPr id="7" name="日付プレースホルダー 6">
-            <a:extLst>
-              <a:ext uri="{FF2B5EF4-FFF2-40B4-BE49-F238E27FC236}">
-                <a16:creationId xmlns:a16="http://schemas.microsoft.com/office/drawing/2014/main" id="{0962C6FC-EC3A-4C67-9FF4-0A4A5C4F472F}"/>
-              </a:ext>
-            </a:extLst>
-          </p:cNvPr>
+            <a:endParaRPr kumimoji="1" lang="ja-JP" altLang="en-US"/>
+          </a:p>
+        </p:txBody>
+      </p:sp>
+      <p:sp>
+        <p:nvSpPr>
+          <p:cNvPr id="7" name="日付プレースホルダー 6"/>
           <p:cNvSpPr>
             <a:spLocks noGrp="1"/>
           </p:cNvSpPr>
@@ -2034,7 +1818,6 @@
           <a:p>
             <a:fld id="{6D1A64C3-A488-44CE-A3F3-A08F41D23068}" type="datetimeFigureOut">
               <a:rPr kumimoji="1" lang="ja-JP" altLang="en-US" smtClean="0"/>
-              <a:t>2026/7/1</a:t>
             </a:fld>
             <a:endParaRPr kumimoji="1" lang="ja-JP" altLang="en-US"/>
           </a:p>
@@ -2042,13 +1825,7 @@
       </p:sp>
       <p:sp>
         <p:nvSpPr>
-          <p:cNvPr id="8" name="フッター プレースホルダー 7">
-            <a:extLst>
-              <a:ext uri="{FF2B5EF4-FFF2-40B4-BE49-F238E27FC236}">
-                <a16:creationId xmlns:a16="http://schemas.microsoft.com/office/drawing/2014/main" id="{25B21DB1-C7CD-79F9-BF44-B17AB83663CF}"/>
-              </a:ext>
-            </a:extLst>
-          </p:cNvPr>
+          <p:cNvPr id="8" name="フッター プレースホルダー 7"/>
           <p:cNvSpPr>
             <a:spLocks noGrp="1"/>
           </p:cNvSpPr>
@@ -2067,13 +1844,7 @@
       </p:sp>
       <p:sp>
         <p:nvSpPr>
-          <p:cNvPr id="9" name="スライド番号プレースホルダー 8">
-            <a:extLst>
-              <a:ext uri="{FF2B5EF4-FFF2-40B4-BE49-F238E27FC236}">
-                <a16:creationId xmlns:a16="http://schemas.microsoft.com/office/drawing/2014/main" id="{D936043E-43BA-628D-13DA-9949DDF14E36}"/>
-              </a:ext>
-            </a:extLst>
-          </p:cNvPr>
+          <p:cNvPr id="9" name="スライド番号プレースホルダー 8"/>
           <p:cNvSpPr>
             <a:spLocks noGrp="1"/>
           </p:cNvSpPr>
@@ -2088,18 +1859,12 @@
           <a:p>
             <a:fld id="{DBFBB364-F735-42FF-8F06-BCF5AE141D6A}" type="slidenum">
               <a:rPr kumimoji="1" lang="ja-JP" altLang="en-US" smtClean="0"/>
-              <a:t>‹#›</a:t>
             </a:fld>
             <a:endParaRPr kumimoji="1" lang="ja-JP" altLang="en-US"/>
           </a:p>
         </p:txBody>
       </p:sp>
     </p:spTree>
-    <p:extLst>
-      <p:ext uri="{BB962C8B-B14F-4D97-AF65-F5344CB8AC3E}">
-        <p14:creationId xmlns:p14="http://schemas.microsoft.com/office/powerpoint/2010/main" val="1214089139"/>
-      </p:ext>
-    </p:extLst>
   </p:cSld>
   <p:clrMapOvr>
     <a:masterClrMapping/>
@@ -2126,13 +1891,7 @@
       </p:grpSpPr>
       <p:sp>
         <p:nvSpPr>
-          <p:cNvPr id="2" name="タイトル 1">
-            <a:extLst>
-              <a:ext uri="{FF2B5EF4-FFF2-40B4-BE49-F238E27FC236}">
-                <a16:creationId xmlns:a16="http://schemas.microsoft.com/office/drawing/2014/main" id="{A697F014-860B-53E4-CB46-7428EFCE4DAC}"/>
-              </a:ext>
-            </a:extLst>
-          </p:cNvPr>
+          <p:cNvPr id="2" name="タイトル 1"/>
           <p:cNvSpPr>
             <a:spLocks noGrp="1"/>
           </p:cNvSpPr>
@@ -2149,18 +1908,13 @@
               <a:rPr kumimoji="1" lang="ja-JP" altLang="en-US"/>
               <a:t>マスター タイトルの書式設定</a:t>
             </a:r>
-          </a:p>
-        </p:txBody>
-      </p:sp>
-      <p:sp>
-        <p:nvSpPr>
-          <p:cNvPr id="3" name="日付プレースホルダー 2">
-            <a:extLst>
-              <a:ext uri="{FF2B5EF4-FFF2-40B4-BE49-F238E27FC236}">
-                <a16:creationId xmlns:a16="http://schemas.microsoft.com/office/drawing/2014/main" id="{3180D4F7-BBDF-489B-9AC4-0C0A80295290}"/>
-              </a:ext>
-            </a:extLst>
-          </p:cNvPr>
+            <a:endParaRPr kumimoji="1" lang="ja-JP" altLang="en-US"/>
+          </a:p>
+        </p:txBody>
+      </p:sp>
+      <p:sp>
+        <p:nvSpPr>
+          <p:cNvPr id="3" name="日付プレースホルダー 2"/>
           <p:cNvSpPr>
             <a:spLocks noGrp="1"/>
           </p:cNvSpPr>
@@ -2175,7 +1929,6 @@
           <a:p>
             <a:fld id="{6D1A64C3-A488-44CE-A3F3-A08F41D23068}" type="datetimeFigureOut">
               <a:rPr kumimoji="1" lang="ja-JP" altLang="en-US" smtClean="0"/>
-              <a:t>2026/7/1</a:t>
             </a:fld>
             <a:endParaRPr kumimoji="1" lang="ja-JP" altLang="en-US"/>
           </a:p>
@@ -2183,13 +1936,7 @@
       </p:sp>
       <p:sp>
         <p:nvSpPr>
-          <p:cNvPr id="4" name="フッター プレースホルダー 3">
-            <a:extLst>
-              <a:ext uri="{FF2B5EF4-FFF2-40B4-BE49-F238E27FC236}">
-                <a16:creationId xmlns:a16="http://schemas.microsoft.com/office/drawing/2014/main" id="{54605BC6-854B-CE1B-E69D-910355363F3B}"/>
-              </a:ext>
-            </a:extLst>
-          </p:cNvPr>
+          <p:cNvPr id="4" name="フッター プレースホルダー 3"/>
           <p:cNvSpPr>
             <a:spLocks noGrp="1"/>
           </p:cNvSpPr>
@@ -2208,13 +1955,7 @@
       </p:sp>
       <p:sp>
         <p:nvSpPr>
-          <p:cNvPr id="5" name="スライド番号プレースホルダー 4">
-            <a:extLst>
-              <a:ext uri="{FF2B5EF4-FFF2-40B4-BE49-F238E27FC236}">
-                <a16:creationId xmlns:a16="http://schemas.microsoft.com/office/drawing/2014/main" id="{6436D552-7DC9-B1A0-446B-A9D52F3009D9}"/>
-              </a:ext>
-            </a:extLst>
-          </p:cNvPr>
+          <p:cNvPr id="5" name="スライド番号プレースホルダー 4"/>
           <p:cNvSpPr>
             <a:spLocks noGrp="1"/>
           </p:cNvSpPr>
@@ -2229,18 +1970,12 @@
           <a:p>
             <a:fld id="{DBFBB364-F735-42FF-8F06-BCF5AE141D6A}" type="slidenum">
               <a:rPr kumimoji="1" lang="ja-JP" altLang="en-US" smtClean="0"/>
-              <a:t>‹#›</a:t>
             </a:fld>
             <a:endParaRPr kumimoji="1" lang="ja-JP" altLang="en-US"/>
           </a:p>
         </p:txBody>
       </p:sp>
     </p:spTree>
-    <p:extLst>
-      <p:ext uri="{BB962C8B-B14F-4D97-AF65-F5344CB8AC3E}">
-        <p14:creationId xmlns:p14="http://schemas.microsoft.com/office/powerpoint/2010/main" val="2299901330"/>
-      </p:ext>
-    </p:extLst>
   </p:cSld>
   <p:clrMapOvr>
     <a:masterClrMapping/>
@@ -2267,13 +2002,7 @@
       </p:grpSpPr>
       <p:sp>
         <p:nvSpPr>
-          <p:cNvPr id="2" name="日付プレースホルダー 1">
-            <a:extLst>
-              <a:ext uri="{FF2B5EF4-FFF2-40B4-BE49-F238E27FC236}">
-                <a16:creationId xmlns:a16="http://schemas.microsoft.com/office/drawing/2014/main" id="{C95413CA-7810-F1C5-5074-487D9CD9E9FA}"/>
-              </a:ext>
-            </a:extLst>
-          </p:cNvPr>
+          <p:cNvPr id="2" name="日付プレースホルダー 1"/>
           <p:cNvSpPr>
             <a:spLocks noGrp="1"/>
           </p:cNvSpPr>
@@ -2288,7 +2017,6 @@
           <a:p>
             <a:fld id="{6D1A64C3-A488-44CE-A3F3-A08F41D23068}" type="datetimeFigureOut">
               <a:rPr kumimoji="1" lang="ja-JP" altLang="en-US" smtClean="0"/>
-              <a:t>2026/7/1</a:t>
             </a:fld>
             <a:endParaRPr kumimoji="1" lang="ja-JP" altLang="en-US"/>
           </a:p>
@@ -2296,13 +2024,7 @@
       </p:sp>
       <p:sp>
         <p:nvSpPr>
-          <p:cNvPr id="3" name="フッター プレースホルダー 2">
-            <a:extLst>
-              <a:ext uri="{FF2B5EF4-FFF2-40B4-BE49-F238E27FC236}">
-                <a16:creationId xmlns:a16="http://schemas.microsoft.com/office/drawing/2014/main" id="{3CD7C813-F6CC-DEE3-796C-D5A13A6F8A11}"/>
-              </a:ext>
-            </a:extLst>
-          </p:cNvPr>
+          <p:cNvPr id="3" name="フッター プレースホルダー 2"/>
           <p:cNvSpPr>
             <a:spLocks noGrp="1"/>
           </p:cNvSpPr>
@@ -2321,13 +2043,7 @@
       </p:sp>
       <p:sp>
         <p:nvSpPr>
-          <p:cNvPr id="4" name="スライド番号プレースホルダー 3">
-            <a:extLst>
-              <a:ext uri="{FF2B5EF4-FFF2-40B4-BE49-F238E27FC236}">
-                <a16:creationId xmlns:a16="http://schemas.microsoft.com/office/drawing/2014/main" id="{BC239DBC-8982-046E-89DA-6B334BC8FEE5}"/>
-              </a:ext>
-            </a:extLst>
-          </p:cNvPr>
+          <p:cNvPr id="4" name="スライド番号プレースホルダー 3"/>
           <p:cNvSpPr>
             <a:spLocks noGrp="1"/>
           </p:cNvSpPr>
@@ -2342,18 +2058,12 @@
           <a:p>
             <a:fld id="{DBFBB364-F735-42FF-8F06-BCF5AE141D6A}" type="slidenum">
               <a:rPr kumimoji="1" lang="ja-JP" altLang="en-US" smtClean="0"/>
-              <a:t>‹#›</a:t>
             </a:fld>
             <a:endParaRPr kumimoji="1" lang="ja-JP" altLang="en-US"/>
           </a:p>
         </p:txBody>
       </p:sp>
     </p:spTree>
-    <p:extLst>
-      <p:ext uri="{BB962C8B-B14F-4D97-AF65-F5344CB8AC3E}">
-        <p14:creationId xmlns:p14="http://schemas.microsoft.com/office/powerpoint/2010/main" val="2201428274"/>
-      </p:ext>
-    </p:extLst>
   </p:cSld>
   <p:clrMapOvr>
     <a:masterClrMapping/>
@@ -2380,13 +2090,7 @@
       </p:grpSpPr>
       <p:sp>
         <p:nvSpPr>
-          <p:cNvPr id="2" name="タイトル 1">
-            <a:extLst>
-              <a:ext uri="{FF2B5EF4-FFF2-40B4-BE49-F238E27FC236}">
-                <a16:creationId xmlns:a16="http://schemas.microsoft.com/office/drawing/2014/main" id="{29FE51DC-FD39-55D6-7060-7A75C3F64EB9}"/>
-              </a:ext>
-            </a:extLst>
-          </p:cNvPr>
+          <p:cNvPr id="2" name="タイトル 1"/>
           <p:cNvSpPr>
             <a:spLocks noGrp="1"/>
           </p:cNvSpPr>
@@ -2412,18 +2116,13 @@
               <a:rPr kumimoji="1" lang="ja-JP" altLang="en-US"/>
               <a:t>マスター タイトルの書式設定</a:t>
             </a:r>
-          </a:p>
-        </p:txBody>
-      </p:sp>
-      <p:sp>
-        <p:nvSpPr>
-          <p:cNvPr id="3" name="コンテンツ プレースホルダー 2">
-            <a:extLst>
-              <a:ext uri="{FF2B5EF4-FFF2-40B4-BE49-F238E27FC236}">
-                <a16:creationId xmlns:a16="http://schemas.microsoft.com/office/drawing/2014/main" id="{79789A32-7709-2E1A-490F-67F2CD3980E9}"/>
-              </a:ext>
-            </a:extLst>
-          </p:cNvPr>
+            <a:endParaRPr kumimoji="1" lang="ja-JP" altLang="en-US"/>
+          </a:p>
+        </p:txBody>
+      </p:sp>
+      <p:sp>
+        <p:nvSpPr>
+          <p:cNvPr id="3" name="コンテンツ プレースホルダー 2"/>
           <p:cNvSpPr>
             <a:spLocks noGrp="1"/>
           </p:cNvSpPr>
@@ -2474,6 +2173,7 @@
               <a:rPr kumimoji="1" lang="ja-JP" altLang="en-US"/>
               <a:t>マスター テキストの書式設定</a:t>
             </a:r>
+            <a:endParaRPr kumimoji="1" lang="ja-JP" altLang="en-US"/>
           </a:p>
           <a:p>
             <a:pPr lvl="1"/>
@@ -2489,6 +2189,7 @@
               <a:rPr kumimoji="1" lang="ja-JP" altLang="en-US"/>
               <a:t>レベル</a:t>
             </a:r>
+            <a:endParaRPr kumimoji="1" lang="ja-JP" altLang="en-US"/>
           </a:p>
           <a:p>
             <a:pPr lvl="2"/>
@@ -2504,6 +2205,7 @@
               <a:rPr kumimoji="1" lang="ja-JP" altLang="en-US"/>
               <a:t>レベル</a:t>
             </a:r>
+            <a:endParaRPr kumimoji="1" lang="ja-JP" altLang="en-US"/>
           </a:p>
           <a:p>
             <a:pPr lvl="3"/>
@@ -2519,6 +2221,7 @@
               <a:rPr kumimoji="1" lang="ja-JP" altLang="en-US"/>
               <a:t>レベル</a:t>
             </a:r>
+            <a:endParaRPr kumimoji="1" lang="ja-JP" altLang="en-US"/>
           </a:p>
           <a:p>
             <a:pPr lvl="4"/>
@@ -2534,18 +2237,13 @@
               <a:rPr kumimoji="1" lang="ja-JP" altLang="en-US"/>
               <a:t>レベル</a:t>
             </a:r>
-          </a:p>
-        </p:txBody>
-      </p:sp>
-      <p:sp>
-        <p:nvSpPr>
-          <p:cNvPr id="4" name="テキスト プレースホルダー 3">
-            <a:extLst>
-              <a:ext uri="{FF2B5EF4-FFF2-40B4-BE49-F238E27FC236}">
-                <a16:creationId xmlns:a16="http://schemas.microsoft.com/office/drawing/2014/main" id="{B1A51DA9-A7E9-EBCE-12FA-064671AE66AA}"/>
-              </a:ext>
-            </a:extLst>
-          </p:cNvPr>
+            <a:endParaRPr kumimoji="1" lang="ja-JP" altLang="en-US"/>
+          </a:p>
+        </p:txBody>
+      </p:sp>
+      <p:sp>
+        <p:nvSpPr>
+          <p:cNvPr id="4" name="テキスト プレースホルダー 3"/>
           <p:cNvSpPr>
             <a:spLocks noGrp="1"/>
           </p:cNvSpPr>
@@ -2605,18 +2303,13 @@
               <a:rPr kumimoji="1" lang="ja-JP" altLang="en-US"/>
               <a:t>マスター テキストの書式設定</a:t>
             </a:r>
-          </a:p>
-        </p:txBody>
-      </p:sp>
-      <p:sp>
-        <p:nvSpPr>
-          <p:cNvPr id="5" name="日付プレースホルダー 4">
-            <a:extLst>
-              <a:ext uri="{FF2B5EF4-FFF2-40B4-BE49-F238E27FC236}">
-                <a16:creationId xmlns:a16="http://schemas.microsoft.com/office/drawing/2014/main" id="{D4113808-F6CE-748C-9F43-EC85945CA9E9}"/>
-              </a:ext>
-            </a:extLst>
-          </p:cNvPr>
+            <a:endParaRPr kumimoji="1" lang="ja-JP" altLang="en-US"/>
+          </a:p>
+        </p:txBody>
+      </p:sp>
+      <p:sp>
+        <p:nvSpPr>
+          <p:cNvPr id="5" name="日付プレースホルダー 4"/>
           <p:cNvSpPr>
             <a:spLocks noGrp="1"/>
           </p:cNvSpPr>
@@ -2631,7 +2324,6 @@
           <a:p>
             <a:fld id="{6D1A64C3-A488-44CE-A3F3-A08F41D23068}" type="datetimeFigureOut">
               <a:rPr kumimoji="1" lang="ja-JP" altLang="en-US" smtClean="0"/>
-              <a:t>2026/7/1</a:t>
             </a:fld>
             <a:endParaRPr kumimoji="1" lang="ja-JP" altLang="en-US"/>
           </a:p>
@@ -2639,13 +2331,7 @@
       </p:sp>
       <p:sp>
         <p:nvSpPr>
-          <p:cNvPr id="6" name="フッター プレースホルダー 5">
-            <a:extLst>
-              <a:ext uri="{FF2B5EF4-FFF2-40B4-BE49-F238E27FC236}">
-                <a16:creationId xmlns:a16="http://schemas.microsoft.com/office/drawing/2014/main" id="{D3EFF4F8-59D0-3722-3CB7-3EC022757426}"/>
-              </a:ext>
-            </a:extLst>
-          </p:cNvPr>
+          <p:cNvPr id="6" name="フッター プレースホルダー 5"/>
           <p:cNvSpPr>
             <a:spLocks noGrp="1"/>
           </p:cNvSpPr>
@@ -2664,13 +2350,7 @@
       </p:sp>
       <p:sp>
         <p:nvSpPr>
-          <p:cNvPr id="7" name="スライド番号プレースホルダー 6">
-            <a:extLst>
-              <a:ext uri="{FF2B5EF4-FFF2-40B4-BE49-F238E27FC236}">
-                <a16:creationId xmlns:a16="http://schemas.microsoft.com/office/drawing/2014/main" id="{D3579B62-0E0D-8D78-0593-18B99EA7D141}"/>
-              </a:ext>
-            </a:extLst>
-          </p:cNvPr>
+          <p:cNvPr id="7" name="スライド番号プレースホルダー 6"/>
           <p:cNvSpPr>
             <a:spLocks noGrp="1"/>
           </p:cNvSpPr>
@@ -2685,18 +2365,12 @@
           <a:p>
             <a:fld id="{DBFBB364-F735-42FF-8F06-BCF5AE141D6A}" type="slidenum">
               <a:rPr kumimoji="1" lang="ja-JP" altLang="en-US" smtClean="0"/>
-              <a:t>‹#›</a:t>
             </a:fld>
             <a:endParaRPr kumimoji="1" lang="ja-JP" altLang="en-US"/>
           </a:p>
         </p:txBody>
       </p:sp>
     </p:spTree>
-    <p:extLst>
-      <p:ext uri="{BB962C8B-B14F-4D97-AF65-F5344CB8AC3E}">
-        <p14:creationId xmlns:p14="http://schemas.microsoft.com/office/powerpoint/2010/main" val="3039910731"/>
-      </p:ext>
-    </p:extLst>
   </p:cSld>
   <p:clrMapOvr>
     <a:masterClrMapping/>
@@ -2723,13 +2397,7 @@
       </p:grpSpPr>
       <p:sp>
         <p:nvSpPr>
-          <p:cNvPr id="2" name="タイトル 1">
-            <a:extLst>
-              <a:ext uri="{FF2B5EF4-FFF2-40B4-BE49-F238E27FC236}">
-                <a16:creationId xmlns:a16="http://schemas.microsoft.com/office/drawing/2014/main" id="{478F1D03-A846-A912-9EEC-A4C654EEDEA5}"/>
-              </a:ext>
-            </a:extLst>
-          </p:cNvPr>
+          <p:cNvPr id="2" name="タイトル 1"/>
           <p:cNvSpPr>
             <a:spLocks noGrp="1"/>
           </p:cNvSpPr>
@@ -2755,18 +2423,13 @@
               <a:rPr kumimoji="1" lang="ja-JP" altLang="en-US"/>
               <a:t>マスター タイトルの書式設定</a:t>
             </a:r>
-          </a:p>
-        </p:txBody>
-      </p:sp>
-      <p:sp>
-        <p:nvSpPr>
-          <p:cNvPr id="3" name="図プレースホルダー 2">
-            <a:extLst>
-              <a:ext uri="{FF2B5EF4-FFF2-40B4-BE49-F238E27FC236}">
-                <a16:creationId xmlns:a16="http://schemas.microsoft.com/office/drawing/2014/main" id="{FBE229A6-E9BF-218B-B349-FA0341357E99}"/>
-              </a:ext>
-            </a:extLst>
-          </p:cNvPr>
+            <a:endParaRPr kumimoji="1" lang="ja-JP" altLang="en-US"/>
+          </a:p>
+        </p:txBody>
+      </p:sp>
+      <p:sp>
+        <p:nvSpPr>
+          <p:cNvPr id="3" name="図プレースホルダー 2"/>
           <p:cNvSpPr>
             <a:spLocks noGrp="1"/>
           </p:cNvSpPr>
@@ -2827,13 +2490,7 @@
       </p:sp>
       <p:sp>
         <p:nvSpPr>
-          <p:cNvPr id="4" name="テキスト プレースホルダー 3">
-            <a:extLst>
-              <a:ext uri="{FF2B5EF4-FFF2-40B4-BE49-F238E27FC236}">
-                <a16:creationId xmlns:a16="http://schemas.microsoft.com/office/drawing/2014/main" id="{73C01B45-6657-1DD7-91E3-A120C0A31B62}"/>
-              </a:ext>
-            </a:extLst>
-          </p:cNvPr>
+          <p:cNvPr id="4" name="テキスト プレースホルダー 3"/>
           <p:cNvSpPr>
             <a:spLocks noGrp="1"/>
           </p:cNvSpPr>
@@ -2893,18 +2550,13 @@
               <a:rPr kumimoji="1" lang="ja-JP" altLang="en-US"/>
               <a:t>マスター テキストの書式設定</a:t>
             </a:r>
-          </a:p>
-        </p:txBody>
-      </p:sp>
-      <p:sp>
-        <p:nvSpPr>
-          <p:cNvPr id="5" name="日付プレースホルダー 4">
-            <a:extLst>
-              <a:ext uri="{FF2B5EF4-FFF2-40B4-BE49-F238E27FC236}">
-                <a16:creationId xmlns:a16="http://schemas.microsoft.com/office/drawing/2014/main" id="{7933CF4B-8ECD-F8BB-376E-143F4FE05C2E}"/>
-              </a:ext>
-            </a:extLst>
-          </p:cNvPr>
+            <a:endParaRPr kumimoji="1" lang="ja-JP" altLang="en-US"/>
+          </a:p>
+        </p:txBody>
+      </p:sp>
+      <p:sp>
+        <p:nvSpPr>
+          <p:cNvPr id="5" name="日付プレースホルダー 4"/>
           <p:cNvSpPr>
             <a:spLocks noGrp="1"/>
           </p:cNvSpPr>
@@ -2919,7 +2571,6 @@
           <a:p>
             <a:fld id="{6D1A64C3-A488-44CE-A3F3-A08F41D23068}" type="datetimeFigureOut">
               <a:rPr kumimoji="1" lang="ja-JP" altLang="en-US" smtClean="0"/>
-              <a:t>2026/7/1</a:t>
             </a:fld>
             <a:endParaRPr kumimoji="1" lang="ja-JP" altLang="en-US"/>
           </a:p>
@@ -2927,13 +2578,7 @@
       </p:sp>
       <p:sp>
         <p:nvSpPr>
-          <p:cNvPr id="6" name="フッター プレースホルダー 5">
-            <a:extLst>
-              <a:ext uri="{FF2B5EF4-FFF2-40B4-BE49-F238E27FC236}">
-                <a16:creationId xmlns:a16="http://schemas.microsoft.com/office/drawing/2014/main" id="{6FD14703-8FFC-58A9-D0EC-F92798114744}"/>
-              </a:ext>
-            </a:extLst>
-          </p:cNvPr>
+          <p:cNvPr id="6" name="フッター プレースホルダー 5"/>
           <p:cNvSpPr>
             <a:spLocks noGrp="1"/>
           </p:cNvSpPr>
@@ -2952,13 +2597,7 @@
       </p:sp>
       <p:sp>
         <p:nvSpPr>
-          <p:cNvPr id="7" name="スライド番号プレースホルダー 6">
-            <a:extLst>
-              <a:ext uri="{FF2B5EF4-FFF2-40B4-BE49-F238E27FC236}">
-                <a16:creationId xmlns:a16="http://schemas.microsoft.com/office/drawing/2014/main" id="{3951E4A5-E22B-2BE4-702C-E88C4F05D622}"/>
-              </a:ext>
-            </a:extLst>
-          </p:cNvPr>
+          <p:cNvPr id="7" name="スライド番号プレースホルダー 6"/>
           <p:cNvSpPr>
             <a:spLocks noGrp="1"/>
           </p:cNvSpPr>
@@ -2973,18 +2612,12 @@
           <a:p>
             <a:fld id="{DBFBB364-F735-42FF-8F06-BCF5AE141D6A}" type="slidenum">
               <a:rPr kumimoji="1" lang="ja-JP" altLang="en-US" smtClean="0"/>
-              <a:t>‹#›</a:t>
             </a:fld>
             <a:endParaRPr kumimoji="1" lang="ja-JP" altLang="en-US"/>
           </a:p>
         </p:txBody>
       </p:sp>
     </p:spTree>
-    <p:extLst>
-      <p:ext uri="{BB962C8B-B14F-4D97-AF65-F5344CB8AC3E}">
-        <p14:creationId xmlns:p14="http://schemas.microsoft.com/office/powerpoint/2010/main" val="1524292735"/>
-      </p:ext>
-    </p:extLst>
   </p:cSld>
   <p:clrMapOvr>
     <a:masterClrMapping/>
@@ -3016,13 +2649,7 @@
       </p:grpSpPr>
       <p:sp>
         <p:nvSpPr>
-          <p:cNvPr id="2" name="タイトル プレースホルダー 1">
-            <a:extLst>
-              <a:ext uri="{FF2B5EF4-FFF2-40B4-BE49-F238E27FC236}">
-                <a16:creationId xmlns:a16="http://schemas.microsoft.com/office/drawing/2014/main" id="{C96D39DB-CFB3-BE3F-3D4A-EB25B5A23F68}"/>
-              </a:ext>
-            </a:extLst>
-          </p:cNvPr>
+          <p:cNvPr id="2" name="タイトル プレースホルダー 1"/>
           <p:cNvSpPr>
             <a:spLocks noGrp="1"/>
           </p:cNvSpPr>
@@ -3049,18 +2676,13 @@
               <a:rPr kumimoji="1" lang="ja-JP" altLang="en-US"/>
               <a:t>マスター タイトルの書式設定</a:t>
             </a:r>
-          </a:p>
-        </p:txBody>
-      </p:sp>
-      <p:sp>
-        <p:nvSpPr>
-          <p:cNvPr id="3" name="テキスト プレースホルダー 2">
-            <a:extLst>
-              <a:ext uri="{FF2B5EF4-FFF2-40B4-BE49-F238E27FC236}">
-                <a16:creationId xmlns:a16="http://schemas.microsoft.com/office/drawing/2014/main" id="{D9EDC314-F947-F3A8-51FC-A123CB965DC3}"/>
-              </a:ext>
-            </a:extLst>
-          </p:cNvPr>
+            <a:endParaRPr kumimoji="1" lang="ja-JP" altLang="en-US"/>
+          </a:p>
+        </p:txBody>
+      </p:sp>
+      <p:sp>
+        <p:nvSpPr>
+          <p:cNvPr id="3" name="テキスト プレースホルダー 2"/>
           <p:cNvSpPr>
             <a:spLocks noGrp="1"/>
           </p:cNvSpPr>
@@ -3088,6 +2710,7 @@
               <a:rPr kumimoji="1" lang="ja-JP" altLang="en-US"/>
               <a:t>マスター テキストの書式設定</a:t>
             </a:r>
+            <a:endParaRPr kumimoji="1" lang="ja-JP" altLang="en-US"/>
           </a:p>
           <a:p>
             <a:pPr lvl="1"/>
@@ -3103,6 +2726,7 @@
               <a:rPr kumimoji="1" lang="ja-JP" altLang="en-US"/>
               <a:t>レベル</a:t>
             </a:r>
+            <a:endParaRPr kumimoji="1" lang="ja-JP" altLang="en-US"/>
           </a:p>
           <a:p>
             <a:pPr lvl="2"/>
@@ -3118,6 +2742,7 @@
               <a:rPr kumimoji="1" lang="ja-JP" altLang="en-US"/>
               <a:t>レベル</a:t>
             </a:r>
+            <a:endParaRPr kumimoji="1" lang="ja-JP" altLang="en-US"/>
           </a:p>
           <a:p>
             <a:pPr lvl="3"/>
@@ -3133,6 +2758,7 @@
               <a:rPr kumimoji="1" lang="ja-JP" altLang="en-US"/>
               <a:t>レベル</a:t>
             </a:r>
+            <a:endParaRPr kumimoji="1" lang="ja-JP" altLang="en-US"/>
           </a:p>
           <a:p>
             <a:pPr lvl="4"/>
@@ -3148,18 +2774,13 @@
               <a:rPr kumimoji="1" lang="ja-JP" altLang="en-US"/>
               <a:t>レベル</a:t>
             </a:r>
-          </a:p>
-        </p:txBody>
-      </p:sp>
-      <p:sp>
-        <p:nvSpPr>
-          <p:cNvPr id="4" name="日付プレースホルダー 3">
-            <a:extLst>
-              <a:ext uri="{FF2B5EF4-FFF2-40B4-BE49-F238E27FC236}">
-                <a16:creationId xmlns:a16="http://schemas.microsoft.com/office/drawing/2014/main" id="{C17BAE9D-9A6C-A4FF-DC92-59EB95E406C6}"/>
-              </a:ext>
-            </a:extLst>
-          </p:cNvPr>
+            <a:endParaRPr kumimoji="1" lang="ja-JP" altLang="en-US"/>
+          </a:p>
+        </p:txBody>
+      </p:sp>
+      <p:sp>
+        <p:nvSpPr>
+          <p:cNvPr id="4" name="日付プレースホルダー 3"/>
           <p:cNvSpPr>
             <a:spLocks noGrp="1"/>
           </p:cNvSpPr>
@@ -3192,7 +2813,6 @@
           <a:p>
             <a:fld id="{6D1A64C3-A488-44CE-A3F3-A08F41D23068}" type="datetimeFigureOut">
               <a:rPr kumimoji="1" lang="ja-JP" altLang="en-US" smtClean="0"/>
-              <a:t>2026/7/1</a:t>
             </a:fld>
             <a:endParaRPr kumimoji="1" lang="ja-JP" altLang="en-US"/>
           </a:p>
@@ -3200,13 +2820,7 @@
       </p:sp>
       <p:sp>
         <p:nvSpPr>
-          <p:cNvPr id="5" name="フッター プレースホルダー 4">
-            <a:extLst>
-              <a:ext uri="{FF2B5EF4-FFF2-40B4-BE49-F238E27FC236}">
-                <a16:creationId xmlns:a16="http://schemas.microsoft.com/office/drawing/2014/main" id="{F395AE26-4044-4C12-9B3E-1A73BA9D179A}"/>
-              </a:ext>
-            </a:extLst>
-          </p:cNvPr>
+          <p:cNvPr id="5" name="フッター プレースホルダー 4"/>
           <p:cNvSpPr>
             <a:spLocks noGrp="1"/>
           </p:cNvSpPr>
@@ -3243,13 +2857,7 @@
       </p:sp>
       <p:sp>
         <p:nvSpPr>
-          <p:cNvPr id="6" name="スライド番号プレースホルダー 5">
-            <a:extLst>
-              <a:ext uri="{FF2B5EF4-FFF2-40B4-BE49-F238E27FC236}">
-                <a16:creationId xmlns:a16="http://schemas.microsoft.com/office/drawing/2014/main" id="{DE683481-D471-5303-B37D-E3B8867279BF}"/>
-              </a:ext>
-            </a:extLst>
-          </p:cNvPr>
+          <p:cNvPr id="6" name="スライド番号プレースホルダー 5"/>
           <p:cNvSpPr>
             <a:spLocks noGrp="1"/>
           </p:cNvSpPr>
@@ -3282,18 +2890,12 @@
           <a:p>
             <a:fld id="{DBFBB364-F735-42FF-8F06-BCF5AE141D6A}" type="slidenum">
               <a:rPr kumimoji="1" lang="ja-JP" altLang="en-US" smtClean="0"/>
-              <a:t>‹#›</a:t>
             </a:fld>
             <a:endParaRPr kumimoji="1" lang="ja-JP" altLang="en-US"/>
           </a:p>
         </p:txBody>
       </p:sp>
     </p:spTree>
-    <p:extLst>
-      <p:ext uri="{BB962C8B-B14F-4D97-AF65-F5344CB8AC3E}">
-        <p14:creationId xmlns:p14="http://schemas.microsoft.com/office/powerpoint/2010/main" val="2710138167"/>
-      </p:ext>
-    </p:extLst>
   </p:cSld>
   <p:clrMap bg1="lt1" tx1="dk1" bg2="lt2" tx2="dk2" accent1="accent1" accent2="accent2" accent3="accent3" accent4="accent4" accent5="accent5" accent6="accent6" hlink="hlink" folHlink="folHlink"/>
   <p:sldLayoutIdLst>
@@ -3611,13 +3213,7 @@
       </p:grpSpPr>
       <p:sp>
         <p:nvSpPr>
-          <p:cNvPr id="3" name="字幕 2">
-            <a:extLst>
-              <a:ext uri="{FF2B5EF4-FFF2-40B4-BE49-F238E27FC236}">
-                <a16:creationId xmlns:a16="http://schemas.microsoft.com/office/drawing/2014/main" id="{786DD269-48D0-DFEA-FB59-5C53212E5B59}"/>
-              </a:ext>
-            </a:extLst>
-          </p:cNvPr>
+          <p:cNvPr id="3" name="字幕 2"/>
           <p:cNvSpPr>
             <a:spLocks noGrp="1"/>
           </p:cNvSpPr>
@@ -3641,552 +3237,20 @@
               <a:rPr kumimoji="1" lang="ja-JP" altLang="en-US" sz="4000" dirty="0"/>
               <a:t>マップ</a:t>
             </a:r>
-          </a:p>
-        </p:txBody>
-      </p:sp>
-      <p:grpSp>
-        <p:nvGrpSpPr>
-          <p:cNvPr id="24" name="グループ化 23">
-            <a:extLst>
-              <a:ext uri="{FF2B5EF4-FFF2-40B4-BE49-F238E27FC236}">
-                <a16:creationId xmlns:a16="http://schemas.microsoft.com/office/drawing/2014/main" id="{6BA38662-06F1-203E-FB83-45011EF5BE66}"/>
-              </a:ext>
-            </a:extLst>
-          </p:cNvPr>
-          <p:cNvGrpSpPr/>
-          <p:nvPr/>
-        </p:nvGrpSpPr>
-        <p:grpSpPr>
-          <a:xfrm>
-            <a:off x="564461" y="1120583"/>
-            <a:ext cx="7287491" cy="4322618"/>
-            <a:chOff x="1624444" y="1114136"/>
-            <a:chExt cx="7287491" cy="4322618"/>
-          </a:xfrm>
-        </p:grpSpPr>
-        <p:sp>
-          <p:nvSpPr>
-            <p:cNvPr id="4" name="正方形/長方形 3">
-              <a:extLst>
-                <a:ext uri="{FF2B5EF4-FFF2-40B4-BE49-F238E27FC236}">
-                  <a16:creationId xmlns:a16="http://schemas.microsoft.com/office/drawing/2014/main" id="{F4223BCD-94D8-FCE1-EE9E-7D68D6D083E7}"/>
-                </a:ext>
-              </a:extLst>
-            </p:cNvPr>
-            <p:cNvSpPr/>
-            <p:nvPr/>
-          </p:nvSpPr>
-          <p:spPr>
-            <a:xfrm>
-              <a:off x="1624444" y="1114136"/>
-              <a:ext cx="7287491" cy="4322618"/>
-            </a:xfrm>
-            <a:prstGeom prst="rect">
-              <a:avLst/>
-            </a:prstGeom>
-          </p:spPr>
-          <p:style>
-            <a:lnRef idx="2">
-              <a:schemeClr val="dk1">
-                <a:shade val="15000"/>
-              </a:schemeClr>
-            </a:lnRef>
-            <a:fillRef idx="1">
-              <a:schemeClr val="dk1"/>
-            </a:fillRef>
-            <a:effectRef idx="0">
-              <a:schemeClr val="dk1"/>
-            </a:effectRef>
-            <a:fontRef idx="minor">
-              <a:schemeClr val="lt1"/>
-            </a:fontRef>
-          </p:style>
-          <p:txBody>
-            <a:bodyPr rtlCol="0" anchor="ctr"/>
-            <a:lstStyle/>
-            <a:p>
-              <a:pPr algn="ctr"/>
-              <a:endParaRPr kumimoji="1" lang="ja-JP" altLang="en-US"/>
-            </a:p>
-          </p:txBody>
-        </p:sp>
-        <p:sp>
-          <p:nvSpPr>
-            <p:cNvPr id="5" name="L 字 4">
-              <a:extLst>
-                <a:ext uri="{FF2B5EF4-FFF2-40B4-BE49-F238E27FC236}">
-                  <a16:creationId xmlns:a16="http://schemas.microsoft.com/office/drawing/2014/main" id="{6D31A8AD-A1B1-CA6F-9E23-6E0ECBAE3936}"/>
-                </a:ext>
-              </a:extLst>
-            </p:cNvPr>
-            <p:cNvSpPr/>
-            <p:nvPr/>
-          </p:nvSpPr>
-          <p:spPr>
-            <a:xfrm>
-              <a:off x="2244436" y="4027055"/>
-              <a:ext cx="923637" cy="925946"/>
-            </a:xfrm>
-            <a:prstGeom prst="corner">
-              <a:avLst/>
-            </a:prstGeom>
-          </p:spPr>
-          <p:style>
-            <a:lnRef idx="2">
-              <a:schemeClr val="accent2">
-                <a:shade val="15000"/>
-              </a:schemeClr>
-            </a:lnRef>
-            <a:fillRef idx="1">
-              <a:schemeClr val="accent2"/>
-            </a:fillRef>
-            <a:effectRef idx="0">
-              <a:schemeClr val="accent2"/>
-            </a:effectRef>
-            <a:fontRef idx="minor">
-              <a:schemeClr val="lt1"/>
-            </a:fontRef>
-          </p:style>
-          <p:txBody>
-            <a:bodyPr rtlCol="0" anchor="ctr"/>
-            <a:lstStyle/>
-            <a:p>
-              <a:pPr algn="ctr"/>
-              <a:endParaRPr kumimoji="1" lang="ja-JP" altLang="en-US"/>
-            </a:p>
-          </p:txBody>
-        </p:sp>
-        <p:sp>
-          <p:nvSpPr>
-            <p:cNvPr id="7" name="L 字 6">
-              <a:extLst>
-                <a:ext uri="{FF2B5EF4-FFF2-40B4-BE49-F238E27FC236}">
-                  <a16:creationId xmlns:a16="http://schemas.microsoft.com/office/drawing/2014/main" id="{66430D66-4E7B-4E2C-1BF2-183A9B5613D4}"/>
-                </a:ext>
-              </a:extLst>
-            </p:cNvPr>
-            <p:cNvSpPr/>
-            <p:nvPr/>
-          </p:nvSpPr>
-          <p:spPr>
-            <a:xfrm rot="5400000">
-              <a:off x="4806372" y="1773382"/>
-              <a:ext cx="923637" cy="925946"/>
-            </a:xfrm>
-            <a:prstGeom prst="corner">
-              <a:avLst/>
-            </a:prstGeom>
-          </p:spPr>
-          <p:style>
-            <a:lnRef idx="2">
-              <a:schemeClr val="accent2">
-                <a:shade val="15000"/>
-              </a:schemeClr>
-            </a:lnRef>
-            <a:fillRef idx="1">
-              <a:schemeClr val="accent2"/>
-            </a:fillRef>
-            <a:effectRef idx="0">
-              <a:schemeClr val="accent2"/>
-            </a:effectRef>
-            <a:fontRef idx="minor">
-              <a:schemeClr val="lt1"/>
-            </a:fontRef>
-          </p:style>
-          <p:txBody>
-            <a:bodyPr rtlCol="0" anchor="ctr"/>
-            <a:lstStyle/>
-            <a:p>
-              <a:pPr algn="ctr"/>
-              <a:endParaRPr kumimoji="1" lang="ja-JP" altLang="en-US"/>
-            </a:p>
-          </p:txBody>
-        </p:sp>
-        <p:sp>
-          <p:nvSpPr>
-            <p:cNvPr id="9" name="L 字 8">
-              <a:extLst>
-                <a:ext uri="{FF2B5EF4-FFF2-40B4-BE49-F238E27FC236}">
-                  <a16:creationId xmlns:a16="http://schemas.microsoft.com/office/drawing/2014/main" id="{3045192E-6A1C-5D9D-0CB6-B4623C7BF1F6}"/>
-                </a:ext>
-              </a:extLst>
-            </p:cNvPr>
-            <p:cNvSpPr/>
-            <p:nvPr/>
-          </p:nvSpPr>
-          <p:spPr>
-            <a:xfrm>
-              <a:off x="7472218" y="1610591"/>
-              <a:ext cx="923637" cy="925946"/>
-            </a:xfrm>
-            <a:prstGeom prst="corner">
-              <a:avLst/>
-            </a:prstGeom>
-          </p:spPr>
-          <p:style>
-            <a:lnRef idx="2">
-              <a:schemeClr val="accent2">
-                <a:shade val="15000"/>
-              </a:schemeClr>
-            </a:lnRef>
-            <a:fillRef idx="1">
-              <a:schemeClr val="accent2"/>
-            </a:fillRef>
-            <a:effectRef idx="0">
-              <a:schemeClr val="accent2"/>
-            </a:effectRef>
-            <a:fontRef idx="minor">
-              <a:schemeClr val="lt1"/>
-            </a:fontRef>
-          </p:style>
-          <p:txBody>
-            <a:bodyPr rtlCol="0" anchor="ctr"/>
-            <a:lstStyle/>
-            <a:p>
-              <a:pPr algn="ctr"/>
-              <a:endParaRPr kumimoji="1" lang="ja-JP" altLang="en-US"/>
-            </a:p>
-          </p:txBody>
-        </p:sp>
-        <p:sp>
-          <p:nvSpPr>
-            <p:cNvPr id="11" name="L 字 10">
-              <a:extLst>
-                <a:ext uri="{FF2B5EF4-FFF2-40B4-BE49-F238E27FC236}">
-                  <a16:creationId xmlns:a16="http://schemas.microsoft.com/office/drawing/2014/main" id="{9E500321-312C-2589-86BE-CB366BEC6299}"/>
-                </a:ext>
-              </a:extLst>
-            </p:cNvPr>
-            <p:cNvSpPr/>
-            <p:nvPr/>
-          </p:nvSpPr>
-          <p:spPr>
-            <a:xfrm>
-              <a:off x="3574472" y="3724564"/>
-              <a:ext cx="923637" cy="925946"/>
-            </a:xfrm>
-            <a:prstGeom prst="corner">
-              <a:avLst/>
-            </a:prstGeom>
-          </p:spPr>
-          <p:style>
-            <a:lnRef idx="2">
-              <a:schemeClr val="accent2">
-                <a:shade val="15000"/>
-              </a:schemeClr>
-            </a:lnRef>
-            <a:fillRef idx="1">
-              <a:schemeClr val="accent2"/>
-            </a:fillRef>
-            <a:effectRef idx="0">
-              <a:schemeClr val="accent2"/>
-            </a:effectRef>
-            <a:fontRef idx="minor">
-              <a:schemeClr val="lt1"/>
-            </a:fontRef>
-          </p:style>
-          <p:txBody>
-            <a:bodyPr rtlCol="0" anchor="ctr"/>
-            <a:lstStyle/>
-            <a:p>
-              <a:pPr algn="ctr"/>
-              <a:endParaRPr kumimoji="1" lang="ja-JP" altLang="en-US"/>
-            </a:p>
-          </p:txBody>
-        </p:sp>
-        <p:sp>
-          <p:nvSpPr>
-            <p:cNvPr id="13" name="L 字 12">
-              <a:extLst>
-                <a:ext uri="{FF2B5EF4-FFF2-40B4-BE49-F238E27FC236}">
-                  <a16:creationId xmlns:a16="http://schemas.microsoft.com/office/drawing/2014/main" id="{C8A6BDB0-3BC1-102C-7E63-722C9FF137D6}"/>
-                </a:ext>
-              </a:extLst>
-            </p:cNvPr>
-            <p:cNvSpPr/>
-            <p:nvPr/>
-          </p:nvSpPr>
-          <p:spPr>
-            <a:xfrm rot="10800000">
-              <a:off x="2244436" y="2561936"/>
-              <a:ext cx="923637" cy="925946"/>
-            </a:xfrm>
-            <a:prstGeom prst="corner">
-              <a:avLst/>
-            </a:prstGeom>
-          </p:spPr>
-          <p:style>
-            <a:lnRef idx="2">
-              <a:schemeClr val="accent2">
-                <a:shade val="15000"/>
-              </a:schemeClr>
-            </a:lnRef>
-            <a:fillRef idx="1">
-              <a:schemeClr val="accent2"/>
-            </a:fillRef>
-            <a:effectRef idx="0">
-              <a:schemeClr val="accent2"/>
-            </a:effectRef>
-            <a:fontRef idx="minor">
-              <a:schemeClr val="lt1"/>
-            </a:fontRef>
-          </p:style>
-          <p:txBody>
-            <a:bodyPr rtlCol="0" anchor="ctr"/>
-            <a:lstStyle/>
-            <a:p>
-              <a:pPr algn="ctr"/>
-              <a:endParaRPr kumimoji="1" lang="ja-JP" altLang="en-US"/>
-            </a:p>
-          </p:txBody>
-        </p:sp>
-        <p:sp>
-          <p:nvSpPr>
-            <p:cNvPr id="15" name="L 字 14">
-              <a:extLst>
-                <a:ext uri="{FF2B5EF4-FFF2-40B4-BE49-F238E27FC236}">
-                  <a16:creationId xmlns:a16="http://schemas.microsoft.com/office/drawing/2014/main" id="{89284A5A-CBC3-870F-FB16-CED285FDCFDA}"/>
-                </a:ext>
-              </a:extLst>
-            </p:cNvPr>
-            <p:cNvSpPr/>
-            <p:nvPr/>
-          </p:nvSpPr>
-          <p:spPr>
-            <a:xfrm>
-              <a:off x="3373580" y="1442027"/>
-              <a:ext cx="923637" cy="925946"/>
-            </a:xfrm>
-            <a:prstGeom prst="corner">
-              <a:avLst/>
-            </a:prstGeom>
-          </p:spPr>
-          <p:style>
-            <a:lnRef idx="2">
-              <a:schemeClr val="accent2">
-                <a:shade val="15000"/>
-              </a:schemeClr>
-            </a:lnRef>
-            <a:fillRef idx="1">
-              <a:schemeClr val="accent2"/>
-            </a:fillRef>
-            <a:effectRef idx="0">
-              <a:schemeClr val="accent2"/>
-            </a:effectRef>
-            <a:fontRef idx="minor">
-              <a:schemeClr val="lt1"/>
-            </a:fontRef>
-          </p:style>
-          <p:txBody>
-            <a:bodyPr rtlCol="0" anchor="ctr"/>
-            <a:lstStyle/>
-            <a:p>
-              <a:pPr algn="ctr"/>
-              <a:endParaRPr kumimoji="1" lang="ja-JP" altLang="en-US"/>
-            </a:p>
-          </p:txBody>
-        </p:sp>
-        <p:sp>
-          <p:nvSpPr>
-            <p:cNvPr id="17" name="L 字 16">
-              <a:extLst>
-                <a:ext uri="{FF2B5EF4-FFF2-40B4-BE49-F238E27FC236}">
-                  <a16:creationId xmlns:a16="http://schemas.microsoft.com/office/drawing/2014/main" id="{1311D9C0-2B1E-43D5-7F5D-F73D1A8844F9}"/>
-                </a:ext>
-              </a:extLst>
-            </p:cNvPr>
-            <p:cNvSpPr/>
-            <p:nvPr/>
-          </p:nvSpPr>
-          <p:spPr>
-            <a:xfrm>
-              <a:off x="6511636" y="3891973"/>
-              <a:ext cx="923637" cy="925946"/>
-            </a:xfrm>
-            <a:prstGeom prst="corner">
-              <a:avLst/>
-            </a:prstGeom>
-          </p:spPr>
-          <p:style>
-            <a:lnRef idx="2">
-              <a:schemeClr val="accent2">
-                <a:shade val="15000"/>
-              </a:schemeClr>
-            </a:lnRef>
-            <a:fillRef idx="1">
-              <a:schemeClr val="accent2"/>
-            </a:fillRef>
-            <a:effectRef idx="0">
-              <a:schemeClr val="accent2"/>
-            </a:effectRef>
-            <a:fontRef idx="minor">
-              <a:schemeClr val="lt1"/>
-            </a:fontRef>
-          </p:style>
-          <p:txBody>
-            <a:bodyPr rtlCol="0" anchor="ctr"/>
-            <a:lstStyle/>
-            <a:p>
-              <a:pPr algn="ctr"/>
-              <a:endParaRPr kumimoji="1" lang="ja-JP" altLang="en-US"/>
-            </a:p>
-          </p:txBody>
-        </p:sp>
-        <p:sp>
-          <p:nvSpPr>
-            <p:cNvPr id="19" name="L 字 18">
-              <a:extLst>
-                <a:ext uri="{FF2B5EF4-FFF2-40B4-BE49-F238E27FC236}">
-                  <a16:creationId xmlns:a16="http://schemas.microsoft.com/office/drawing/2014/main" id="{01FA8A35-5FC6-BBBD-4E45-51E80068BCFF}"/>
-                </a:ext>
-              </a:extLst>
-            </p:cNvPr>
-            <p:cNvSpPr/>
-            <p:nvPr/>
-          </p:nvSpPr>
-          <p:spPr>
-            <a:xfrm rot="16200000">
-              <a:off x="5269345" y="2799772"/>
-              <a:ext cx="923637" cy="925946"/>
-            </a:xfrm>
-            <a:prstGeom prst="corner">
-              <a:avLst/>
-            </a:prstGeom>
-          </p:spPr>
-          <p:style>
-            <a:lnRef idx="2">
-              <a:schemeClr val="accent2">
-                <a:shade val="15000"/>
-              </a:schemeClr>
-            </a:lnRef>
-            <a:fillRef idx="1">
-              <a:schemeClr val="accent2"/>
-            </a:fillRef>
-            <a:effectRef idx="0">
-              <a:schemeClr val="accent2"/>
-            </a:effectRef>
-            <a:fontRef idx="minor">
-              <a:schemeClr val="lt1"/>
-            </a:fontRef>
-          </p:style>
-          <p:txBody>
-            <a:bodyPr rtlCol="0" anchor="ctr"/>
-            <a:lstStyle/>
-            <a:p>
-              <a:pPr algn="ctr"/>
-              <a:endParaRPr kumimoji="1" lang="ja-JP" altLang="en-US"/>
-            </a:p>
-          </p:txBody>
-        </p:sp>
-        <p:sp>
-          <p:nvSpPr>
-            <p:cNvPr id="20" name="十字形 19">
-              <a:extLst>
-                <a:ext uri="{FF2B5EF4-FFF2-40B4-BE49-F238E27FC236}">
-                  <a16:creationId xmlns:a16="http://schemas.microsoft.com/office/drawing/2014/main" id="{84174027-068C-D97C-43A0-744A765A80FC}"/>
-                </a:ext>
-              </a:extLst>
-            </p:cNvPr>
-            <p:cNvSpPr/>
-            <p:nvPr/>
-          </p:nvSpPr>
-          <p:spPr>
-            <a:xfrm>
-              <a:off x="3830782" y="2561936"/>
-              <a:ext cx="1016000" cy="923638"/>
-            </a:xfrm>
-            <a:prstGeom prst="plus">
-              <a:avLst/>
-            </a:prstGeom>
-          </p:spPr>
-          <p:style>
-            <a:lnRef idx="2">
-              <a:schemeClr val="accent2">
-                <a:shade val="15000"/>
-              </a:schemeClr>
-            </a:lnRef>
-            <a:fillRef idx="1">
-              <a:schemeClr val="accent2"/>
-            </a:fillRef>
-            <a:effectRef idx="0">
-              <a:schemeClr val="accent2"/>
-            </a:effectRef>
-            <a:fontRef idx="minor">
-              <a:schemeClr val="lt1"/>
-            </a:fontRef>
-          </p:style>
-          <p:txBody>
-            <a:bodyPr rtlCol="0" anchor="ctr"/>
-            <a:lstStyle/>
-            <a:p>
-              <a:pPr algn="ctr"/>
-              <a:endParaRPr kumimoji="1" lang="ja-JP" altLang="en-US"/>
-            </a:p>
-          </p:txBody>
-        </p:sp>
-        <p:sp>
-          <p:nvSpPr>
-            <p:cNvPr id="22" name="十字形 21">
-              <a:extLst>
-                <a:ext uri="{FF2B5EF4-FFF2-40B4-BE49-F238E27FC236}">
-                  <a16:creationId xmlns:a16="http://schemas.microsoft.com/office/drawing/2014/main" id="{C4BF783E-B41C-8ABA-9547-E1620E168762}"/>
-                </a:ext>
-              </a:extLst>
-            </p:cNvPr>
-            <p:cNvSpPr/>
-            <p:nvPr/>
-          </p:nvSpPr>
-          <p:spPr>
-            <a:xfrm>
-              <a:off x="7426036" y="3191667"/>
-              <a:ext cx="1016000" cy="923638"/>
-            </a:xfrm>
-            <a:prstGeom prst="plus">
-              <a:avLst/>
-            </a:prstGeom>
-          </p:spPr>
-          <p:style>
-            <a:lnRef idx="2">
-              <a:schemeClr val="accent2">
-                <a:shade val="15000"/>
-              </a:schemeClr>
-            </a:lnRef>
-            <a:fillRef idx="1">
-              <a:schemeClr val="accent2"/>
-            </a:fillRef>
-            <a:effectRef idx="0">
-              <a:schemeClr val="accent2"/>
-            </a:effectRef>
-            <a:fontRef idx="minor">
-              <a:schemeClr val="lt1"/>
-            </a:fontRef>
-          </p:style>
-          <p:txBody>
-            <a:bodyPr rtlCol="0" anchor="ctr"/>
-            <a:lstStyle/>
-            <a:p>
-              <a:pPr algn="ctr"/>
-              <a:endParaRPr kumimoji="1" lang="ja-JP" altLang="en-US"/>
-            </a:p>
-          </p:txBody>
-        </p:sp>
-      </p:grpSp>
-      <p:sp>
-        <p:nvSpPr>
-          <p:cNvPr id="25" name="テキスト ボックス 24">
-            <a:extLst>
-              <a:ext uri="{FF2B5EF4-FFF2-40B4-BE49-F238E27FC236}">
-                <a16:creationId xmlns:a16="http://schemas.microsoft.com/office/drawing/2014/main" id="{EBD8A502-FC21-8491-D5E2-0D30B0EF1630}"/>
-              </a:ext>
-            </a:extLst>
-          </p:cNvPr>
+            <a:endParaRPr kumimoji="1" lang="ja-JP" altLang="en-US" sz="4000" dirty="0"/>
+          </a:p>
+        </p:txBody>
+      </p:sp>
+      <p:sp>
+        <p:nvSpPr>
+          <p:cNvPr id="25" name="テキスト ボックス 24"/>
           <p:cNvSpPr txBox="1"/>
           <p:nvPr/>
         </p:nvSpPr>
         <p:spPr>
           <a:xfrm>
-            <a:off x="7983794" y="688259"/>
-            <a:ext cx="3470674" cy="1754326"/>
+            <a:off x="739140" y="841375"/>
+            <a:ext cx="10296525" cy="5795010"/>
           </a:xfrm>
           <a:prstGeom prst="rect">
             <a:avLst/>
@@ -4195,69 +3259,227 @@
         </p:spPr>
         <p:txBody>
           <a:bodyPr wrap="square" rtlCol="0">
-            <a:spAutoFit/>
+            <a:noAutofit/>
           </a:bodyPr>
           <a:lstStyle/>
           <a:p>
             <a:r>
               <a:rPr kumimoji="1" lang="ja-JP" altLang="en-US" dirty="0"/>
-              <a:t>水たまり</a:t>
+              <a:t>考えられる</a:t>
+            </a:r>
+            <a:r>
+              <a:rPr kumimoji="1" lang="ja-JP" altLang="en-US" dirty="0"/>
+              <a:t>マップ要素</a:t>
+            </a:r>
+            <a:endParaRPr kumimoji="1" lang="ja-JP" altLang="en-US" dirty="0"/>
+          </a:p>
+          <a:p>
+            <a:r>
+              <a:rPr kumimoji="1" lang="ja-JP" altLang="en-US" dirty="0"/>
+              <a:t>・水たまり</a:t>
             </a:r>
             <a:endParaRPr kumimoji="1" lang="en-US" altLang="ja-JP" dirty="0"/>
           </a:p>
           <a:p>
             <a:r>
               <a:rPr lang="ja-JP" altLang="en-US" dirty="0"/>
-              <a:t>・移動速度低下</a:t>
+              <a:t>移動速度低下</a:t>
+            </a:r>
+            <a:endParaRPr lang="ja-JP" altLang="en-US" dirty="0"/>
+          </a:p>
+          <a:p>
+            <a:r>
+              <a:rPr lang="ja-JP" altLang="en-US" dirty="0"/>
+              <a:t>・氷の床</a:t>
+            </a:r>
+            <a:endParaRPr lang="ja-JP" altLang="en-US" dirty="0"/>
+          </a:p>
+          <a:p>
+            <a:r>
+              <a:rPr lang="ja-JP" altLang="en-US" dirty="0"/>
+              <a:t>移動速度上昇</a:t>
             </a:r>
             <a:endParaRPr lang="en-US" altLang="ja-JP" dirty="0"/>
           </a:p>
           <a:p>
-            <a:endParaRPr kumimoji="1" lang="en-US" altLang="ja-JP" dirty="0"/>
-          </a:p>
-          <a:p>
             <a:r>
               <a:rPr lang="ja-JP" altLang="en-US" dirty="0"/>
-              <a:t>マグマ</a:t>
+              <a:t>・マグマ</a:t>
             </a:r>
             <a:endParaRPr lang="en-US" altLang="ja-JP" dirty="0"/>
           </a:p>
           <a:p>
             <a:r>
               <a:rPr lang="ja-JP" altLang="en-US" dirty="0"/>
-              <a:t>・ダメージ</a:t>
-            </a:r>
-            <a:endParaRPr lang="en-US" altLang="ja-JP" dirty="0"/>
+              <a:t>ダメージ（もし体力バーなどあれば）</a:t>
+            </a:r>
+            <a:endParaRPr lang="ja-JP" altLang="en-US" dirty="0"/>
           </a:p>
           <a:p>
             <a:r>
               <a:rPr lang="ja-JP" altLang="en-US" dirty="0"/>
-              <a:t>（もし体力バーなどあれば）</a:t>
-            </a:r>
-            <a:endParaRPr lang="en-US" altLang="ja-JP" dirty="0"/>
-          </a:p>
-        </p:txBody>
-      </p:sp>
-      <p:sp>
-        <p:nvSpPr>
-          <p:cNvPr id="26" name="正方形/長方形 25">
-            <a:extLst>
-              <a:ext uri="{FF2B5EF4-FFF2-40B4-BE49-F238E27FC236}">
-                <a16:creationId xmlns:a16="http://schemas.microsoft.com/office/drawing/2014/main" id="{A935DE07-B027-4958-F5DE-EC3BD0DED28A}"/>
-              </a:ext>
-            </a:extLst>
-          </p:cNvPr>
+              <a:t>・蜘蛛の巣</a:t>
+            </a:r>
+            <a:endParaRPr lang="ja-JP" altLang="en-US" dirty="0"/>
+          </a:p>
+          <a:p>
+            <a:r>
+              <a:rPr lang="ja-JP" altLang="en-US" dirty="0"/>
+              <a:t>　足止め</a:t>
+            </a:r>
+            <a:endParaRPr lang="ja-JP" altLang="en-US" dirty="0"/>
+          </a:p>
+          <a:p>
+            <a:r>
+              <a:rPr lang="ja-JP" altLang="en-US" dirty="0"/>
+              <a:t>　特定のキーを</a:t>
+            </a:r>
+            <a:r>
+              <a:rPr lang="ja-JP" altLang="en-US" dirty="0"/>
+              <a:t>何回か押すと解除</a:t>
+            </a:r>
+            <a:endParaRPr lang="ja-JP" altLang="en-US" dirty="0"/>
+          </a:p>
+          <a:p>
+            <a:r>
+              <a:rPr lang="ja-JP" altLang="en-US" dirty="0"/>
+              <a:t>・無敵ゾーン</a:t>
+            </a:r>
+            <a:endParaRPr lang="ja-JP" altLang="en-US" dirty="0"/>
+          </a:p>
+          <a:p>
+            <a:r>
+              <a:rPr lang="ja-JP" altLang="en-US" dirty="0"/>
+              <a:t>　敵は入れない</a:t>
+            </a:r>
+            <a:r>
+              <a:rPr lang="ja-JP" altLang="en-US" dirty="0"/>
+              <a:t>ゾーン</a:t>
+            </a:r>
+            <a:endParaRPr lang="ja-JP" altLang="en-US" dirty="0"/>
+          </a:p>
+          <a:p>
+            <a:r>
+              <a:rPr lang="ja-JP" altLang="en-US" dirty="0"/>
+              <a:t>（</a:t>
+            </a:r>
+            <a:r>
+              <a:rPr lang="ja-JP" altLang="en-US" dirty="0"/>
+              <a:t>時間制限あり</a:t>
+            </a:r>
+            <a:r>
+              <a:rPr lang="ja-JP" altLang="en-US" dirty="0"/>
+              <a:t>）</a:t>
+            </a:r>
+            <a:endParaRPr lang="ja-JP" altLang="en-US" dirty="0"/>
+          </a:p>
+          <a:p>
+            <a:r>
+              <a:rPr lang="ja-JP" altLang="en-US" dirty="0"/>
+              <a:t>・</a:t>
+            </a:r>
+            <a:r>
+              <a:rPr lang="ja-JP" altLang="en-US" dirty="0"/>
+              <a:t>開閉ゲート</a:t>
+            </a:r>
+            <a:endParaRPr lang="ja-JP" altLang="en-US" dirty="0"/>
+          </a:p>
+          <a:p>
+            <a:r>
+              <a:rPr lang="ja-JP" altLang="en-US" dirty="0"/>
+              <a:t>　一定時間や何かのキーを押すことで開閉を</a:t>
+            </a:r>
+            <a:r>
+              <a:rPr lang="ja-JP" altLang="en-US" dirty="0"/>
+              <a:t>チェンジ</a:t>
+            </a:r>
+            <a:endParaRPr lang="ja-JP" altLang="en-US" dirty="0"/>
+          </a:p>
+          <a:p>
+            <a:endParaRPr lang="ja-JP" altLang="en-US" dirty="0"/>
+          </a:p>
+        </p:txBody>
+      </p:sp>
+    </p:spTree>
+  </p:cSld>
+  <p:clrMapOvr>
+    <a:masterClrMapping/>
+  </p:clrMapOvr>
+</p:sld>
+</file>
+
+<file path=ppt/slides/slide2.xml><?xml version="1.0" encoding="utf-8"?>
+<p:sld xmlns:a="http://schemas.openxmlformats.org/drawingml/2006/main" xmlns:r="http://schemas.openxmlformats.org/officeDocument/2006/relationships" xmlns:p="http://schemas.openxmlformats.org/presentationml/2006/main">
+  <p:cSld>
+    <p:spTree>
+      <p:nvGrpSpPr>
+        <p:cNvPr id="1" name=""/>
+        <p:cNvGrpSpPr/>
+        <p:nvPr/>
+      </p:nvGrpSpPr>
+      <p:grpSpPr/>
+      <p:sp>
+        <p:nvSpPr>
+          <p:cNvPr id="5" name="正方形/長方形 3"/>
           <p:cNvSpPr/>
           <p:nvPr/>
         </p:nvSpPr>
         <p:spPr>
           <a:xfrm>
-            <a:off x="3913947" y="4426487"/>
-            <a:ext cx="1037118" cy="460940"/>
+            <a:off x="1935480" y="1445260"/>
+            <a:ext cx="7287260" cy="4322445"/>
           </a:xfrm>
           <a:prstGeom prst="rect">
             <a:avLst/>
           </a:prstGeom>
+          <a:solidFill>
+            <a:schemeClr val="accent4">
+              <a:lumMod val="75000"/>
+            </a:schemeClr>
+          </a:solidFill>
+        </p:spPr>
+        <p:style>
+          <a:lnRef idx="2">
+            <a:schemeClr val="dk1">
+              <a:shade val="15000"/>
+            </a:schemeClr>
+          </a:lnRef>
+          <a:fillRef idx="1">
+            <a:schemeClr val="dk1"/>
+          </a:fillRef>
+          <a:effectRef idx="0">
+            <a:schemeClr val="dk1"/>
+          </a:effectRef>
+          <a:fontRef idx="minor">
+            <a:schemeClr val="lt1"/>
+          </a:fontRef>
+        </p:style>
+        <p:txBody>
+          <a:bodyPr rtlCol="0" anchor="ctr"/>
+          <a:lstStyle/>
+          <a:p>
+            <a:pPr algn="ctr"/>
+            <a:endParaRPr kumimoji="1" lang="ja-JP" altLang="en-US"/>
+          </a:p>
+        </p:txBody>
+      </p:sp>
+      <p:sp>
+        <p:nvSpPr>
+          <p:cNvPr id="6" name="L 字 4"/>
+          <p:cNvSpPr/>
+          <p:nvPr/>
+        </p:nvSpPr>
+        <p:spPr>
+          <a:xfrm>
+            <a:off x="2555240" y="4358005"/>
+            <a:ext cx="923925" cy="925830"/>
+          </a:xfrm>
+          <a:prstGeom prst="corner">
+            <a:avLst/>
+          </a:prstGeom>
+          <a:solidFill>
+            <a:srgbClr val="E263F9"/>
+          </a:solidFill>
         </p:spPr>
         <p:style>
           <a:lnRef idx="2">
@@ -4286,24 +3508,451 @@
       </p:sp>
       <p:sp>
         <p:nvSpPr>
-          <p:cNvPr id="28" name="楕円 27">
-            <a:extLst>
-              <a:ext uri="{FF2B5EF4-FFF2-40B4-BE49-F238E27FC236}">
-                <a16:creationId xmlns:a16="http://schemas.microsoft.com/office/drawing/2014/main" id="{E748709D-B87C-464E-DE45-41F519F9E025}"/>
-              </a:ext>
-            </a:extLst>
-          </p:cNvPr>
+          <p:cNvPr id="7" name="L 字 6"/>
           <p:cNvSpPr/>
           <p:nvPr/>
         </p:nvSpPr>
         <p:spPr>
+          <a:xfrm rot="5400000">
+            <a:off x="5733415" y="1773555"/>
+            <a:ext cx="923925" cy="925830"/>
+          </a:xfrm>
+          <a:prstGeom prst="corner">
+            <a:avLst/>
+          </a:prstGeom>
+          <a:solidFill>
+            <a:srgbClr val="E263F9"/>
+          </a:solidFill>
+        </p:spPr>
+        <p:style>
+          <a:lnRef idx="2">
+            <a:schemeClr val="accent2">
+              <a:shade val="15000"/>
+            </a:schemeClr>
+          </a:lnRef>
+          <a:fillRef idx="1">
+            <a:schemeClr val="accent2"/>
+          </a:fillRef>
+          <a:effectRef idx="0">
+            <a:schemeClr val="accent2"/>
+          </a:effectRef>
+          <a:fontRef idx="minor">
+            <a:schemeClr val="lt1"/>
+          </a:fontRef>
+        </p:style>
+        <p:txBody>
+          <a:bodyPr rtlCol="0" anchor="ctr"/>
+          <a:lstStyle/>
+          <a:p>
+            <a:pPr algn="ctr"/>
+            <a:endParaRPr kumimoji="1" lang="ja-JP" altLang="en-US"/>
+          </a:p>
+        </p:txBody>
+      </p:sp>
+      <p:sp>
+        <p:nvSpPr>
+          <p:cNvPr id="9" name="L 字 8"/>
+          <p:cNvSpPr/>
+          <p:nvPr/>
+        </p:nvSpPr>
+        <p:spPr>
           <a:xfrm>
-            <a:off x="2108090" y="2807373"/>
-            <a:ext cx="662709" cy="684648"/>
+            <a:off x="7783195" y="1941830"/>
+            <a:ext cx="923925" cy="925830"/>
+          </a:xfrm>
+          <a:prstGeom prst="corner">
+            <a:avLst/>
+          </a:prstGeom>
+          <a:solidFill>
+            <a:srgbClr val="E263F9"/>
+          </a:solidFill>
+        </p:spPr>
+        <p:style>
+          <a:lnRef idx="2">
+            <a:schemeClr val="accent2">
+              <a:shade val="15000"/>
+            </a:schemeClr>
+          </a:lnRef>
+          <a:fillRef idx="1">
+            <a:schemeClr val="accent2"/>
+          </a:fillRef>
+          <a:effectRef idx="0">
+            <a:schemeClr val="accent2"/>
+          </a:effectRef>
+          <a:fontRef idx="minor">
+            <a:schemeClr val="lt1"/>
+          </a:fontRef>
+        </p:style>
+        <p:txBody>
+          <a:bodyPr rtlCol="0" anchor="ctr"/>
+          <a:lstStyle/>
+          <a:p>
+            <a:pPr algn="ctr"/>
+            <a:endParaRPr kumimoji="1" lang="ja-JP" altLang="en-US"/>
+          </a:p>
+        </p:txBody>
+      </p:sp>
+      <p:sp>
+        <p:nvSpPr>
+          <p:cNvPr id="11" name="L 字 10"/>
+          <p:cNvSpPr/>
+          <p:nvPr/>
+        </p:nvSpPr>
+        <p:spPr>
+          <a:xfrm>
+            <a:off x="3885565" y="4055745"/>
+            <a:ext cx="923925" cy="925830"/>
+          </a:xfrm>
+          <a:prstGeom prst="corner">
+            <a:avLst/>
+          </a:prstGeom>
+          <a:solidFill>
+            <a:srgbClr val="E263F9"/>
+          </a:solidFill>
+        </p:spPr>
+        <p:style>
+          <a:lnRef idx="2">
+            <a:schemeClr val="accent2">
+              <a:shade val="15000"/>
+            </a:schemeClr>
+          </a:lnRef>
+          <a:fillRef idx="1">
+            <a:schemeClr val="accent2"/>
+          </a:fillRef>
+          <a:effectRef idx="0">
+            <a:schemeClr val="accent2"/>
+          </a:effectRef>
+          <a:fontRef idx="minor">
+            <a:schemeClr val="lt1"/>
+          </a:fontRef>
+        </p:style>
+        <p:txBody>
+          <a:bodyPr rtlCol="0" anchor="ctr"/>
+          <a:lstStyle/>
+          <a:p>
+            <a:pPr algn="ctr"/>
+            <a:endParaRPr kumimoji="1" lang="ja-JP" altLang="en-US"/>
+          </a:p>
+        </p:txBody>
+      </p:sp>
+      <p:sp>
+        <p:nvSpPr>
+          <p:cNvPr id="13" name="L 字 12"/>
+          <p:cNvSpPr/>
+          <p:nvPr/>
+        </p:nvSpPr>
+        <p:spPr>
+          <a:xfrm rot="10800000">
+            <a:off x="2237740" y="2698750"/>
+            <a:ext cx="923925" cy="925830"/>
+          </a:xfrm>
+          <a:prstGeom prst="corner">
+            <a:avLst/>
+          </a:prstGeom>
+          <a:solidFill>
+            <a:srgbClr val="E263F9"/>
+          </a:solidFill>
+        </p:spPr>
+        <p:style>
+          <a:lnRef idx="2">
+            <a:schemeClr val="accent2">
+              <a:shade val="15000"/>
+            </a:schemeClr>
+          </a:lnRef>
+          <a:fillRef idx="1">
+            <a:schemeClr val="accent2"/>
+          </a:fillRef>
+          <a:effectRef idx="0">
+            <a:schemeClr val="accent2"/>
+          </a:effectRef>
+          <a:fontRef idx="minor">
+            <a:schemeClr val="lt1"/>
+          </a:fontRef>
+        </p:style>
+        <p:txBody>
+          <a:bodyPr rtlCol="0" anchor="ctr"/>
+          <a:lstStyle/>
+          <a:p>
+            <a:pPr algn="ctr"/>
+            <a:endParaRPr kumimoji="1" lang="ja-JP" altLang="en-US"/>
+          </a:p>
+        </p:txBody>
+      </p:sp>
+      <p:sp>
+        <p:nvSpPr>
+          <p:cNvPr id="15" name="L 字 14"/>
+          <p:cNvSpPr/>
+          <p:nvPr/>
+        </p:nvSpPr>
+        <p:spPr>
+          <a:xfrm>
+            <a:off x="3218180" y="1664335"/>
+            <a:ext cx="923925" cy="925830"/>
+          </a:xfrm>
+          <a:prstGeom prst="corner">
+            <a:avLst/>
+          </a:prstGeom>
+          <a:solidFill>
+            <a:srgbClr val="E263F9"/>
+          </a:solidFill>
+        </p:spPr>
+        <p:style>
+          <a:lnRef idx="2">
+            <a:schemeClr val="accent2">
+              <a:shade val="15000"/>
+            </a:schemeClr>
+          </a:lnRef>
+          <a:fillRef idx="1">
+            <a:schemeClr val="accent2"/>
+          </a:fillRef>
+          <a:effectRef idx="0">
+            <a:schemeClr val="accent2"/>
+          </a:effectRef>
+          <a:fontRef idx="minor">
+            <a:schemeClr val="lt1"/>
+          </a:fontRef>
+        </p:style>
+        <p:txBody>
+          <a:bodyPr rtlCol="0" anchor="ctr"/>
+          <a:lstStyle/>
+          <a:p>
+            <a:pPr algn="ctr"/>
+            <a:endParaRPr kumimoji="1" lang="ja-JP" altLang="en-US"/>
+          </a:p>
+        </p:txBody>
+      </p:sp>
+      <p:sp>
+        <p:nvSpPr>
+          <p:cNvPr id="17" name="L 字 16"/>
+          <p:cNvSpPr/>
+          <p:nvPr/>
+        </p:nvSpPr>
+        <p:spPr>
+          <a:xfrm>
+            <a:off x="7164705" y="4446270"/>
+            <a:ext cx="923925" cy="925830"/>
+          </a:xfrm>
+          <a:prstGeom prst="corner">
+            <a:avLst/>
+          </a:prstGeom>
+          <a:solidFill>
+            <a:srgbClr val="E263F9"/>
+          </a:solidFill>
+        </p:spPr>
+        <p:style>
+          <a:lnRef idx="2">
+            <a:schemeClr val="accent2">
+              <a:shade val="15000"/>
+            </a:schemeClr>
+          </a:lnRef>
+          <a:fillRef idx="1">
+            <a:schemeClr val="accent2"/>
+          </a:fillRef>
+          <a:effectRef idx="0">
+            <a:schemeClr val="accent2"/>
+          </a:effectRef>
+          <a:fontRef idx="minor">
+            <a:schemeClr val="lt1"/>
+          </a:fontRef>
+        </p:style>
+        <p:txBody>
+          <a:bodyPr rtlCol="0" anchor="ctr"/>
+          <a:lstStyle/>
+          <a:p>
+            <a:pPr algn="ctr"/>
+            <a:endParaRPr kumimoji="1" lang="ja-JP" altLang="en-US"/>
+          </a:p>
+        </p:txBody>
+      </p:sp>
+      <p:sp>
+        <p:nvSpPr>
+          <p:cNvPr id="19" name="L 字 18"/>
+          <p:cNvSpPr/>
+          <p:nvPr/>
+        </p:nvSpPr>
+        <p:spPr>
+          <a:xfrm rot="16200000">
+            <a:off x="5580380" y="3130550"/>
+            <a:ext cx="923925" cy="925830"/>
+          </a:xfrm>
+          <a:prstGeom prst="corner">
+            <a:avLst/>
+          </a:prstGeom>
+          <a:solidFill>
+            <a:srgbClr val="E263F9"/>
+          </a:solidFill>
+        </p:spPr>
+        <p:style>
+          <a:lnRef idx="2">
+            <a:schemeClr val="accent2">
+              <a:shade val="15000"/>
+            </a:schemeClr>
+          </a:lnRef>
+          <a:fillRef idx="1">
+            <a:schemeClr val="accent2"/>
+          </a:fillRef>
+          <a:effectRef idx="0">
+            <a:schemeClr val="accent2"/>
+          </a:effectRef>
+          <a:fontRef idx="minor">
+            <a:schemeClr val="lt1"/>
+          </a:fontRef>
+        </p:style>
+        <p:txBody>
+          <a:bodyPr rtlCol="0" anchor="ctr"/>
+          <a:lstStyle/>
+          <a:p>
+            <a:pPr algn="ctr"/>
+            <a:endParaRPr kumimoji="1" lang="ja-JP" altLang="en-US"/>
+          </a:p>
+        </p:txBody>
+      </p:sp>
+      <p:sp>
+        <p:nvSpPr>
+          <p:cNvPr id="20" name="十字形 19"/>
+          <p:cNvSpPr/>
+          <p:nvPr/>
+        </p:nvSpPr>
+        <p:spPr>
+          <a:xfrm>
+            <a:off x="4459605" y="2855595"/>
+            <a:ext cx="1016000" cy="923925"/>
+          </a:xfrm>
+          <a:prstGeom prst="plus">
+            <a:avLst/>
+          </a:prstGeom>
+          <a:solidFill>
+            <a:srgbClr val="E263F9"/>
+          </a:solidFill>
+        </p:spPr>
+        <p:style>
+          <a:lnRef idx="2">
+            <a:schemeClr val="accent2">
+              <a:shade val="15000"/>
+            </a:schemeClr>
+          </a:lnRef>
+          <a:fillRef idx="1">
+            <a:schemeClr val="accent2"/>
+          </a:fillRef>
+          <a:effectRef idx="0">
+            <a:schemeClr val="accent2"/>
+          </a:effectRef>
+          <a:fontRef idx="minor">
+            <a:schemeClr val="lt1"/>
+          </a:fontRef>
+        </p:style>
+        <p:txBody>
+          <a:bodyPr rtlCol="0" anchor="ctr"/>
+          <a:lstStyle/>
+          <a:p>
+            <a:pPr algn="ctr"/>
+            <a:endParaRPr kumimoji="1" lang="ja-JP" altLang="en-US"/>
+          </a:p>
+        </p:txBody>
+      </p:sp>
+      <p:sp>
+        <p:nvSpPr>
+          <p:cNvPr id="22" name="十字形 21"/>
+          <p:cNvSpPr/>
+          <p:nvPr/>
+        </p:nvSpPr>
+        <p:spPr>
+          <a:xfrm>
+            <a:off x="7736840" y="3522345"/>
+            <a:ext cx="1016000" cy="923925"/>
+          </a:xfrm>
+          <a:prstGeom prst="plus">
+            <a:avLst/>
+          </a:prstGeom>
+          <a:solidFill>
+            <a:srgbClr val="E263F9"/>
+          </a:solidFill>
+        </p:spPr>
+        <p:style>
+          <a:lnRef idx="2">
+            <a:schemeClr val="accent2">
+              <a:shade val="15000"/>
+            </a:schemeClr>
+          </a:lnRef>
+          <a:fillRef idx="1">
+            <a:schemeClr val="accent2"/>
+          </a:fillRef>
+          <a:effectRef idx="0">
+            <a:schemeClr val="accent2"/>
+          </a:effectRef>
+          <a:fontRef idx="minor">
+            <a:schemeClr val="lt1"/>
+          </a:fontRef>
+        </p:style>
+        <p:txBody>
+          <a:bodyPr rtlCol="0" anchor="ctr"/>
+          <a:lstStyle/>
+          <a:p>
+            <a:pPr algn="ctr"/>
+            <a:endParaRPr kumimoji="1" lang="ja-JP" altLang="en-US"/>
+          </a:p>
+        </p:txBody>
+      </p:sp>
+      <p:sp>
+        <p:nvSpPr>
+          <p:cNvPr id="26" name="正方形/長方形 25"/>
+          <p:cNvSpPr/>
+          <p:nvPr/>
+        </p:nvSpPr>
+        <p:spPr>
+          <a:xfrm>
+            <a:off x="5468620" y="4981575"/>
+            <a:ext cx="1036955" cy="461010"/>
+          </a:xfrm>
+          <a:prstGeom prst="rect">
+            <a:avLst/>
+          </a:prstGeom>
+          <a:solidFill>
+            <a:srgbClr val="E263F9"/>
+          </a:solidFill>
+        </p:spPr>
+        <p:style>
+          <a:lnRef idx="2">
+            <a:schemeClr val="accent2">
+              <a:shade val="15000"/>
+            </a:schemeClr>
+          </a:lnRef>
+          <a:fillRef idx="1">
+            <a:schemeClr val="accent2"/>
+          </a:fillRef>
+          <a:effectRef idx="0">
+            <a:schemeClr val="accent2"/>
+          </a:effectRef>
+          <a:fontRef idx="minor">
+            <a:schemeClr val="lt1"/>
+          </a:fontRef>
+        </p:style>
+        <p:txBody>
+          <a:bodyPr rtlCol="0" anchor="ctr"/>
+          <a:lstStyle/>
+          <a:p>
+            <a:pPr algn="ctr"/>
+            <a:endParaRPr kumimoji="1" lang="ja-JP" altLang="en-US"/>
+          </a:p>
+        </p:txBody>
+      </p:sp>
+      <p:sp>
+        <p:nvSpPr>
+          <p:cNvPr id="28" name="楕円 27"/>
+          <p:cNvSpPr/>
+          <p:nvPr/>
+        </p:nvSpPr>
+        <p:spPr>
+          <a:xfrm>
+            <a:off x="3479165" y="3131820"/>
+            <a:ext cx="662940" cy="684530"/>
           </a:xfrm>
           <a:prstGeom prst="ellipse">
             <a:avLst/>
           </a:prstGeom>
+          <a:solidFill>
+            <a:srgbClr val="FF0000"/>
+          </a:solidFill>
         </p:spPr>
         <p:style>
           <a:lnRef idx="2">
@@ -4332,24 +3981,24 @@
       </p:sp>
       <p:sp>
         <p:nvSpPr>
-          <p:cNvPr id="30" name="楕円 29">
-            <a:extLst>
-              <a:ext uri="{FF2B5EF4-FFF2-40B4-BE49-F238E27FC236}">
-                <a16:creationId xmlns:a16="http://schemas.microsoft.com/office/drawing/2014/main" id="{974E3F9D-36FF-11A1-A010-20E43362A404}"/>
-              </a:ext>
-            </a:extLst>
-          </p:cNvPr>
+          <p:cNvPr id="30" name="楕円 29"/>
           <p:cNvSpPr/>
           <p:nvPr/>
         </p:nvSpPr>
         <p:spPr>
           <a:xfrm>
-            <a:off x="3512128" y="3612341"/>
-            <a:ext cx="662709" cy="684648"/>
+            <a:off x="4883150" y="3937000"/>
+            <a:ext cx="662940" cy="684530"/>
           </a:xfrm>
           <a:prstGeom prst="ellipse">
             <a:avLst/>
           </a:prstGeom>
+          <a:solidFill>
+            <a:schemeClr val="tx2">
+              <a:lumMod val="25000"/>
+              <a:lumOff val="75000"/>
+            </a:schemeClr>
+          </a:solidFill>
         </p:spPr>
         <p:style>
           <a:lnRef idx="2">
@@ -4378,24 +4027,24 @@
       </p:sp>
       <p:sp>
         <p:nvSpPr>
-          <p:cNvPr id="32" name="楕円 31">
-            <a:extLst>
-              <a:ext uri="{FF2B5EF4-FFF2-40B4-BE49-F238E27FC236}">
-                <a16:creationId xmlns:a16="http://schemas.microsoft.com/office/drawing/2014/main" id="{090131BB-E4CC-8DD3-572A-AB56B4BB8EA0}"/>
-              </a:ext>
-            </a:extLst>
-          </p:cNvPr>
+          <p:cNvPr id="32" name="楕円 31"/>
           <p:cNvSpPr/>
           <p:nvPr/>
         </p:nvSpPr>
         <p:spPr>
           <a:xfrm>
-            <a:off x="3159879" y="1211211"/>
-            <a:ext cx="662709" cy="684648"/>
+            <a:off x="4530725" y="1535430"/>
+            <a:ext cx="662940" cy="684530"/>
           </a:xfrm>
           <a:prstGeom prst="ellipse">
             <a:avLst/>
           </a:prstGeom>
+          <a:solidFill>
+            <a:schemeClr val="tx2">
+              <a:lumMod val="25000"/>
+              <a:lumOff val="75000"/>
+            </a:schemeClr>
+          </a:solidFill>
         </p:spPr>
         <p:style>
           <a:lnRef idx="2">
@@ -4424,24 +4073,24 @@
       </p:sp>
       <p:sp>
         <p:nvSpPr>
-          <p:cNvPr id="34" name="楕円 33">
-            <a:extLst>
-              <a:ext uri="{FF2B5EF4-FFF2-40B4-BE49-F238E27FC236}">
-                <a16:creationId xmlns:a16="http://schemas.microsoft.com/office/drawing/2014/main" id="{3ED1E6C7-7388-A7D3-B703-A8D549F5B6F0}"/>
-              </a:ext>
-            </a:extLst>
-          </p:cNvPr>
+          <p:cNvPr id="34" name="楕円 33"/>
           <p:cNvSpPr/>
           <p:nvPr/>
         </p:nvSpPr>
         <p:spPr>
           <a:xfrm>
-            <a:off x="5488021" y="3149697"/>
-            <a:ext cx="662709" cy="684648"/>
+            <a:off x="6902450" y="3380105"/>
+            <a:ext cx="662940" cy="684530"/>
           </a:xfrm>
           <a:prstGeom prst="ellipse">
             <a:avLst/>
           </a:prstGeom>
+          <a:solidFill>
+            <a:schemeClr val="tx2">
+              <a:lumMod val="25000"/>
+              <a:lumOff val="75000"/>
+            </a:schemeClr>
+          </a:solidFill>
         </p:spPr>
         <p:style>
           <a:lnRef idx="2">
@@ -4468,12 +4117,3305 @@
           </a:p>
         </p:txBody>
       </p:sp>
+      <p:sp>
+        <p:nvSpPr>
+          <p:cNvPr id="8" name="テキストボックス 7"/>
+          <p:cNvSpPr txBox="1"/>
+          <p:nvPr/>
+        </p:nvSpPr>
+        <p:spPr>
+          <a:xfrm>
+            <a:off x="1209675" y="375920"/>
+            <a:ext cx="8514715" cy="922020"/>
+          </a:xfrm>
+          <a:prstGeom prst="rect">
+            <a:avLst/>
+          </a:prstGeom>
+          <a:noFill/>
+        </p:spPr>
+        <p:txBody>
+          <a:bodyPr wrap="square" rtlCol="0">
+            <a:spAutoFit/>
+          </a:bodyPr>
+          <a:p>
+            <a:r>
+              <a:rPr lang="ja-JP" altLang="en-US"/>
+              <a:t>マップイメージ</a:t>
+            </a:r>
+            <a:r>
+              <a:rPr lang="ja-JP" altLang="en-US"/>
+              <a:t>図</a:t>
+            </a:r>
+            <a:endParaRPr lang="ja-JP" altLang="en-US"/>
+          </a:p>
+          <a:p>
+            <a:endParaRPr lang="ja-JP" altLang="en-US"/>
+          </a:p>
+          <a:p>
+            <a:r>
+              <a:rPr lang="ja-JP" altLang="en-US"/>
+              <a:t>１．</a:t>
+            </a:r>
+            <a:endParaRPr lang="ja-JP" altLang="en-US"/>
+          </a:p>
+        </p:txBody>
+      </p:sp>
+      <p:sp>
+        <p:nvSpPr>
+          <p:cNvPr id="10" name="楕円 9"/>
+          <p:cNvSpPr/>
+          <p:nvPr/>
+        </p:nvSpPr>
+        <p:spPr>
+          <a:xfrm>
+            <a:off x="6889750" y="2219960"/>
+            <a:ext cx="662940" cy="684530"/>
+          </a:xfrm>
+          <a:prstGeom prst="ellipse">
+            <a:avLst/>
+          </a:prstGeom>
+          <a:solidFill>
+            <a:srgbClr val="FF0000"/>
+          </a:solidFill>
+        </p:spPr>
+        <p:style>
+          <a:lnRef idx="2">
+            <a:schemeClr val="accent1">
+              <a:shade val="15000"/>
+            </a:schemeClr>
+          </a:lnRef>
+          <a:fillRef idx="1">
+            <a:schemeClr val="accent1"/>
+          </a:fillRef>
+          <a:effectRef idx="0">
+            <a:schemeClr val="accent1"/>
+          </a:effectRef>
+          <a:fontRef idx="minor">
+            <a:schemeClr val="lt1"/>
+          </a:fontRef>
+        </p:style>
+        <p:txBody>
+          <a:bodyPr rtlCol="0" anchor="ctr"/>
+          <a:lstStyle/>
+          <a:p>
+            <a:pPr algn="ctr"/>
+            <a:endParaRPr kumimoji="1" lang="ja-JP" altLang="en-US"/>
+          </a:p>
+        </p:txBody>
+      </p:sp>
+      <p:sp>
+        <p:nvSpPr>
+          <p:cNvPr id="12" name="楕円 11"/>
+          <p:cNvSpPr/>
+          <p:nvPr/>
+        </p:nvSpPr>
+        <p:spPr>
+          <a:xfrm>
+            <a:off x="2368550" y="1774825"/>
+            <a:ext cx="662940" cy="684530"/>
+          </a:xfrm>
+          <a:prstGeom prst="ellipse">
+            <a:avLst/>
+          </a:prstGeom>
+          <a:solidFill>
+            <a:srgbClr val="FF0000"/>
+          </a:solidFill>
+        </p:spPr>
+        <p:style>
+          <a:lnRef idx="2">
+            <a:schemeClr val="accent1">
+              <a:shade val="15000"/>
+            </a:schemeClr>
+          </a:lnRef>
+          <a:fillRef idx="1">
+            <a:schemeClr val="accent1"/>
+          </a:fillRef>
+          <a:effectRef idx="0">
+            <a:schemeClr val="accent1"/>
+          </a:effectRef>
+          <a:fontRef idx="minor">
+            <a:schemeClr val="lt1"/>
+          </a:fontRef>
+        </p:style>
+        <p:txBody>
+          <a:bodyPr rtlCol="0" anchor="ctr"/>
+          <a:lstStyle/>
+          <a:p>
+            <a:pPr algn="ctr"/>
+            <a:endParaRPr kumimoji="1" lang="ja-JP" altLang="en-US"/>
+          </a:p>
+        </p:txBody>
+      </p:sp>
+      <p:sp>
+        <p:nvSpPr>
+          <p:cNvPr id="14" name="四角形 13"/>
+          <p:cNvSpPr/>
+          <p:nvPr/>
+        </p:nvSpPr>
+        <p:spPr>
+          <a:xfrm>
+            <a:off x="1933575" y="3630930"/>
+            <a:ext cx="1356360" cy="749935"/>
+          </a:xfrm>
+          <a:prstGeom prst="rect">
+            <a:avLst/>
+          </a:prstGeom>
+          <a:solidFill>
+            <a:schemeClr val="bg1"/>
+          </a:solidFill>
+        </p:spPr>
+        <p:style>
+          <a:lnRef idx="2">
+            <a:schemeClr val="accent1">
+              <a:lumMod val="75000"/>
+            </a:schemeClr>
+          </a:lnRef>
+          <a:fillRef idx="1">
+            <a:schemeClr val="accent1"/>
+          </a:fillRef>
+          <a:effectRef idx="0">
+            <a:srgbClr val="FFFFFF"/>
+          </a:effectRef>
+          <a:fontRef idx="minor">
+            <a:schemeClr val="lt1"/>
+          </a:fontRef>
+        </p:style>
+        <p:txBody>
+          <a:bodyPr rtlCol="0" anchor="ctr"/>
+          <a:p>
+            <a:pPr algn="ctr"/>
+            <a:endParaRPr lang="ja-JP" altLang="en-US"/>
+          </a:p>
+        </p:txBody>
+      </p:sp>
+      <p:sp>
+        <p:nvSpPr>
+          <p:cNvPr id="16" name="四角形 15"/>
+          <p:cNvSpPr/>
+          <p:nvPr/>
+        </p:nvSpPr>
+        <p:spPr>
+          <a:xfrm>
+            <a:off x="8249285" y="1445260"/>
+            <a:ext cx="973455" cy="1014730"/>
+          </a:xfrm>
+          <a:prstGeom prst="rect">
+            <a:avLst/>
+          </a:prstGeom>
+          <a:solidFill>
+            <a:schemeClr val="bg1"/>
+          </a:solidFill>
+        </p:spPr>
+        <p:style>
+          <a:lnRef idx="2">
+            <a:schemeClr val="accent1">
+              <a:lumMod val="75000"/>
+            </a:schemeClr>
+          </a:lnRef>
+          <a:fillRef idx="1">
+            <a:schemeClr val="accent1"/>
+          </a:fillRef>
+          <a:effectRef idx="0">
+            <a:srgbClr val="FFFFFF"/>
+          </a:effectRef>
+          <a:fontRef idx="minor">
+            <a:schemeClr val="lt1"/>
+          </a:fontRef>
+        </p:style>
+        <p:txBody>
+          <a:bodyPr rtlCol="0" anchor="ctr"/>
+          <a:p>
+            <a:pPr algn="ctr"/>
+            <a:endParaRPr lang="ja-JP" altLang="en-US"/>
+          </a:p>
+        </p:txBody>
+      </p:sp>
+      <p:sp>
+        <p:nvSpPr>
+          <p:cNvPr id="18" name="四角形 17"/>
+          <p:cNvSpPr/>
+          <p:nvPr/>
+        </p:nvSpPr>
+        <p:spPr>
+          <a:xfrm>
+            <a:off x="5619750" y="4064635"/>
+            <a:ext cx="1370330" cy="908685"/>
+          </a:xfrm>
+          <a:prstGeom prst="rect">
+            <a:avLst/>
+          </a:prstGeom>
+          <a:solidFill>
+            <a:schemeClr val="bg1"/>
+          </a:solidFill>
+        </p:spPr>
+        <p:style>
+          <a:lnRef idx="2">
+            <a:schemeClr val="accent1">
+              <a:lumMod val="75000"/>
+            </a:schemeClr>
+          </a:lnRef>
+          <a:fillRef idx="1">
+            <a:schemeClr val="accent1"/>
+          </a:fillRef>
+          <a:effectRef idx="0">
+            <a:srgbClr val="FFFFFF"/>
+          </a:effectRef>
+          <a:fontRef idx="minor">
+            <a:schemeClr val="lt1"/>
+          </a:fontRef>
+        </p:style>
+        <p:txBody>
+          <a:bodyPr rtlCol="0" anchor="ctr"/>
+          <a:p>
+            <a:pPr algn="ctr"/>
+            <a:endParaRPr lang="ja-JP" altLang="en-US"/>
+          </a:p>
+        </p:txBody>
+      </p:sp>
+      <p:sp>
+        <p:nvSpPr>
+          <p:cNvPr id="25" name="角丸四角形吹き出し 24"/>
+          <p:cNvSpPr/>
+          <p:nvPr/>
+        </p:nvSpPr>
+        <p:spPr>
+          <a:xfrm>
+            <a:off x="4361815" y="264795"/>
+            <a:ext cx="1370965" cy="866140"/>
+          </a:xfrm>
+          <a:prstGeom prst="wedgeRoundRectCallout">
+            <a:avLst>
+              <a:gd name="adj1" fmla="val -16651"/>
+              <a:gd name="adj2" fmla="val 129178"/>
+              <a:gd name="adj3" fmla="val 16667"/>
+            </a:avLst>
+          </a:prstGeom>
+        </p:spPr>
+        <p:style>
+          <a:lnRef idx="2">
+            <a:schemeClr val="accent1"/>
+          </a:lnRef>
+          <a:fillRef idx="0">
+            <a:srgbClr val="FFFFFF"/>
+          </a:fillRef>
+          <a:effectRef idx="0">
+            <a:srgbClr val="FFFFFF"/>
+          </a:effectRef>
+          <a:fontRef idx="minor">
+            <a:schemeClr val="tx1"/>
+          </a:fontRef>
+        </p:style>
+        <p:txBody>
+          <a:bodyPr rtlCol="0" anchor="ctr"/>
+          <a:p>
+            <a:pPr algn="ctr"/>
+            <a:endParaRPr lang="ja-JP" altLang="en-US"/>
+          </a:p>
+        </p:txBody>
+      </p:sp>
+      <p:sp>
+        <p:nvSpPr>
+          <p:cNvPr id="27" name="角丸四角形吹き出し 26"/>
+          <p:cNvSpPr/>
+          <p:nvPr/>
+        </p:nvSpPr>
+        <p:spPr>
+          <a:xfrm>
+            <a:off x="159385" y="3580130"/>
+            <a:ext cx="1370965" cy="866140"/>
+          </a:xfrm>
+          <a:prstGeom prst="wedgeRoundRectCallout">
+            <a:avLst>
+              <a:gd name="adj1" fmla="val 218087"/>
+              <a:gd name="adj2" fmla="val -62463"/>
+              <a:gd name="adj3" fmla="val 16667"/>
+            </a:avLst>
+          </a:prstGeom>
+        </p:spPr>
+        <p:style>
+          <a:lnRef idx="2">
+            <a:schemeClr val="accent1"/>
+          </a:lnRef>
+          <a:fillRef idx="0">
+            <a:srgbClr val="FFFFFF"/>
+          </a:fillRef>
+          <a:effectRef idx="0">
+            <a:srgbClr val="FFFFFF"/>
+          </a:effectRef>
+          <a:fontRef idx="minor">
+            <a:schemeClr val="tx1"/>
+          </a:fontRef>
+        </p:style>
+        <p:txBody>
+          <a:bodyPr rtlCol="0" anchor="ctr"/>
+          <a:p>
+            <a:pPr algn="ctr"/>
+            <a:endParaRPr lang="ja-JP" altLang="en-US"/>
+          </a:p>
+        </p:txBody>
+      </p:sp>
+      <p:sp>
+        <p:nvSpPr>
+          <p:cNvPr id="29" name="角丸四角形吹き出し 28"/>
+          <p:cNvSpPr/>
+          <p:nvPr/>
+        </p:nvSpPr>
+        <p:spPr>
+          <a:xfrm>
+            <a:off x="9609455" y="391795"/>
+            <a:ext cx="1370965" cy="866140"/>
+          </a:xfrm>
+          <a:prstGeom prst="wedgeRoundRectCallout">
+            <a:avLst>
+              <a:gd name="adj1" fmla="val -111417"/>
+              <a:gd name="adj2" fmla="val 140835"/>
+              <a:gd name="adj3" fmla="val 16667"/>
+            </a:avLst>
+          </a:prstGeom>
+        </p:spPr>
+        <p:style>
+          <a:lnRef idx="2">
+            <a:schemeClr val="accent1"/>
+          </a:lnRef>
+          <a:fillRef idx="0">
+            <a:srgbClr val="FFFFFF"/>
+          </a:fillRef>
+          <a:effectRef idx="0">
+            <a:srgbClr val="FFFFFF"/>
+          </a:effectRef>
+          <a:fontRef idx="minor">
+            <a:schemeClr val="tx1"/>
+          </a:fontRef>
+        </p:style>
+        <p:txBody>
+          <a:bodyPr rtlCol="0" anchor="ctr"/>
+          <a:p>
+            <a:pPr algn="ctr"/>
+            <a:endParaRPr lang="ja-JP" altLang="en-US"/>
+          </a:p>
+        </p:txBody>
+      </p:sp>
+      <p:sp>
+        <p:nvSpPr>
+          <p:cNvPr id="36" name="テキストボックス 35"/>
+          <p:cNvSpPr txBox="1"/>
+          <p:nvPr/>
+        </p:nvSpPr>
+        <p:spPr>
+          <a:xfrm>
+            <a:off x="9746615" y="499110"/>
+            <a:ext cx="1169035" cy="758190"/>
+          </a:xfrm>
+          <a:prstGeom prst="rect">
+            <a:avLst/>
+          </a:prstGeom>
+          <a:noFill/>
+        </p:spPr>
+        <p:txBody>
+          <a:bodyPr wrap="square" rtlCol="0">
+            <a:noAutofit/>
+          </a:bodyPr>
+          <a:p>
+            <a:r>
+              <a:rPr lang="ja-JP" altLang="en-US" sz="3600"/>
+              <a:t>無敵</a:t>
+            </a:r>
+            <a:endParaRPr lang="ja-JP" altLang="en-US" sz="3600"/>
+          </a:p>
+        </p:txBody>
+      </p:sp>
+      <p:sp>
+        <p:nvSpPr>
+          <p:cNvPr id="37" name="テキストボックス 36"/>
+          <p:cNvSpPr txBox="1"/>
+          <p:nvPr/>
+        </p:nvSpPr>
+        <p:spPr>
+          <a:xfrm>
+            <a:off x="247650" y="3816350"/>
+            <a:ext cx="1169035" cy="758190"/>
+          </a:xfrm>
+          <a:prstGeom prst="rect">
+            <a:avLst/>
+          </a:prstGeom>
+          <a:noFill/>
+        </p:spPr>
+        <p:txBody>
+          <a:bodyPr wrap="square" rtlCol="0">
+            <a:noAutofit/>
+          </a:bodyPr>
+          <a:p>
+            <a:r>
+              <a:rPr lang="ja-JP" altLang="en-US" sz="2400"/>
+              <a:t>マグマ</a:t>
+            </a:r>
+            <a:endParaRPr lang="ja-JP" altLang="en-US" sz="2400"/>
+          </a:p>
+        </p:txBody>
+      </p:sp>
+      <p:sp>
+        <p:nvSpPr>
+          <p:cNvPr id="38" name="テキストボックス 37"/>
+          <p:cNvSpPr txBox="1"/>
+          <p:nvPr/>
+        </p:nvSpPr>
+        <p:spPr>
+          <a:xfrm>
+            <a:off x="4450715" y="539750"/>
+            <a:ext cx="1169035" cy="758190"/>
+          </a:xfrm>
+          <a:prstGeom prst="rect">
+            <a:avLst/>
+          </a:prstGeom>
+          <a:noFill/>
+        </p:spPr>
+        <p:txBody>
+          <a:bodyPr wrap="square" rtlCol="0">
+            <a:noAutofit/>
+          </a:bodyPr>
+          <a:p>
+            <a:r>
+              <a:rPr lang="ja-JP" altLang="en-US"/>
+              <a:t>氷の床</a:t>
+            </a:r>
+            <a:endParaRPr lang="ja-JP" altLang="en-US"/>
+          </a:p>
+        </p:txBody>
+      </p:sp>
     </p:spTree>
-    <p:extLst>
-      <p:ext uri="{BB962C8B-B14F-4D97-AF65-F5344CB8AC3E}">
-        <p14:creationId xmlns:p14="http://schemas.microsoft.com/office/powerpoint/2010/main" val="4149979930"/>
-      </p:ext>
-    </p:extLst>
+  </p:cSld>
+  <p:clrMapOvr>
+    <a:masterClrMapping/>
+  </p:clrMapOvr>
+</p:sld>
+</file>
+
+<file path=ppt/slides/slide3.xml><?xml version="1.0" encoding="utf-8"?>
+<p:sld xmlns:a="http://schemas.openxmlformats.org/drawingml/2006/main" xmlns:r="http://schemas.openxmlformats.org/officeDocument/2006/relationships" xmlns:p="http://schemas.openxmlformats.org/presentationml/2006/main">
+  <p:cSld>
+    <p:spTree>
+      <p:nvGrpSpPr>
+        <p:cNvPr id="1" name=""/>
+        <p:cNvGrpSpPr/>
+        <p:nvPr/>
+      </p:nvGrpSpPr>
+      <p:grpSpPr/>
+      <p:sp>
+        <p:nvSpPr>
+          <p:cNvPr id="2" name="タイトル 1"/>
+          <p:cNvSpPr>
+            <a:spLocks noGrp="1"/>
+          </p:cNvSpPr>
+          <p:nvPr>
+            <p:ph type="title"/>
+          </p:nvPr>
+        </p:nvSpPr>
+        <p:spPr/>
+        <p:txBody>
+          <a:bodyPr/>
+          <a:p>
+            <a:r>
+              <a:rPr lang="ja-JP" altLang="en-US" sz="2000"/>
+              <a:t>２</a:t>
+            </a:r>
+            <a:r>
+              <a:rPr lang="en-US" altLang="ja-JP" sz="2000"/>
+              <a:t>.</a:t>
+            </a:r>
+            <a:endParaRPr lang="en-US" altLang="ja-JP" sz="2000"/>
+          </a:p>
+        </p:txBody>
+      </p:sp>
+      <p:sp>
+        <p:nvSpPr>
+          <p:cNvPr id="4" name="四角形 3"/>
+          <p:cNvSpPr/>
+          <p:nvPr/>
+        </p:nvSpPr>
+        <p:spPr>
+          <a:xfrm>
+            <a:off x="1275080" y="1407795"/>
+            <a:ext cx="9337675" cy="4892675"/>
+          </a:xfrm>
+          <a:prstGeom prst="rect">
+            <a:avLst/>
+          </a:prstGeom>
+          <a:solidFill>
+            <a:schemeClr val="accent5">
+              <a:lumMod val="75000"/>
+            </a:schemeClr>
+          </a:solidFill>
+        </p:spPr>
+        <p:style>
+          <a:lnRef idx="2">
+            <a:schemeClr val="accent1">
+              <a:lumMod val="75000"/>
+            </a:schemeClr>
+          </a:lnRef>
+          <a:fillRef idx="1">
+            <a:schemeClr val="accent1"/>
+          </a:fillRef>
+          <a:effectRef idx="0">
+            <a:srgbClr val="FFFFFF"/>
+          </a:effectRef>
+          <a:fontRef idx="minor">
+            <a:schemeClr val="lt1"/>
+          </a:fontRef>
+        </p:style>
+        <p:txBody>
+          <a:bodyPr rtlCol="0" anchor="ctr"/>
+          <a:p>
+            <a:pPr algn="ctr"/>
+            <a:endParaRPr lang="ja-JP" altLang="en-US"/>
+          </a:p>
+        </p:txBody>
+      </p:sp>
+      <p:sp>
+        <p:nvSpPr>
+          <p:cNvPr id="5" name="十字形 4"/>
+          <p:cNvSpPr/>
+          <p:nvPr/>
+        </p:nvSpPr>
+        <p:spPr>
+          <a:xfrm>
+            <a:off x="8347710" y="2028825"/>
+            <a:ext cx="1515110" cy="1399540"/>
+          </a:xfrm>
+          <a:prstGeom prst="plus">
+            <a:avLst/>
+          </a:prstGeom>
+          <a:solidFill>
+            <a:srgbClr val="FFFF00"/>
+          </a:solidFill>
+        </p:spPr>
+        <p:style>
+          <a:lnRef idx="2">
+            <a:schemeClr val="accent1">
+              <a:lumMod val="75000"/>
+            </a:schemeClr>
+          </a:lnRef>
+          <a:fillRef idx="1">
+            <a:schemeClr val="accent1"/>
+          </a:fillRef>
+          <a:effectRef idx="0">
+            <a:srgbClr val="FFFFFF"/>
+          </a:effectRef>
+          <a:fontRef idx="minor">
+            <a:schemeClr val="lt1"/>
+          </a:fontRef>
+        </p:style>
+        <p:txBody>
+          <a:bodyPr rtlCol="0" anchor="ctr"/>
+          <a:p>
+            <a:pPr algn="ctr"/>
+            <a:endParaRPr lang="ja-JP" altLang="en-US"/>
+          </a:p>
+        </p:txBody>
+      </p:sp>
+      <p:sp>
+        <p:nvSpPr>
+          <p:cNvPr id="6" name="L字 5"/>
+          <p:cNvSpPr/>
+          <p:nvPr/>
+        </p:nvSpPr>
+        <p:spPr>
+          <a:xfrm>
+            <a:off x="7567295" y="3630295"/>
+            <a:ext cx="1356995" cy="1356360"/>
+          </a:xfrm>
+          <a:prstGeom prst="corner">
+            <a:avLst/>
+          </a:prstGeom>
+          <a:solidFill>
+            <a:srgbClr val="FFFF00"/>
+          </a:solidFill>
+        </p:spPr>
+        <p:style>
+          <a:lnRef idx="2">
+            <a:schemeClr val="accent1">
+              <a:lumMod val="75000"/>
+            </a:schemeClr>
+          </a:lnRef>
+          <a:fillRef idx="1">
+            <a:schemeClr val="accent1"/>
+          </a:fillRef>
+          <a:effectRef idx="0">
+            <a:srgbClr val="FFFFFF"/>
+          </a:effectRef>
+          <a:fontRef idx="minor">
+            <a:schemeClr val="lt1"/>
+          </a:fontRef>
+        </p:style>
+        <p:txBody>
+          <a:bodyPr rtlCol="0" anchor="ctr"/>
+          <a:p>
+            <a:pPr algn="ctr"/>
+            <a:endParaRPr lang="ja-JP" altLang="en-US"/>
+          </a:p>
+        </p:txBody>
+      </p:sp>
+      <p:sp>
+        <p:nvSpPr>
+          <p:cNvPr id="7" name="四角形 6"/>
+          <p:cNvSpPr/>
+          <p:nvPr/>
+        </p:nvSpPr>
+        <p:spPr>
+          <a:xfrm>
+            <a:off x="1706245" y="1732915"/>
+            <a:ext cx="2020570" cy="663575"/>
+          </a:xfrm>
+          <a:prstGeom prst="rect">
+            <a:avLst/>
+          </a:prstGeom>
+          <a:solidFill>
+            <a:srgbClr val="FFFF00"/>
+          </a:solidFill>
+        </p:spPr>
+        <p:style>
+          <a:lnRef idx="2">
+            <a:schemeClr val="accent1">
+              <a:lumMod val="75000"/>
+            </a:schemeClr>
+          </a:lnRef>
+          <a:fillRef idx="1">
+            <a:schemeClr val="accent1"/>
+          </a:fillRef>
+          <a:effectRef idx="0">
+            <a:srgbClr val="FFFFFF"/>
+          </a:effectRef>
+          <a:fontRef idx="minor">
+            <a:schemeClr val="lt1"/>
+          </a:fontRef>
+        </p:style>
+        <p:txBody>
+          <a:bodyPr rtlCol="0" anchor="ctr"/>
+          <a:p>
+            <a:pPr algn="ctr"/>
+            <a:endParaRPr lang="ja-JP" altLang="en-US"/>
+          </a:p>
+        </p:txBody>
+      </p:sp>
+      <p:sp>
+        <p:nvSpPr>
+          <p:cNvPr id="8" name="十字形 7"/>
+          <p:cNvSpPr/>
+          <p:nvPr/>
+        </p:nvSpPr>
+        <p:spPr>
+          <a:xfrm>
+            <a:off x="2355215" y="4104005"/>
+            <a:ext cx="1515110" cy="1399540"/>
+          </a:xfrm>
+          <a:prstGeom prst="plus">
+            <a:avLst/>
+          </a:prstGeom>
+          <a:solidFill>
+            <a:srgbClr val="FFFF00"/>
+          </a:solidFill>
+        </p:spPr>
+        <p:style>
+          <a:lnRef idx="2">
+            <a:schemeClr val="accent1">
+              <a:lumMod val="75000"/>
+            </a:schemeClr>
+          </a:lnRef>
+          <a:fillRef idx="1">
+            <a:schemeClr val="accent1"/>
+          </a:fillRef>
+          <a:effectRef idx="0">
+            <a:srgbClr val="FFFFFF"/>
+          </a:effectRef>
+          <a:fontRef idx="minor">
+            <a:schemeClr val="lt1"/>
+          </a:fontRef>
+        </p:style>
+        <p:txBody>
+          <a:bodyPr rtlCol="0" anchor="ctr"/>
+          <a:p>
+            <a:pPr algn="ctr"/>
+            <a:endParaRPr lang="ja-JP" altLang="en-US"/>
+          </a:p>
+        </p:txBody>
+      </p:sp>
+      <p:sp>
+        <p:nvSpPr>
+          <p:cNvPr id="9" name="L字 8"/>
+          <p:cNvSpPr/>
+          <p:nvPr/>
+        </p:nvSpPr>
+        <p:spPr>
+          <a:xfrm rot="16200000">
+            <a:off x="8923655" y="4719955"/>
+            <a:ext cx="1356995" cy="1356360"/>
+          </a:xfrm>
+          <a:prstGeom prst="corner">
+            <a:avLst/>
+          </a:prstGeom>
+          <a:solidFill>
+            <a:srgbClr val="FFFF00"/>
+          </a:solidFill>
+        </p:spPr>
+        <p:style>
+          <a:lnRef idx="2">
+            <a:schemeClr val="accent1">
+              <a:lumMod val="75000"/>
+            </a:schemeClr>
+          </a:lnRef>
+          <a:fillRef idx="1">
+            <a:schemeClr val="accent1"/>
+          </a:fillRef>
+          <a:effectRef idx="0">
+            <a:srgbClr val="FFFFFF"/>
+          </a:effectRef>
+          <a:fontRef idx="minor">
+            <a:schemeClr val="lt1"/>
+          </a:fontRef>
+        </p:style>
+        <p:txBody>
+          <a:bodyPr rtlCol="0" anchor="ctr"/>
+          <a:p>
+            <a:pPr algn="ctr"/>
+            <a:endParaRPr lang="ja-JP" altLang="en-US"/>
+          </a:p>
+        </p:txBody>
+      </p:sp>
+      <p:sp>
+        <p:nvSpPr>
+          <p:cNvPr id="10" name="L字 9"/>
+          <p:cNvSpPr/>
+          <p:nvPr/>
+        </p:nvSpPr>
+        <p:spPr>
+          <a:xfrm rot="10800000">
+            <a:off x="3726815" y="3175635"/>
+            <a:ext cx="1356995" cy="1356360"/>
+          </a:xfrm>
+          <a:prstGeom prst="corner">
+            <a:avLst/>
+          </a:prstGeom>
+          <a:solidFill>
+            <a:srgbClr val="FFFF00"/>
+          </a:solidFill>
+        </p:spPr>
+        <p:style>
+          <a:lnRef idx="2">
+            <a:schemeClr val="accent1">
+              <a:lumMod val="75000"/>
+            </a:schemeClr>
+          </a:lnRef>
+          <a:fillRef idx="1">
+            <a:schemeClr val="accent1"/>
+          </a:fillRef>
+          <a:effectRef idx="0">
+            <a:srgbClr val="FFFFFF"/>
+          </a:effectRef>
+          <a:fontRef idx="minor">
+            <a:schemeClr val="lt1"/>
+          </a:fontRef>
+        </p:style>
+        <p:txBody>
+          <a:bodyPr rtlCol="0" anchor="ctr"/>
+          <a:p>
+            <a:pPr algn="ctr"/>
+            <a:endParaRPr lang="ja-JP" altLang="en-US"/>
+          </a:p>
+        </p:txBody>
+      </p:sp>
+      <p:sp>
+        <p:nvSpPr>
+          <p:cNvPr id="11" name="L字 10"/>
+          <p:cNvSpPr/>
+          <p:nvPr/>
+        </p:nvSpPr>
+        <p:spPr>
+          <a:xfrm rot="5400000">
+            <a:off x="1705610" y="2747010"/>
+            <a:ext cx="1356995" cy="1356360"/>
+          </a:xfrm>
+          <a:prstGeom prst="corner">
+            <a:avLst/>
+          </a:prstGeom>
+          <a:solidFill>
+            <a:srgbClr val="FFFF00"/>
+          </a:solidFill>
+        </p:spPr>
+        <p:style>
+          <a:lnRef idx="2">
+            <a:schemeClr val="accent1">
+              <a:lumMod val="75000"/>
+            </a:schemeClr>
+          </a:lnRef>
+          <a:fillRef idx="1">
+            <a:schemeClr val="accent1"/>
+          </a:fillRef>
+          <a:effectRef idx="0">
+            <a:srgbClr val="FFFFFF"/>
+          </a:effectRef>
+          <a:fontRef idx="minor">
+            <a:schemeClr val="lt1"/>
+          </a:fontRef>
+        </p:style>
+        <p:txBody>
+          <a:bodyPr rtlCol="0" anchor="ctr"/>
+          <a:p>
+            <a:pPr algn="ctr"/>
+            <a:endParaRPr lang="ja-JP" altLang="en-US"/>
+          </a:p>
+        </p:txBody>
+      </p:sp>
+      <p:sp>
+        <p:nvSpPr>
+          <p:cNvPr id="12" name="四角形 11"/>
+          <p:cNvSpPr/>
+          <p:nvPr/>
+        </p:nvSpPr>
+        <p:spPr>
+          <a:xfrm rot="5400000">
+            <a:off x="5824220" y="4565650"/>
+            <a:ext cx="2020570" cy="663575"/>
+          </a:xfrm>
+          <a:prstGeom prst="rect">
+            <a:avLst/>
+          </a:prstGeom>
+          <a:solidFill>
+            <a:srgbClr val="FFFF00"/>
+          </a:solidFill>
+        </p:spPr>
+        <p:style>
+          <a:lnRef idx="2">
+            <a:schemeClr val="accent1">
+              <a:lumMod val="75000"/>
+            </a:schemeClr>
+          </a:lnRef>
+          <a:fillRef idx="1">
+            <a:schemeClr val="accent1"/>
+          </a:fillRef>
+          <a:effectRef idx="0">
+            <a:srgbClr val="FFFFFF"/>
+          </a:effectRef>
+          <a:fontRef idx="minor">
+            <a:schemeClr val="lt1"/>
+          </a:fontRef>
+        </p:style>
+        <p:txBody>
+          <a:bodyPr rtlCol="0" anchor="ctr"/>
+          <a:p>
+            <a:pPr algn="ctr"/>
+            <a:endParaRPr lang="ja-JP" altLang="en-US"/>
+          </a:p>
+        </p:txBody>
+      </p:sp>
+      <p:sp>
+        <p:nvSpPr>
+          <p:cNvPr id="13" name="四角形 12"/>
+          <p:cNvSpPr/>
+          <p:nvPr/>
+        </p:nvSpPr>
+        <p:spPr>
+          <a:xfrm>
+            <a:off x="4176395" y="4980940"/>
+            <a:ext cx="2020570" cy="663575"/>
+          </a:xfrm>
+          <a:prstGeom prst="rect">
+            <a:avLst/>
+          </a:prstGeom>
+          <a:solidFill>
+            <a:srgbClr val="FFFF00"/>
+          </a:solidFill>
+        </p:spPr>
+        <p:style>
+          <a:lnRef idx="2">
+            <a:schemeClr val="accent1">
+              <a:lumMod val="75000"/>
+            </a:schemeClr>
+          </a:lnRef>
+          <a:fillRef idx="1">
+            <a:schemeClr val="accent1"/>
+          </a:fillRef>
+          <a:effectRef idx="0">
+            <a:srgbClr val="FFFFFF"/>
+          </a:effectRef>
+          <a:fontRef idx="minor">
+            <a:schemeClr val="lt1"/>
+          </a:fontRef>
+        </p:style>
+        <p:txBody>
+          <a:bodyPr rtlCol="0" anchor="ctr"/>
+          <a:p>
+            <a:pPr algn="ctr"/>
+            <a:endParaRPr lang="ja-JP" altLang="en-US"/>
+          </a:p>
+        </p:txBody>
+      </p:sp>
+      <p:sp>
+        <p:nvSpPr>
+          <p:cNvPr id="14" name="L字 13"/>
+          <p:cNvSpPr/>
+          <p:nvPr/>
+        </p:nvSpPr>
+        <p:spPr>
+          <a:xfrm rot="5400000">
+            <a:off x="5620385" y="2657475"/>
+            <a:ext cx="1356995" cy="1356360"/>
+          </a:xfrm>
+          <a:prstGeom prst="corner">
+            <a:avLst/>
+          </a:prstGeom>
+          <a:solidFill>
+            <a:srgbClr val="FFFF00"/>
+          </a:solidFill>
+        </p:spPr>
+        <p:style>
+          <a:lnRef idx="2">
+            <a:schemeClr val="accent1">
+              <a:lumMod val="75000"/>
+            </a:schemeClr>
+          </a:lnRef>
+          <a:fillRef idx="1">
+            <a:schemeClr val="accent1"/>
+          </a:fillRef>
+          <a:effectRef idx="0">
+            <a:srgbClr val="FFFFFF"/>
+          </a:effectRef>
+          <a:fontRef idx="minor">
+            <a:schemeClr val="lt1"/>
+          </a:fontRef>
+        </p:style>
+        <p:txBody>
+          <a:bodyPr rtlCol="0" anchor="ctr"/>
+          <a:p>
+            <a:pPr algn="ctr"/>
+            <a:endParaRPr lang="ja-JP" altLang="en-US"/>
+          </a:p>
+        </p:txBody>
+      </p:sp>
+      <p:sp>
+        <p:nvSpPr>
+          <p:cNvPr id="15" name="十字形 14"/>
+          <p:cNvSpPr/>
+          <p:nvPr/>
+        </p:nvSpPr>
+        <p:spPr>
+          <a:xfrm>
+            <a:off x="4105910" y="1407795"/>
+            <a:ext cx="1515110" cy="1399540"/>
+          </a:xfrm>
+          <a:prstGeom prst="plus">
+            <a:avLst/>
+          </a:prstGeom>
+          <a:solidFill>
+            <a:srgbClr val="FFFF00"/>
+          </a:solidFill>
+        </p:spPr>
+        <p:style>
+          <a:lnRef idx="2">
+            <a:schemeClr val="accent1">
+              <a:lumMod val="75000"/>
+            </a:schemeClr>
+          </a:lnRef>
+          <a:fillRef idx="1">
+            <a:schemeClr val="accent1"/>
+          </a:fillRef>
+          <a:effectRef idx="0">
+            <a:srgbClr val="FFFFFF"/>
+          </a:effectRef>
+          <a:fontRef idx="minor">
+            <a:schemeClr val="lt1"/>
+          </a:fontRef>
+        </p:style>
+        <p:txBody>
+          <a:bodyPr rtlCol="0" anchor="ctr"/>
+          <a:p>
+            <a:pPr algn="ctr"/>
+            <a:endParaRPr lang="ja-JP" altLang="en-US"/>
+          </a:p>
+        </p:txBody>
+      </p:sp>
+      <p:sp>
+        <p:nvSpPr>
+          <p:cNvPr id="16" name="L字 15"/>
+          <p:cNvSpPr/>
+          <p:nvPr/>
+        </p:nvSpPr>
+        <p:spPr>
+          <a:xfrm rot="10800000">
+            <a:off x="5795645" y="1450975"/>
+            <a:ext cx="2078355" cy="1356360"/>
+          </a:xfrm>
+          <a:prstGeom prst="corner">
+            <a:avLst/>
+          </a:prstGeom>
+          <a:solidFill>
+            <a:srgbClr val="FFFF00"/>
+          </a:solidFill>
+        </p:spPr>
+        <p:style>
+          <a:lnRef idx="2">
+            <a:schemeClr val="accent1">
+              <a:lumMod val="75000"/>
+            </a:schemeClr>
+          </a:lnRef>
+          <a:fillRef idx="1">
+            <a:schemeClr val="accent1"/>
+          </a:fillRef>
+          <a:effectRef idx="0">
+            <a:srgbClr val="FFFFFF"/>
+          </a:effectRef>
+          <a:fontRef idx="minor">
+            <a:schemeClr val="lt1"/>
+          </a:fontRef>
+        </p:style>
+        <p:txBody>
+          <a:bodyPr rtlCol="0" anchor="ctr"/>
+          <a:p>
+            <a:pPr algn="ctr"/>
+            <a:endParaRPr lang="ja-JP" altLang="en-US"/>
+          </a:p>
+        </p:txBody>
+      </p:sp>
+      <p:grpSp>
+        <p:nvGrpSpPr>
+          <p:cNvPr id="29" name="グループ化 28"/>
+          <p:cNvGrpSpPr/>
+          <p:nvPr/>
+        </p:nvGrpSpPr>
+        <p:grpSpPr>
+          <a:xfrm>
+            <a:off x="1683385" y="2242185"/>
+            <a:ext cx="567055" cy="491490"/>
+            <a:chOff x="7543" y="445"/>
+            <a:chExt cx="1308" cy="1226"/>
+          </a:xfrm>
+        </p:grpSpPr>
+        <p:cxnSp>
+          <p:nvCxnSpPr>
+            <p:cNvPr id="17" name="直線コネクタ 16"/>
+            <p:cNvCxnSpPr/>
+            <p:nvPr/>
+          </p:nvCxnSpPr>
+          <p:spPr>
+            <a:xfrm flipH="1">
+              <a:off x="8474" y="1046"/>
+              <a:ext cx="69" cy="262"/>
+            </a:xfrm>
+            <a:prstGeom prst="line">
+              <a:avLst/>
+            </a:prstGeom>
+            <a:ln>
+              <a:solidFill>
+                <a:schemeClr val="bg1"/>
+              </a:solidFill>
+            </a:ln>
+          </p:spPr>
+          <p:style>
+            <a:lnRef idx="2">
+              <a:schemeClr val="accent1"/>
+            </a:lnRef>
+            <a:fillRef idx="0">
+              <a:schemeClr val="accent1"/>
+            </a:fillRef>
+            <a:effectRef idx="1">
+              <a:schemeClr val="accent1"/>
+            </a:effectRef>
+            <a:fontRef idx="minor">
+              <a:schemeClr val="tx1"/>
+            </a:fontRef>
+          </p:style>
+        </p:cxnSp>
+        <p:cxnSp>
+          <p:nvCxnSpPr>
+            <p:cNvPr id="18" name="直線コネクタ 17"/>
+            <p:cNvCxnSpPr/>
+            <p:nvPr/>
+          </p:nvCxnSpPr>
+          <p:spPr>
+            <a:xfrm flipH="1">
+              <a:off x="8156" y="445"/>
+              <a:ext cx="14" cy="1227"/>
+            </a:xfrm>
+            <a:prstGeom prst="line">
+              <a:avLst/>
+            </a:prstGeom>
+            <a:ln>
+              <a:solidFill>
+                <a:schemeClr val="bg1"/>
+              </a:solidFill>
+            </a:ln>
+          </p:spPr>
+          <p:style>
+            <a:lnRef idx="2">
+              <a:schemeClr val="accent1"/>
+            </a:lnRef>
+            <a:fillRef idx="0">
+              <a:schemeClr val="accent1"/>
+            </a:fillRef>
+            <a:effectRef idx="1">
+              <a:schemeClr val="accent1"/>
+            </a:effectRef>
+            <a:fontRef idx="minor">
+              <a:schemeClr val="tx1"/>
+            </a:fontRef>
+          </p:style>
+        </p:cxnSp>
+        <p:cxnSp>
+          <p:nvCxnSpPr>
+            <p:cNvPr id="19" name="直線コネクタ 18"/>
+            <p:cNvCxnSpPr/>
+            <p:nvPr/>
+          </p:nvCxnSpPr>
+          <p:spPr>
+            <a:xfrm>
+              <a:off x="8510" y="733"/>
+              <a:ext cx="33" cy="303"/>
+            </a:xfrm>
+            <a:prstGeom prst="line">
+              <a:avLst/>
+            </a:prstGeom>
+            <a:ln>
+              <a:solidFill>
+                <a:schemeClr val="bg1"/>
+              </a:solidFill>
+            </a:ln>
+          </p:spPr>
+          <p:style>
+            <a:lnRef idx="2">
+              <a:schemeClr val="accent1"/>
+            </a:lnRef>
+            <a:fillRef idx="0">
+              <a:schemeClr val="accent1"/>
+            </a:fillRef>
+            <a:effectRef idx="1">
+              <a:schemeClr val="accent1"/>
+            </a:effectRef>
+            <a:fontRef idx="minor">
+              <a:schemeClr val="tx1"/>
+            </a:fontRef>
+          </p:style>
+        </p:cxnSp>
+        <p:cxnSp>
+          <p:nvCxnSpPr>
+            <p:cNvPr id="20" name="直線コネクタ 19"/>
+            <p:cNvCxnSpPr/>
+            <p:nvPr/>
+          </p:nvCxnSpPr>
+          <p:spPr>
+            <a:xfrm>
+              <a:off x="7543" y="1035"/>
+              <a:ext cx="1309" cy="11"/>
+            </a:xfrm>
+            <a:prstGeom prst="line">
+              <a:avLst/>
+            </a:prstGeom>
+            <a:ln>
+              <a:solidFill>
+                <a:schemeClr val="bg1"/>
+              </a:solidFill>
+            </a:ln>
+          </p:spPr>
+          <p:style>
+            <a:lnRef idx="2">
+              <a:schemeClr val="accent1"/>
+            </a:lnRef>
+            <a:fillRef idx="0">
+              <a:schemeClr val="accent1"/>
+            </a:fillRef>
+            <a:effectRef idx="1">
+              <a:schemeClr val="accent1"/>
+            </a:effectRef>
+            <a:fontRef idx="minor">
+              <a:schemeClr val="tx1"/>
+            </a:fontRef>
+          </p:style>
+        </p:cxnSp>
+        <p:cxnSp>
+          <p:nvCxnSpPr>
+            <p:cNvPr id="21" name="直線コネクタ 20"/>
+            <p:cNvCxnSpPr/>
+            <p:nvPr/>
+          </p:nvCxnSpPr>
+          <p:spPr>
+            <a:xfrm flipH="1">
+              <a:off x="7747" y="575"/>
+              <a:ext cx="901" cy="847"/>
+            </a:xfrm>
+            <a:prstGeom prst="line">
+              <a:avLst/>
+            </a:prstGeom>
+            <a:ln>
+              <a:solidFill>
+                <a:schemeClr val="bg1"/>
+              </a:solidFill>
+            </a:ln>
+          </p:spPr>
+          <p:style>
+            <a:lnRef idx="2">
+              <a:schemeClr val="accent1"/>
+            </a:lnRef>
+            <a:fillRef idx="0">
+              <a:schemeClr val="accent1"/>
+            </a:fillRef>
+            <a:effectRef idx="1">
+              <a:schemeClr val="accent1"/>
+            </a:effectRef>
+            <a:fontRef idx="minor">
+              <a:schemeClr val="tx1"/>
+            </a:fontRef>
+          </p:style>
+        </p:cxnSp>
+        <p:cxnSp>
+          <p:nvCxnSpPr>
+            <p:cNvPr id="22" name="直線コネクタ 21"/>
+            <p:cNvCxnSpPr/>
+            <p:nvPr/>
+          </p:nvCxnSpPr>
+          <p:spPr>
+            <a:xfrm>
+              <a:off x="7747" y="575"/>
+              <a:ext cx="864" cy="870"/>
+            </a:xfrm>
+            <a:prstGeom prst="line">
+              <a:avLst/>
+            </a:prstGeom>
+            <a:ln>
+              <a:solidFill>
+                <a:schemeClr val="bg1"/>
+              </a:solidFill>
+            </a:ln>
+          </p:spPr>
+          <p:style>
+            <a:lnRef idx="2">
+              <a:schemeClr val="accent1"/>
+            </a:lnRef>
+            <a:fillRef idx="0">
+              <a:schemeClr val="accent1"/>
+            </a:fillRef>
+            <a:effectRef idx="1">
+              <a:schemeClr val="accent1"/>
+            </a:effectRef>
+            <a:fontRef idx="minor">
+              <a:schemeClr val="tx1"/>
+            </a:fontRef>
+          </p:style>
+        </p:cxnSp>
+        <p:cxnSp>
+          <p:nvCxnSpPr>
+            <p:cNvPr id="23" name="直線コネクタ 22"/>
+            <p:cNvCxnSpPr/>
+            <p:nvPr/>
+          </p:nvCxnSpPr>
+          <p:spPr>
+            <a:xfrm flipH="1">
+              <a:off x="8179" y="1308"/>
+              <a:ext cx="273" cy="228"/>
+            </a:xfrm>
+            <a:prstGeom prst="line">
+              <a:avLst/>
+            </a:prstGeom>
+            <a:ln>
+              <a:solidFill>
+                <a:schemeClr val="bg1"/>
+              </a:solidFill>
+            </a:ln>
+          </p:spPr>
+          <p:style>
+            <a:lnRef idx="2">
+              <a:schemeClr val="accent1"/>
+            </a:lnRef>
+            <a:fillRef idx="0">
+              <a:schemeClr val="accent1"/>
+            </a:fillRef>
+            <a:effectRef idx="1">
+              <a:schemeClr val="accent1"/>
+            </a:effectRef>
+            <a:fontRef idx="minor">
+              <a:schemeClr val="tx1"/>
+            </a:fontRef>
+          </p:style>
+        </p:cxnSp>
+        <p:cxnSp>
+          <p:nvCxnSpPr>
+            <p:cNvPr id="24" name="直線コネクタ 23"/>
+            <p:cNvCxnSpPr/>
+            <p:nvPr/>
+          </p:nvCxnSpPr>
+          <p:spPr>
+            <a:xfrm flipH="1" flipV="1">
+              <a:off x="7838" y="1286"/>
+              <a:ext cx="319" cy="250"/>
+            </a:xfrm>
+            <a:prstGeom prst="line">
+              <a:avLst/>
+            </a:prstGeom>
+            <a:ln>
+              <a:solidFill>
+                <a:schemeClr val="bg1"/>
+              </a:solidFill>
+            </a:ln>
+          </p:spPr>
+          <p:style>
+            <a:lnRef idx="2">
+              <a:schemeClr val="accent1"/>
+            </a:lnRef>
+            <a:fillRef idx="0">
+              <a:schemeClr val="accent1"/>
+            </a:fillRef>
+            <a:effectRef idx="1">
+              <a:schemeClr val="accent1"/>
+            </a:effectRef>
+            <a:fontRef idx="minor">
+              <a:schemeClr val="tx1"/>
+            </a:fontRef>
+          </p:style>
+        </p:cxnSp>
+        <p:cxnSp>
+          <p:nvCxnSpPr>
+            <p:cNvPr id="25" name="直線コネクタ 24"/>
+            <p:cNvCxnSpPr/>
+            <p:nvPr/>
+          </p:nvCxnSpPr>
+          <p:spPr>
+            <a:xfrm flipH="1" flipV="1">
+              <a:off x="7747" y="1058"/>
+              <a:ext cx="114" cy="228"/>
+            </a:xfrm>
+            <a:prstGeom prst="line">
+              <a:avLst/>
+            </a:prstGeom>
+            <a:ln>
+              <a:solidFill>
+                <a:schemeClr val="bg1"/>
+              </a:solidFill>
+            </a:ln>
+          </p:spPr>
+          <p:style>
+            <a:lnRef idx="2">
+              <a:schemeClr val="accent1"/>
+            </a:lnRef>
+            <a:fillRef idx="0">
+              <a:schemeClr val="accent1"/>
+            </a:fillRef>
+            <a:effectRef idx="1">
+              <a:schemeClr val="accent1"/>
+            </a:effectRef>
+            <a:fontRef idx="minor">
+              <a:schemeClr val="tx1"/>
+            </a:fontRef>
+          </p:style>
+        </p:cxnSp>
+        <p:cxnSp>
+          <p:nvCxnSpPr>
+            <p:cNvPr id="26" name="直線コネクタ 25"/>
+            <p:cNvCxnSpPr/>
+            <p:nvPr/>
+          </p:nvCxnSpPr>
+          <p:spPr>
+            <a:xfrm flipH="1">
+              <a:off x="7783" y="717"/>
+              <a:ext cx="100" cy="341"/>
+            </a:xfrm>
+            <a:prstGeom prst="line">
+              <a:avLst/>
+            </a:prstGeom>
+            <a:ln>
+              <a:solidFill>
+                <a:schemeClr val="bg1"/>
+              </a:solidFill>
+            </a:ln>
+          </p:spPr>
+          <p:style>
+            <a:lnRef idx="2">
+              <a:schemeClr val="accent1"/>
+            </a:lnRef>
+            <a:fillRef idx="0">
+              <a:schemeClr val="accent1"/>
+            </a:fillRef>
+            <a:effectRef idx="1">
+              <a:schemeClr val="accent1"/>
+            </a:effectRef>
+            <a:fontRef idx="minor">
+              <a:schemeClr val="tx1"/>
+            </a:fontRef>
+          </p:style>
+        </p:cxnSp>
+        <p:cxnSp>
+          <p:nvCxnSpPr>
+            <p:cNvPr id="27" name="直線コネクタ 26"/>
+            <p:cNvCxnSpPr/>
+            <p:nvPr/>
+          </p:nvCxnSpPr>
+          <p:spPr>
+            <a:xfrm flipH="1">
+              <a:off x="7861" y="604"/>
+              <a:ext cx="296" cy="136"/>
+            </a:xfrm>
+            <a:prstGeom prst="line">
+              <a:avLst/>
+            </a:prstGeom>
+            <a:ln>
+              <a:solidFill>
+                <a:schemeClr val="bg1"/>
+              </a:solidFill>
+            </a:ln>
+          </p:spPr>
+          <p:style>
+            <a:lnRef idx="2">
+              <a:schemeClr val="accent1"/>
+            </a:lnRef>
+            <a:fillRef idx="0">
+              <a:schemeClr val="accent1"/>
+            </a:fillRef>
+            <a:effectRef idx="1">
+              <a:schemeClr val="accent1"/>
+            </a:effectRef>
+            <a:fontRef idx="minor">
+              <a:schemeClr val="tx1"/>
+            </a:fontRef>
+          </p:style>
+        </p:cxnSp>
+        <p:cxnSp>
+          <p:nvCxnSpPr>
+            <p:cNvPr id="28" name="直線コネクタ 27"/>
+            <p:cNvCxnSpPr/>
+            <p:nvPr/>
+          </p:nvCxnSpPr>
+          <p:spPr>
+            <a:xfrm>
+              <a:off x="8179" y="604"/>
+              <a:ext cx="364" cy="191"/>
+            </a:xfrm>
+            <a:prstGeom prst="line">
+              <a:avLst/>
+            </a:prstGeom>
+            <a:ln>
+              <a:solidFill>
+                <a:schemeClr val="bg1"/>
+              </a:solidFill>
+            </a:ln>
+          </p:spPr>
+          <p:style>
+            <a:lnRef idx="2">
+              <a:schemeClr val="accent1"/>
+            </a:lnRef>
+            <a:fillRef idx="0">
+              <a:schemeClr val="accent1"/>
+            </a:fillRef>
+            <a:effectRef idx="1">
+              <a:schemeClr val="accent1"/>
+            </a:effectRef>
+            <a:fontRef idx="minor">
+              <a:schemeClr val="tx1"/>
+            </a:fontRef>
+          </p:style>
+        </p:cxnSp>
+      </p:grpSp>
+      <p:grpSp>
+        <p:nvGrpSpPr>
+          <p:cNvPr id="30" name="グループ化 29"/>
+          <p:cNvGrpSpPr/>
+          <p:nvPr/>
+        </p:nvGrpSpPr>
+        <p:grpSpPr>
+          <a:xfrm>
+            <a:off x="8665845" y="3651250"/>
+            <a:ext cx="567055" cy="491490"/>
+            <a:chOff x="7543" y="445"/>
+            <a:chExt cx="1308" cy="1226"/>
+          </a:xfrm>
+        </p:grpSpPr>
+        <p:cxnSp>
+          <p:nvCxnSpPr>
+            <p:cNvPr id="31" name="直線コネクタ 30"/>
+            <p:cNvCxnSpPr/>
+            <p:nvPr/>
+          </p:nvCxnSpPr>
+          <p:spPr>
+            <a:xfrm flipH="1">
+              <a:off x="8474" y="1046"/>
+              <a:ext cx="69" cy="262"/>
+            </a:xfrm>
+            <a:prstGeom prst="line">
+              <a:avLst/>
+            </a:prstGeom>
+            <a:ln>
+              <a:solidFill>
+                <a:schemeClr val="bg1"/>
+              </a:solidFill>
+            </a:ln>
+          </p:spPr>
+          <p:style>
+            <a:lnRef idx="2">
+              <a:schemeClr val="accent1"/>
+            </a:lnRef>
+            <a:fillRef idx="0">
+              <a:schemeClr val="accent1"/>
+            </a:fillRef>
+            <a:effectRef idx="1">
+              <a:schemeClr val="accent1"/>
+            </a:effectRef>
+            <a:fontRef idx="minor">
+              <a:schemeClr val="tx1"/>
+            </a:fontRef>
+          </p:style>
+        </p:cxnSp>
+        <p:cxnSp>
+          <p:nvCxnSpPr>
+            <p:cNvPr id="32" name="直線コネクタ 31"/>
+            <p:cNvCxnSpPr/>
+            <p:nvPr/>
+          </p:nvCxnSpPr>
+          <p:spPr>
+            <a:xfrm flipH="1">
+              <a:off x="8156" y="445"/>
+              <a:ext cx="14" cy="1227"/>
+            </a:xfrm>
+            <a:prstGeom prst="line">
+              <a:avLst/>
+            </a:prstGeom>
+            <a:ln>
+              <a:solidFill>
+                <a:schemeClr val="bg1"/>
+              </a:solidFill>
+            </a:ln>
+          </p:spPr>
+          <p:style>
+            <a:lnRef idx="2">
+              <a:schemeClr val="accent1"/>
+            </a:lnRef>
+            <a:fillRef idx="0">
+              <a:schemeClr val="accent1"/>
+            </a:fillRef>
+            <a:effectRef idx="1">
+              <a:schemeClr val="accent1"/>
+            </a:effectRef>
+            <a:fontRef idx="minor">
+              <a:schemeClr val="tx1"/>
+            </a:fontRef>
+          </p:style>
+        </p:cxnSp>
+        <p:cxnSp>
+          <p:nvCxnSpPr>
+            <p:cNvPr id="33" name="直線コネクタ 32"/>
+            <p:cNvCxnSpPr/>
+            <p:nvPr/>
+          </p:nvCxnSpPr>
+          <p:spPr>
+            <a:xfrm>
+              <a:off x="8510" y="733"/>
+              <a:ext cx="33" cy="303"/>
+            </a:xfrm>
+            <a:prstGeom prst="line">
+              <a:avLst/>
+            </a:prstGeom>
+            <a:ln>
+              <a:solidFill>
+                <a:schemeClr val="bg1"/>
+              </a:solidFill>
+            </a:ln>
+          </p:spPr>
+          <p:style>
+            <a:lnRef idx="2">
+              <a:schemeClr val="accent1"/>
+            </a:lnRef>
+            <a:fillRef idx="0">
+              <a:schemeClr val="accent1"/>
+            </a:fillRef>
+            <a:effectRef idx="1">
+              <a:schemeClr val="accent1"/>
+            </a:effectRef>
+            <a:fontRef idx="minor">
+              <a:schemeClr val="tx1"/>
+            </a:fontRef>
+          </p:style>
+        </p:cxnSp>
+        <p:cxnSp>
+          <p:nvCxnSpPr>
+            <p:cNvPr id="34" name="直線コネクタ 33"/>
+            <p:cNvCxnSpPr/>
+            <p:nvPr/>
+          </p:nvCxnSpPr>
+          <p:spPr>
+            <a:xfrm>
+              <a:off x="7543" y="1035"/>
+              <a:ext cx="1309" cy="11"/>
+            </a:xfrm>
+            <a:prstGeom prst="line">
+              <a:avLst/>
+            </a:prstGeom>
+            <a:ln>
+              <a:solidFill>
+                <a:schemeClr val="bg1"/>
+              </a:solidFill>
+            </a:ln>
+          </p:spPr>
+          <p:style>
+            <a:lnRef idx="2">
+              <a:schemeClr val="accent1"/>
+            </a:lnRef>
+            <a:fillRef idx="0">
+              <a:schemeClr val="accent1"/>
+            </a:fillRef>
+            <a:effectRef idx="1">
+              <a:schemeClr val="accent1"/>
+            </a:effectRef>
+            <a:fontRef idx="minor">
+              <a:schemeClr val="tx1"/>
+            </a:fontRef>
+          </p:style>
+        </p:cxnSp>
+        <p:cxnSp>
+          <p:nvCxnSpPr>
+            <p:cNvPr id="35" name="直線コネクタ 34"/>
+            <p:cNvCxnSpPr/>
+            <p:nvPr/>
+          </p:nvCxnSpPr>
+          <p:spPr>
+            <a:xfrm flipH="1">
+              <a:off x="7747" y="575"/>
+              <a:ext cx="901" cy="847"/>
+            </a:xfrm>
+            <a:prstGeom prst="line">
+              <a:avLst/>
+            </a:prstGeom>
+            <a:ln>
+              <a:solidFill>
+                <a:schemeClr val="bg1"/>
+              </a:solidFill>
+            </a:ln>
+          </p:spPr>
+          <p:style>
+            <a:lnRef idx="2">
+              <a:schemeClr val="accent1"/>
+            </a:lnRef>
+            <a:fillRef idx="0">
+              <a:schemeClr val="accent1"/>
+            </a:fillRef>
+            <a:effectRef idx="1">
+              <a:schemeClr val="accent1"/>
+            </a:effectRef>
+            <a:fontRef idx="minor">
+              <a:schemeClr val="tx1"/>
+            </a:fontRef>
+          </p:style>
+        </p:cxnSp>
+        <p:cxnSp>
+          <p:nvCxnSpPr>
+            <p:cNvPr id="36" name="直線コネクタ 35"/>
+            <p:cNvCxnSpPr/>
+            <p:nvPr/>
+          </p:nvCxnSpPr>
+          <p:spPr>
+            <a:xfrm>
+              <a:off x="7747" y="575"/>
+              <a:ext cx="864" cy="870"/>
+            </a:xfrm>
+            <a:prstGeom prst="line">
+              <a:avLst/>
+            </a:prstGeom>
+            <a:ln>
+              <a:solidFill>
+                <a:schemeClr val="bg1"/>
+              </a:solidFill>
+            </a:ln>
+          </p:spPr>
+          <p:style>
+            <a:lnRef idx="2">
+              <a:schemeClr val="accent1"/>
+            </a:lnRef>
+            <a:fillRef idx="0">
+              <a:schemeClr val="accent1"/>
+            </a:fillRef>
+            <a:effectRef idx="1">
+              <a:schemeClr val="accent1"/>
+            </a:effectRef>
+            <a:fontRef idx="minor">
+              <a:schemeClr val="tx1"/>
+            </a:fontRef>
+          </p:style>
+        </p:cxnSp>
+        <p:cxnSp>
+          <p:nvCxnSpPr>
+            <p:cNvPr id="37" name="直線コネクタ 36"/>
+            <p:cNvCxnSpPr/>
+            <p:nvPr/>
+          </p:nvCxnSpPr>
+          <p:spPr>
+            <a:xfrm flipH="1">
+              <a:off x="8179" y="1308"/>
+              <a:ext cx="273" cy="228"/>
+            </a:xfrm>
+            <a:prstGeom prst="line">
+              <a:avLst/>
+            </a:prstGeom>
+            <a:ln>
+              <a:solidFill>
+                <a:schemeClr val="bg1"/>
+              </a:solidFill>
+            </a:ln>
+          </p:spPr>
+          <p:style>
+            <a:lnRef idx="2">
+              <a:schemeClr val="accent1"/>
+            </a:lnRef>
+            <a:fillRef idx="0">
+              <a:schemeClr val="accent1"/>
+            </a:fillRef>
+            <a:effectRef idx="1">
+              <a:schemeClr val="accent1"/>
+            </a:effectRef>
+            <a:fontRef idx="minor">
+              <a:schemeClr val="tx1"/>
+            </a:fontRef>
+          </p:style>
+        </p:cxnSp>
+        <p:cxnSp>
+          <p:nvCxnSpPr>
+            <p:cNvPr id="38" name="直線コネクタ 37"/>
+            <p:cNvCxnSpPr/>
+            <p:nvPr/>
+          </p:nvCxnSpPr>
+          <p:spPr>
+            <a:xfrm flipH="1" flipV="1">
+              <a:off x="7838" y="1286"/>
+              <a:ext cx="319" cy="250"/>
+            </a:xfrm>
+            <a:prstGeom prst="line">
+              <a:avLst/>
+            </a:prstGeom>
+            <a:ln>
+              <a:solidFill>
+                <a:schemeClr val="bg1"/>
+              </a:solidFill>
+            </a:ln>
+          </p:spPr>
+          <p:style>
+            <a:lnRef idx="2">
+              <a:schemeClr val="accent1"/>
+            </a:lnRef>
+            <a:fillRef idx="0">
+              <a:schemeClr val="accent1"/>
+            </a:fillRef>
+            <a:effectRef idx="1">
+              <a:schemeClr val="accent1"/>
+            </a:effectRef>
+            <a:fontRef idx="minor">
+              <a:schemeClr val="tx1"/>
+            </a:fontRef>
+          </p:style>
+        </p:cxnSp>
+        <p:cxnSp>
+          <p:nvCxnSpPr>
+            <p:cNvPr id="39" name="直線コネクタ 38"/>
+            <p:cNvCxnSpPr/>
+            <p:nvPr/>
+          </p:nvCxnSpPr>
+          <p:spPr>
+            <a:xfrm flipH="1" flipV="1">
+              <a:off x="7747" y="1058"/>
+              <a:ext cx="114" cy="228"/>
+            </a:xfrm>
+            <a:prstGeom prst="line">
+              <a:avLst/>
+            </a:prstGeom>
+            <a:ln>
+              <a:solidFill>
+                <a:schemeClr val="bg1"/>
+              </a:solidFill>
+            </a:ln>
+          </p:spPr>
+          <p:style>
+            <a:lnRef idx="2">
+              <a:schemeClr val="accent1"/>
+            </a:lnRef>
+            <a:fillRef idx="0">
+              <a:schemeClr val="accent1"/>
+            </a:fillRef>
+            <a:effectRef idx="1">
+              <a:schemeClr val="accent1"/>
+            </a:effectRef>
+            <a:fontRef idx="minor">
+              <a:schemeClr val="tx1"/>
+            </a:fontRef>
+          </p:style>
+        </p:cxnSp>
+        <p:cxnSp>
+          <p:nvCxnSpPr>
+            <p:cNvPr id="40" name="直線コネクタ 39"/>
+            <p:cNvCxnSpPr/>
+            <p:nvPr/>
+          </p:nvCxnSpPr>
+          <p:spPr>
+            <a:xfrm flipH="1">
+              <a:off x="7783" y="717"/>
+              <a:ext cx="100" cy="341"/>
+            </a:xfrm>
+            <a:prstGeom prst="line">
+              <a:avLst/>
+            </a:prstGeom>
+            <a:ln>
+              <a:solidFill>
+                <a:schemeClr val="bg1"/>
+              </a:solidFill>
+            </a:ln>
+          </p:spPr>
+          <p:style>
+            <a:lnRef idx="2">
+              <a:schemeClr val="accent1"/>
+            </a:lnRef>
+            <a:fillRef idx="0">
+              <a:schemeClr val="accent1"/>
+            </a:fillRef>
+            <a:effectRef idx="1">
+              <a:schemeClr val="accent1"/>
+            </a:effectRef>
+            <a:fontRef idx="minor">
+              <a:schemeClr val="tx1"/>
+            </a:fontRef>
+          </p:style>
+        </p:cxnSp>
+        <p:cxnSp>
+          <p:nvCxnSpPr>
+            <p:cNvPr id="41" name="直線コネクタ 40"/>
+            <p:cNvCxnSpPr/>
+            <p:nvPr/>
+          </p:nvCxnSpPr>
+          <p:spPr>
+            <a:xfrm flipH="1">
+              <a:off x="7861" y="604"/>
+              <a:ext cx="296" cy="136"/>
+            </a:xfrm>
+            <a:prstGeom prst="line">
+              <a:avLst/>
+            </a:prstGeom>
+            <a:ln>
+              <a:solidFill>
+                <a:schemeClr val="bg1"/>
+              </a:solidFill>
+            </a:ln>
+          </p:spPr>
+          <p:style>
+            <a:lnRef idx="2">
+              <a:schemeClr val="accent1"/>
+            </a:lnRef>
+            <a:fillRef idx="0">
+              <a:schemeClr val="accent1"/>
+            </a:fillRef>
+            <a:effectRef idx="1">
+              <a:schemeClr val="accent1"/>
+            </a:effectRef>
+            <a:fontRef idx="minor">
+              <a:schemeClr val="tx1"/>
+            </a:fontRef>
+          </p:style>
+        </p:cxnSp>
+        <p:cxnSp>
+          <p:nvCxnSpPr>
+            <p:cNvPr id="42" name="直線コネクタ 41"/>
+            <p:cNvCxnSpPr/>
+            <p:nvPr/>
+          </p:nvCxnSpPr>
+          <p:spPr>
+            <a:xfrm>
+              <a:off x="8179" y="604"/>
+              <a:ext cx="364" cy="191"/>
+            </a:xfrm>
+            <a:prstGeom prst="line">
+              <a:avLst/>
+            </a:prstGeom>
+            <a:ln>
+              <a:solidFill>
+                <a:schemeClr val="bg1"/>
+              </a:solidFill>
+            </a:ln>
+          </p:spPr>
+          <p:style>
+            <a:lnRef idx="2">
+              <a:schemeClr val="accent1"/>
+            </a:lnRef>
+            <a:fillRef idx="0">
+              <a:schemeClr val="accent1"/>
+            </a:fillRef>
+            <a:effectRef idx="1">
+              <a:schemeClr val="accent1"/>
+            </a:effectRef>
+            <a:fontRef idx="minor">
+              <a:schemeClr val="tx1"/>
+            </a:fontRef>
+          </p:style>
+        </p:cxnSp>
+      </p:grpSp>
+      <p:grpSp>
+        <p:nvGrpSpPr>
+          <p:cNvPr id="43" name="グループ化 42"/>
+          <p:cNvGrpSpPr/>
+          <p:nvPr/>
+        </p:nvGrpSpPr>
+        <p:grpSpPr>
+          <a:xfrm>
+            <a:off x="6108700" y="5102860"/>
+            <a:ext cx="567055" cy="491490"/>
+            <a:chOff x="7543" y="445"/>
+            <a:chExt cx="1308" cy="1226"/>
+          </a:xfrm>
+        </p:grpSpPr>
+        <p:cxnSp>
+          <p:nvCxnSpPr>
+            <p:cNvPr id="44" name="直線コネクタ 43"/>
+            <p:cNvCxnSpPr/>
+            <p:nvPr/>
+          </p:nvCxnSpPr>
+          <p:spPr>
+            <a:xfrm flipH="1">
+              <a:off x="8474" y="1046"/>
+              <a:ext cx="69" cy="262"/>
+            </a:xfrm>
+            <a:prstGeom prst="line">
+              <a:avLst/>
+            </a:prstGeom>
+            <a:ln>
+              <a:solidFill>
+                <a:schemeClr val="bg1"/>
+              </a:solidFill>
+            </a:ln>
+          </p:spPr>
+          <p:style>
+            <a:lnRef idx="2">
+              <a:schemeClr val="accent1"/>
+            </a:lnRef>
+            <a:fillRef idx="0">
+              <a:schemeClr val="accent1"/>
+            </a:fillRef>
+            <a:effectRef idx="1">
+              <a:schemeClr val="accent1"/>
+            </a:effectRef>
+            <a:fontRef idx="minor">
+              <a:schemeClr val="tx1"/>
+            </a:fontRef>
+          </p:style>
+        </p:cxnSp>
+        <p:cxnSp>
+          <p:nvCxnSpPr>
+            <p:cNvPr id="45" name="直線コネクタ 44"/>
+            <p:cNvCxnSpPr/>
+            <p:nvPr/>
+          </p:nvCxnSpPr>
+          <p:spPr>
+            <a:xfrm flipH="1">
+              <a:off x="8156" y="445"/>
+              <a:ext cx="14" cy="1227"/>
+            </a:xfrm>
+            <a:prstGeom prst="line">
+              <a:avLst/>
+            </a:prstGeom>
+            <a:ln>
+              <a:solidFill>
+                <a:schemeClr val="bg1"/>
+              </a:solidFill>
+            </a:ln>
+          </p:spPr>
+          <p:style>
+            <a:lnRef idx="2">
+              <a:schemeClr val="accent1"/>
+            </a:lnRef>
+            <a:fillRef idx="0">
+              <a:schemeClr val="accent1"/>
+            </a:fillRef>
+            <a:effectRef idx="1">
+              <a:schemeClr val="accent1"/>
+            </a:effectRef>
+            <a:fontRef idx="minor">
+              <a:schemeClr val="tx1"/>
+            </a:fontRef>
+          </p:style>
+        </p:cxnSp>
+        <p:cxnSp>
+          <p:nvCxnSpPr>
+            <p:cNvPr id="46" name="直線コネクタ 45"/>
+            <p:cNvCxnSpPr/>
+            <p:nvPr/>
+          </p:nvCxnSpPr>
+          <p:spPr>
+            <a:xfrm>
+              <a:off x="8510" y="733"/>
+              <a:ext cx="33" cy="303"/>
+            </a:xfrm>
+            <a:prstGeom prst="line">
+              <a:avLst/>
+            </a:prstGeom>
+            <a:ln>
+              <a:solidFill>
+                <a:schemeClr val="bg1"/>
+              </a:solidFill>
+            </a:ln>
+          </p:spPr>
+          <p:style>
+            <a:lnRef idx="2">
+              <a:schemeClr val="accent1"/>
+            </a:lnRef>
+            <a:fillRef idx="0">
+              <a:schemeClr val="accent1"/>
+            </a:fillRef>
+            <a:effectRef idx="1">
+              <a:schemeClr val="accent1"/>
+            </a:effectRef>
+            <a:fontRef idx="minor">
+              <a:schemeClr val="tx1"/>
+            </a:fontRef>
+          </p:style>
+        </p:cxnSp>
+        <p:cxnSp>
+          <p:nvCxnSpPr>
+            <p:cNvPr id="47" name="直線コネクタ 46"/>
+            <p:cNvCxnSpPr/>
+            <p:nvPr/>
+          </p:nvCxnSpPr>
+          <p:spPr>
+            <a:xfrm>
+              <a:off x="7543" y="1035"/>
+              <a:ext cx="1309" cy="11"/>
+            </a:xfrm>
+            <a:prstGeom prst="line">
+              <a:avLst/>
+            </a:prstGeom>
+            <a:ln>
+              <a:solidFill>
+                <a:schemeClr val="bg1"/>
+              </a:solidFill>
+            </a:ln>
+          </p:spPr>
+          <p:style>
+            <a:lnRef idx="2">
+              <a:schemeClr val="accent1"/>
+            </a:lnRef>
+            <a:fillRef idx="0">
+              <a:schemeClr val="accent1"/>
+            </a:fillRef>
+            <a:effectRef idx="1">
+              <a:schemeClr val="accent1"/>
+            </a:effectRef>
+            <a:fontRef idx="minor">
+              <a:schemeClr val="tx1"/>
+            </a:fontRef>
+          </p:style>
+        </p:cxnSp>
+        <p:cxnSp>
+          <p:nvCxnSpPr>
+            <p:cNvPr id="48" name="直線コネクタ 47"/>
+            <p:cNvCxnSpPr/>
+            <p:nvPr/>
+          </p:nvCxnSpPr>
+          <p:spPr>
+            <a:xfrm flipH="1">
+              <a:off x="7747" y="575"/>
+              <a:ext cx="901" cy="847"/>
+            </a:xfrm>
+            <a:prstGeom prst="line">
+              <a:avLst/>
+            </a:prstGeom>
+            <a:ln>
+              <a:solidFill>
+                <a:schemeClr val="bg1"/>
+              </a:solidFill>
+            </a:ln>
+          </p:spPr>
+          <p:style>
+            <a:lnRef idx="2">
+              <a:schemeClr val="accent1"/>
+            </a:lnRef>
+            <a:fillRef idx="0">
+              <a:schemeClr val="accent1"/>
+            </a:fillRef>
+            <a:effectRef idx="1">
+              <a:schemeClr val="accent1"/>
+            </a:effectRef>
+            <a:fontRef idx="minor">
+              <a:schemeClr val="tx1"/>
+            </a:fontRef>
+          </p:style>
+        </p:cxnSp>
+        <p:cxnSp>
+          <p:nvCxnSpPr>
+            <p:cNvPr id="49" name="直線コネクタ 48"/>
+            <p:cNvCxnSpPr/>
+            <p:nvPr/>
+          </p:nvCxnSpPr>
+          <p:spPr>
+            <a:xfrm>
+              <a:off x="7747" y="575"/>
+              <a:ext cx="864" cy="870"/>
+            </a:xfrm>
+            <a:prstGeom prst="line">
+              <a:avLst/>
+            </a:prstGeom>
+            <a:ln>
+              <a:solidFill>
+                <a:schemeClr val="bg1"/>
+              </a:solidFill>
+            </a:ln>
+          </p:spPr>
+          <p:style>
+            <a:lnRef idx="2">
+              <a:schemeClr val="accent1"/>
+            </a:lnRef>
+            <a:fillRef idx="0">
+              <a:schemeClr val="accent1"/>
+            </a:fillRef>
+            <a:effectRef idx="1">
+              <a:schemeClr val="accent1"/>
+            </a:effectRef>
+            <a:fontRef idx="minor">
+              <a:schemeClr val="tx1"/>
+            </a:fontRef>
+          </p:style>
+        </p:cxnSp>
+        <p:cxnSp>
+          <p:nvCxnSpPr>
+            <p:cNvPr id="50" name="直線コネクタ 49"/>
+            <p:cNvCxnSpPr/>
+            <p:nvPr/>
+          </p:nvCxnSpPr>
+          <p:spPr>
+            <a:xfrm flipH="1">
+              <a:off x="8179" y="1308"/>
+              <a:ext cx="273" cy="228"/>
+            </a:xfrm>
+            <a:prstGeom prst="line">
+              <a:avLst/>
+            </a:prstGeom>
+            <a:ln>
+              <a:solidFill>
+                <a:schemeClr val="bg1"/>
+              </a:solidFill>
+            </a:ln>
+          </p:spPr>
+          <p:style>
+            <a:lnRef idx="2">
+              <a:schemeClr val="accent1"/>
+            </a:lnRef>
+            <a:fillRef idx="0">
+              <a:schemeClr val="accent1"/>
+            </a:fillRef>
+            <a:effectRef idx="1">
+              <a:schemeClr val="accent1"/>
+            </a:effectRef>
+            <a:fontRef idx="minor">
+              <a:schemeClr val="tx1"/>
+            </a:fontRef>
+          </p:style>
+        </p:cxnSp>
+        <p:cxnSp>
+          <p:nvCxnSpPr>
+            <p:cNvPr id="51" name="直線コネクタ 50"/>
+            <p:cNvCxnSpPr/>
+            <p:nvPr/>
+          </p:nvCxnSpPr>
+          <p:spPr>
+            <a:xfrm flipH="1" flipV="1">
+              <a:off x="7838" y="1286"/>
+              <a:ext cx="319" cy="250"/>
+            </a:xfrm>
+            <a:prstGeom prst="line">
+              <a:avLst/>
+            </a:prstGeom>
+            <a:ln>
+              <a:solidFill>
+                <a:schemeClr val="bg1"/>
+              </a:solidFill>
+            </a:ln>
+          </p:spPr>
+          <p:style>
+            <a:lnRef idx="2">
+              <a:schemeClr val="accent1"/>
+            </a:lnRef>
+            <a:fillRef idx="0">
+              <a:schemeClr val="accent1"/>
+            </a:fillRef>
+            <a:effectRef idx="1">
+              <a:schemeClr val="accent1"/>
+            </a:effectRef>
+            <a:fontRef idx="minor">
+              <a:schemeClr val="tx1"/>
+            </a:fontRef>
+          </p:style>
+        </p:cxnSp>
+        <p:cxnSp>
+          <p:nvCxnSpPr>
+            <p:cNvPr id="52" name="直線コネクタ 51"/>
+            <p:cNvCxnSpPr/>
+            <p:nvPr/>
+          </p:nvCxnSpPr>
+          <p:spPr>
+            <a:xfrm flipH="1" flipV="1">
+              <a:off x="7747" y="1058"/>
+              <a:ext cx="114" cy="228"/>
+            </a:xfrm>
+            <a:prstGeom prst="line">
+              <a:avLst/>
+            </a:prstGeom>
+            <a:ln>
+              <a:solidFill>
+                <a:schemeClr val="bg1"/>
+              </a:solidFill>
+            </a:ln>
+          </p:spPr>
+          <p:style>
+            <a:lnRef idx="2">
+              <a:schemeClr val="accent1"/>
+            </a:lnRef>
+            <a:fillRef idx="0">
+              <a:schemeClr val="accent1"/>
+            </a:fillRef>
+            <a:effectRef idx="1">
+              <a:schemeClr val="accent1"/>
+            </a:effectRef>
+            <a:fontRef idx="minor">
+              <a:schemeClr val="tx1"/>
+            </a:fontRef>
+          </p:style>
+        </p:cxnSp>
+        <p:cxnSp>
+          <p:nvCxnSpPr>
+            <p:cNvPr id="53" name="直線コネクタ 52"/>
+            <p:cNvCxnSpPr/>
+            <p:nvPr/>
+          </p:nvCxnSpPr>
+          <p:spPr>
+            <a:xfrm flipH="1">
+              <a:off x="7783" y="717"/>
+              <a:ext cx="100" cy="341"/>
+            </a:xfrm>
+            <a:prstGeom prst="line">
+              <a:avLst/>
+            </a:prstGeom>
+            <a:ln>
+              <a:solidFill>
+                <a:schemeClr val="bg1"/>
+              </a:solidFill>
+            </a:ln>
+          </p:spPr>
+          <p:style>
+            <a:lnRef idx="2">
+              <a:schemeClr val="accent1"/>
+            </a:lnRef>
+            <a:fillRef idx="0">
+              <a:schemeClr val="accent1"/>
+            </a:fillRef>
+            <a:effectRef idx="1">
+              <a:schemeClr val="accent1"/>
+            </a:effectRef>
+            <a:fontRef idx="minor">
+              <a:schemeClr val="tx1"/>
+            </a:fontRef>
+          </p:style>
+        </p:cxnSp>
+        <p:cxnSp>
+          <p:nvCxnSpPr>
+            <p:cNvPr id="54" name="直線コネクタ 53"/>
+            <p:cNvCxnSpPr/>
+            <p:nvPr/>
+          </p:nvCxnSpPr>
+          <p:spPr>
+            <a:xfrm flipH="1">
+              <a:off x="7861" y="604"/>
+              <a:ext cx="296" cy="136"/>
+            </a:xfrm>
+            <a:prstGeom prst="line">
+              <a:avLst/>
+            </a:prstGeom>
+            <a:ln>
+              <a:solidFill>
+                <a:schemeClr val="bg1"/>
+              </a:solidFill>
+            </a:ln>
+          </p:spPr>
+          <p:style>
+            <a:lnRef idx="2">
+              <a:schemeClr val="accent1"/>
+            </a:lnRef>
+            <a:fillRef idx="0">
+              <a:schemeClr val="accent1"/>
+            </a:fillRef>
+            <a:effectRef idx="1">
+              <a:schemeClr val="accent1"/>
+            </a:effectRef>
+            <a:fontRef idx="minor">
+              <a:schemeClr val="tx1"/>
+            </a:fontRef>
+          </p:style>
+        </p:cxnSp>
+        <p:cxnSp>
+          <p:nvCxnSpPr>
+            <p:cNvPr id="55" name="直線コネクタ 54"/>
+            <p:cNvCxnSpPr/>
+            <p:nvPr/>
+          </p:nvCxnSpPr>
+          <p:spPr>
+            <a:xfrm>
+              <a:off x="8179" y="604"/>
+              <a:ext cx="364" cy="191"/>
+            </a:xfrm>
+            <a:prstGeom prst="line">
+              <a:avLst/>
+            </a:prstGeom>
+            <a:ln>
+              <a:solidFill>
+                <a:schemeClr val="bg1"/>
+              </a:solidFill>
+            </a:ln>
+          </p:spPr>
+          <p:style>
+            <a:lnRef idx="2">
+              <a:schemeClr val="accent1"/>
+            </a:lnRef>
+            <a:fillRef idx="0">
+              <a:schemeClr val="accent1"/>
+            </a:fillRef>
+            <a:effectRef idx="1">
+              <a:schemeClr val="accent1"/>
+            </a:effectRef>
+            <a:fontRef idx="minor">
+              <a:schemeClr val="tx1"/>
+            </a:fontRef>
+          </p:style>
+        </p:cxnSp>
+      </p:grpSp>
+      <p:grpSp>
+        <p:nvGrpSpPr>
+          <p:cNvPr id="56" name="グループ化 55"/>
+          <p:cNvGrpSpPr/>
+          <p:nvPr/>
+        </p:nvGrpSpPr>
+        <p:grpSpPr>
+          <a:xfrm>
+            <a:off x="3782060" y="4051935"/>
+            <a:ext cx="567055" cy="491490"/>
+            <a:chOff x="7543" y="445"/>
+            <a:chExt cx="1308" cy="1226"/>
+          </a:xfrm>
+        </p:grpSpPr>
+        <p:cxnSp>
+          <p:nvCxnSpPr>
+            <p:cNvPr id="57" name="直線コネクタ 56"/>
+            <p:cNvCxnSpPr/>
+            <p:nvPr/>
+          </p:nvCxnSpPr>
+          <p:spPr>
+            <a:xfrm flipH="1">
+              <a:off x="8474" y="1046"/>
+              <a:ext cx="69" cy="262"/>
+            </a:xfrm>
+            <a:prstGeom prst="line">
+              <a:avLst/>
+            </a:prstGeom>
+            <a:ln>
+              <a:solidFill>
+                <a:schemeClr val="bg1"/>
+              </a:solidFill>
+            </a:ln>
+          </p:spPr>
+          <p:style>
+            <a:lnRef idx="2">
+              <a:schemeClr val="accent1"/>
+            </a:lnRef>
+            <a:fillRef idx="0">
+              <a:schemeClr val="accent1"/>
+            </a:fillRef>
+            <a:effectRef idx="1">
+              <a:schemeClr val="accent1"/>
+            </a:effectRef>
+            <a:fontRef idx="minor">
+              <a:schemeClr val="tx1"/>
+            </a:fontRef>
+          </p:style>
+        </p:cxnSp>
+        <p:cxnSp>
+          <p:nvCxnSpPr>
+            <p:cNvPr id="58" name="直線コネクタ 57"/>
+            <p:cNvCxnSpPr/>
+            <p:nvPr/>
+          </p:nvCxnSpPr>
+          <p:spPr>
+            <a:xfrm flipH="1">
+              <a:off x="8156" y="445"/>
+              <a:ext cx="14" cy="1227"/>
+            </a:xfrm>
+            <a:prstGeom prst="line">
+              <a:avLst/>
+            </a:prstGeom>
+            <a:ln>
+              <a:solidFill>
+                <a:schemeClr val="bg1"/>
+              </a:solidFill>
+            </a:ln>
+          </p:spPr>
+          <p:style>
+            <a:lnRef idx="2">
+              <a:schemeClr val="accent1"/>
+            </a:lnRef>
+            <a:fillRef idx="0">
+              <a:schemeClr val="accent1"/>
+            </a:fillRef>
+            <a:effectRef idx="1">
+              <a:schemeClr val="accent1"/>
+            </a:effectRef>
+            <a:fontRef idx="minor">
+              <a:schemeClr val="tx1"/>
+            </a:fontRef>
+          </p:style>
+        </p:cxnSp>
+        <p:cxnSp>
+          <p:nvCxnSpPr>
+            <p:cNvPr id="59" name="直線コネクタ 58"/>
+            <p:cNvCxnSpPr/>
+            <p:nvPr/>
+          </p:nvCxnSpPr>
+          <p:spPr>
+            <a:xfrm>
+              <a:off x="8510" y="733"/>
+              <a:ext cx="33" cy="303"/>
+            </a:xfrm>
+            <a:prstGeom prst="line">
+              <a:avLst/>
+            </a:prstGeom>
+            <a:ln>
+              <a:solidFill>
+                <a:schemeClr val="bg1"/>
+              </a:solidFill>
+            </a:ln>
+          </p:spPr>
+          <p:style>
+            <a:lnRef idx="2">
+              <a:schemeClr val="accent1"/>
+            </a:lnRef>
+            <a:fillRef idx="0">
+              <a:schemeClr val="accent1"/>
+            </a:fillRef>
+            <a:effectRef idx="1">
+              <a:schemeClr val="accent1"/>
+            </a:effectRef>
+            <a:fontRef idx="minor">
+              <a:schemeClr val="tx1"/>
+            </a:fontRef>
+          </p:style>
+        </p:cxnSp>
+        <p:cxnSp>
+          <p:nvCxnSpPr>
+            <p:cNvPr id="60" name="直線コネクタ 59"/>
+            <p:cNvCxnSpPr/>
+            <p:nvPr/>
+          </p:nvCxnSpPr>
+          <p:spPr>
+            <a:xfrm>
+              <a:off x="7543" y="1035"/>
+              <a:ext cx="1309" cy="11"/>
+            </a:xfrm>
+            <a:prstGeom prst="line">
+              <a:avLst/>
+            </a:prstGeom>
+            <a:ln>
+              <a:solidFill>
+                <a:schemeClr val="bg1"/>
+              </a:solidFill>
+            </a:ln>
+          </p:spPr>
+          <p:style>
+            <a:lnRef idx="2">
+              <a:schemeClr val="accent1"/>
+            </a:lnRef>
+            <a:fillRef idx="0">
+              <a:schemeClr val="accent1"/>
+            </a:fillRef>
+            <a:effectRef idx="1">
+              <a:schemeClr val="accent1"/>
+            </a:effectRef>
+            <a:fontRef idx="minor">
+              <a:schemeClr val="tx1"/>
+            </a:fontRef>
+          </p:style>
+        </p:cxnSp>
+        <p:cxnSp>
+          <p:nvCxnSpPr>
+            <p:cNvPr id="61" name="直線コネクタ 60"/>
+            <p:cNvCxnSpPr/>
+            <p:nvPr/>
+          </p:nvCxnSpPr>
+          <p:spPr>
+            <a:xfrm flipH="1">
+              <a:off x="7747" y="575"/>
+              <a:ext cx="901" cy="847"/>
+            </a:xfrm>
+            <a:prstGeom prst="line">
+              <a:avLst/>
+            </a:prstGeom>
+            <a:ln>
+              <a:solidFill>
+                <a:schemeClr val="bg1"/>
+              </a:solidFill>
+            </a:ln>
+          </p:spPr>
+          <p:style>
+            <a:lnRef idx="2">
+              <a:schemeClr val="accent1"/>
+            </a:lnRef>
+            <a:fillRef idx="0">
+              <a:schemeClr val="accent1"/>
+            </a:fillRef>
+            <a:effectRef idx="1">
+              <a:schemeClr val="accent1"/>
+            </a:effectRef>
+            <a:fontRef idx="minor">
+              <a:schemeClr val="tx1"/>
+            </a:fontRef>
+          </p:style>
+        </p:cxnSp>
+        <p:cxnSp>
+          <p:nvCxnSpPr>
+            <p:cNvPr id="62" name="直線コネクタ 61"/>
+            <p:cNvCxnSpPr/>
+            <p:nvPr/>
+          </p:nvCxnSpPr>
+          <p:spPr>
+            <a:xfrm>
+              <a:off x="7747" y="575"/>
+              <a:ext cx="864" cy="870"/>
+            </a:xfrm>
+            <a:prstGeom prst="line">
+              <a:avLst/>
+            </a:prstGeom>
+            <a:ln>
+              <a:solidFill>
+                <a:schemeClr val="bg1"/>
+              </a:solidFill>
+            </a:ln>
+          </p:spPr>
+          <p:style>
+            <a:lnRef idx="2">
+              <a:schemeClr val="accent1"/>
+            </a:lnRef>
+            <a:fillRef idx="0">
+              <a:schemeClr val="accent1"/>
+            </a:fillRef>
+            <a:effectRef idx="1">
+              <a:schemeClr val="accent1"/>
+            </a:effectRef>
+            <a:fontRef idx="minor">
+              <a:schemeClr val="tx1"/>
+            </a:fontRef>
+          </p:style>
+        </p:cxnSp>
+        <p:cxnSp>
+          <p:nvCxnSpPr>
+            <p:cNvPr id="63" name="直線コネクタ 62"/>
+            <p:cNvCxnSpPr/>
+            <p:nvPr/>
+          </p:nvCxnSpPr>
+          <p:spPr>
+            <a:xfrm flipH="1">
+              <a:off x="8179" y="1308"/>
+              <a:ext cx="273" cy="228"/>
+            </a:xfrm>
+            <a:prstGeom prst="line">
+              <a:avLst/>
+            </a:prstGeom>
+            <a:ln>
+              <a:solidFill>
+                <a:schemeClr val="bg1"/>
+              </a:solidFill>
+            </a:ln>
+          </p:spPr>
+          <p:style>
+            <a:lnRef idx="2">
+              <a:schemeClr val="accent1"/>
+            </a:lnRef>
+            <a:fillRef idx="0">
+              <a:schemeClr val="accent1"/>
+            </a:fillRef>
+            <a:effectRef idx="1">
+              <a:schemeClr val="accent1"/>
+            </a:effectRef>
+            <a:fontRef idx="minor">
+              <a:schemeClr val="tx1"/>
+            </a:fontRef>
+          </p:style>
+        </p:cxnSp>
+        <p:cxnSp>
+          <p:nvCxnSpPr>
+            <p:cNvPr id="64" name="直線コネクタ 63"/>
+            <p:cNvCxnSpPr/>
+            <p:nvPr/>
+          </p:nvCxnSpPr>
+          <p:spPr>
+            <a:xfrm flipH="1" flipV="1">
+              <a:off x="7838" y="1286"/>
+              <a:ext cx="319" cy="250"/>
+            </a:xfrm>
+            <a:prstGeom prst="line">
+              <a:avLst/>
+            </a:prstGeom>
+            <a:ln>
+              <a:solidFill>
+                <a:schemeClr val="bg1"/>
+              </a:solidFill>
+            </a:ln>
+          </p:spPr>
+          <p:style>
+            <a:lnRef idx="2">
+              <a:schemeClr val="accent1"/>
+            </a:lnRef>
+            <a:fillRef idx="0">
+              <a:schemeClr val="accent1"/>
+            </a:fillRef>
+            <a:effectRef idx="1">
+              <a:schemeClr val="accent1"/>
+            </a:effectRef>
+            <a:fontRef idx="minor">
+              <a:schemeClr val="tx1"/>
+            </a:fontRef>
+          </p:style>
+        </p:cxnSp>
+        <p:cxnSp>
+          <p:nvCxnSpPr>
+            <p:cNvPr id="65" name="直線コネクタ 64"/>
+            <p:cNvCxnSpPr/>
+            <p:nvPr/>
+          </p:nvCxnSpPr>
+          <p:spPr>
+            <a:xfrm flipH="1" flipV="1">
+              <a:off x="7747" y="1058"/>
+              <a:ext cx="114" cy="228"/>
+            </a:xfrm>
+            <a:prstGeom prst="line">
+              <a:avLst/>
+            </a:prstGeom>
+            <a:ln>
+              <a:solidFill>
+                <a:schemeClr val="bg1"/>
+              </a:solidFill>
+            </a:ln>
+          </p:spPr>
+          <p:style>
+            <a:lnRef idx="2">
+              <a:schemeClr val="accent1"/>
+            </a:lnRef>
+            <a:fillRef idx="0">
+              <a:schemeClr val="accent1"/>
+            </a:fillRef>
+            <a:effectRef idx="1">
+              <a:schemeClr val="accent1"/>
+            </a:effectRef>
+            <a:fontRef idx="minor">
+              <a:schemeClr val="tx1"/>
+            </a:fontRef>
+          </p:style>
+        </p:cxnSp>
+        <p:cxnSp>
+          <p:nvCxnSpPr>
+            <p:cNvPr id="66" name="直線コネクタ 65"/>
+            <p:cNvCxnSpPr/>
+            <p:nvPr/>
+          </p:nvCxnSpPr>
+          <p:spPr>
+            <a:xfrm flipH="1">
+              <a:off x="7783" y="717"/>
+              <a:ext cx="100" cy="341"/>
+            </a:xfrm>
+            <a:prstGeom prst="line">
+              <a:avLst/>
+            </a:prstGeom>
+            <a:ln>
+              <a:solidFill>
+                <a:schemeClr val="bg1"/>
+              </a:solidFill>
+            </a:ln>
+          </p:spPr>
+          <p:style>
+            <a:lnRef idx="2">
+              <a:schemeClr val="accent1"/>
+            </a:lnRef>
+            <a:fillRef idx="0">
+              <a:schemeClr val="accent1"/>
+            </a:fillRef>
+            <a:effectRef idx="1">
+              <a:schemeClr val="accent1"/>
+            </a:effectRef>
+            <a:fontRef idx="minor">
+              <a:schemeClr val="tx1"/>
+            </a:fontRef>
+          </p:style>
+        </p:cxnSp>
+        <p:cxnSp>
+          <p:nvCxnSpPr>
+            <p:cNvPr id="67" name="直線コネクタ 66"/>
+            <p:cNvCxnSpPr/>
+            <p:nvPr/>
+          </p:nvCxnSpPr>
+          <p:spPr>
+            <a:xfrm flipH="1">
+              <a:off x="7861" y="604"/>
+              <a:ext cx="296" cy="136"/>
+            </a:xfrm>
+            <a:prstGeom prst="line">
+              <a:avLst/>
+            </a:prstGeom>
+            <a:ln>
+              <a:solidFill>
+                <a:schemeClr val="bg1"/>
+              </a:solidFill>
+            </a:ln>
+          </p:spPr>
+          <p:style>
+            <a:lnRef idx="2">
+              <a:schemeClr val="accent1"/>
+            </a:lnRef>
+            <a:fillRef idx="0">
+              <a:schemeClr val="accent1"/>
+            </a:fillRef>
+            <a:effectRef idx="1">
+              <a:schemeClr val="accent1"/>
+            </a:effectRef>
+            <a:fontRef idx="minor">
+              <a:schemeClr val="tx1"/>
+            </a:fontRef>
+          </p:style>
+        </p:cxnSp>
+        <p:cxnSp>
+          <p:nvCxnSpPr>
+            <p:cNvPr id="68" name="直線コネクタ 67"/>
+            <p:cNvCxnSpPr/>
+            <p:nvPr/>
+          </p:nvCxnSpPr>
+          <p:spPr>
+            <a:xfrm>
+              <a:off x="8179" y="604"/>
+              <a:ext cx="364" cy="191"/>
+            </a:xfrm>
+            <a:prstGeom prst="line">
+              <a:avLst/>
+            </a:prstGeom>
+            <a:ln>
+              <a:solidFill>
+                <a:schemeClr val="bg1"/>
+              </a:solidFill>
+            </a:ln>
+          </p:spPr>
+          <p:style>
+            <a:lnRef idx="2">
+              <a:schemeClr val="accent1"/>
+            </a:lnRef>
+            <a:fillRef idx="0">
+              <a:schemeClr val="accent1"/>
+            </a:fillRef>
+            <a:effectRef idx="1">
+              <a:schemeClr val="accent1"/>
+            </a:effectRef>
+            <a:fontRef idx="minor">
+              <a:schemeClr val="tx1"/>
+            </a:fontRef>
+          </p:style>
+        </p:cxnSp>
+      </p:grpSp>
+      <p:sp>
+        <p:nvSpPr>
+          <p:cNvPr id="69" name="楕円 68"/>
+          <p:cNvSpPr/>
+          <p:nvPr/>
+        </p:nvSpPr>
+        <p:spPr>
+          <a:xfrm>
+            <a:off x="1426845" y="5535295"/>
+            <a:ext cx="1125855" cy="577215"/>
+          </a:xfrm>
+          <a:prstGeom prst="ellipse">
+            <a:avLst/>
+          </a:prstGeom>
+        </p:spPr>
+        <p:style>
+          <a:lnRef idx="2">
+            <a:schemeClr val="accent1">
+              <a:lumMod val="75000"/>
+            </a:schemeClr>
+          </a:lnRef>
+          <a:fillRef idx="1">
+            <a:schemeClr val="accent1"/>
+          </a:fillRef>
+          <a:effectRef idx="0">
+            <a:srgbClr val="FFFFFF"/>
+          </a:effectRef>
+          <a:fontRef idx="minor">
+            <a:schemeClr val="lt1"/>
+          </a:fontRef>
+        </p:style>
+        <p:txBody>
+          <a:bodyPr rtlCol="0" anchor="ctr"/>
+          <a:p>
+            <a:pPr algn="ctr"/>
+            <a:endParaRPr lang="ja-JP" altLang="en-US"/>
+          </a:p>
+        </p:txBody>
+      </p:sp>
+      <p:sp>
+        <p:nvSpPr>
+          <p:cNvPr id="70" name="楕円 69"/>
+          <p:cNvSpPr/>
+          <p:nvPr/>
+        </p:nvSpPr>
+        <p:spPr>
+          <a:xfrm>
+            <a:off x="9347200" y="1451610"/>
+            <a:ext cx="1125855" cy="577215"/>
+          </a:xfrm>
+          <a:prstGeom prst="ellipse">
+            <a:avLst/>
+          </a:prstGeom>
+        </p:spPr>
+        <p:style>
+          <a:lnRef idx="2">
+            <a:schemeClr val="accent1">
+              <a:lumMod val="75000"/>
+            </a:schemeClr>
+          </a:lnRef>
+          <a:fillRef idx="1">
+            <a:schemeClr val="accent1"/>
+          </a:fillRef>
+          <a:effectRef idx="0">
+            <a:srgbClr val="FFFFFF"/>
+          </a:effectRef>
+          <a:fontRef idx="minor">
+            <a:schemeClr val="lt1"/>
+          </a:fontRef>
+        </p:style>
+        <p:txBody>
+          <a:bodyPr rtlCol="0" anchor="ctr"/>
+          <a:p>
+            <a:pPr algn="ctr"/>
+            <a:endParaRPr lang="ja-JP" altLang="en-US"/>
+          </a:p>
+        </p:txBody>
+      </p:sp>
+      <p:sp>
+        <p:nvSpPr>
+          <p:cNvPr id="71" name="楕円 70"/>
+          <p:cNvSpPr/>
+          <p:nvPr/>
+        </p:nvSpPr>
+        <p:spPr>
+          <a:xfrm>
+            <a:off x="5248910" y="4192270"/>
+            <a:ext cx="1125855" cy="577215"/>
+          </a:xfrm>
+          <a:prstGeom prst="ellipse">
+            <a:avLst/>
+          </a:prstGeom>
+        </p:spPr>
+        <p:style>
+          <a:lnRef idx="2">
+            <a:schemeClr val="accent1">
+              <a:lumMod val="75000"/>
+            </a:schemeClr>
+          </a:lnRef>
+          <a:fillRef idx="1">
+            <a:schemeClr val="accent1"/>
+          </a:fillRef>
+          <a:effectRef idx="0">
+            <a:srgbClr val="FFFFFF"/>
+          </a:effectRef>
+          <a:fontRef idx="minor">
+            <a:schemeClr val="lt1"/>
+          </a:fontRef>
+        </p:style>
+        <p:txBody>
+          <a:bodyPr rtlCol="0" anchor="ctr"/>
+          <a:p>
+            <a:pPr algn="ctr"/>
+            <a:endParaRPr lang="ja-JP" altLang="en-US"/>
+          </a:p>
+        </p:txBody>
+      </p:sp>
+      <p:cxnSp>
+        <p:nvCxnSpPr>
+          <p:cNvPr id="72" name="直線コネクタ 71"/>
+          <p:cNvCxnSpPr/>
+          <p:nvPr/>
+        </p:nvCxnSpPr>
+        <p:spPr>
+          <a:xfrm>
+            <a:off x="3303270" y="2389505"/>
+            <a:ext cx="793750" cy="779145"/>
+          </a:xfrm>
+          <a:prstGeom prst="line">
+            <a:avLst/>
+          </a:prstGeom>
+          <a:ln w="31750" cap="sq" cmpd="dbl">
+            <a:solidFill>
+              <a:srgbClr val="FF0000"/>
+            </a:solidFill>
+            <a:round/>
+          </a:ln>
+        </p:spPr>
+        <p:style>
+          <a:lnRef idx="0">
+            <a:srgbClr val="FFFFFF"/>
+          </a:lnRef>
+          <a:fillRef idx="0">
+            <a:srgbClr val="FFFFFF"/>
+          </a:fillRef>
+          <a:effectRef idx="0">
+            <a:srgbClr val="FFFFFF"/>
+          </a:effectRef>
+          <a:fontRef idx="minor">
+            <a:schemeClr val="tx1"/>
+          </a:fontRef>
+        </p:style>
+      </p:cxnSp>
+      <p:cxnSp>
+        <p:nvCxnSpPr>
+          <p:cNvPr id="73" name="直線コネクタ 72"/>
+          <p:cNvCxnSpPr>
+            <a:endCxn id="9" idx="3"/>
+          </p:cNvCxnSpPr>
+          <p:nvPr/>
+        </p:nvCxnSpPr>
+        <p:spPr>
+          <a:xfrm>
+            <a:off x="7166610" y="5594985"/>
+            <a:ext cx="1757680" cy="142875"/>
+          </a:xfrm>
+          <a:prstGeom prst="line">
+            <a:avLst/>
+          </a:prstGeom>
+          <a:ln w="31750" cap="sq" cmpd="dbl">
+            <a:solidFill>
+              <a:srgbClr val="FF0000"/>
+            </a:solidFill>
+            <a:round/>
+          </a:ln>
+        </p:spPr>
+        <p:style>
+          <a:lnRef idx="0">
+            <a:srgbClr val="FFFFFF"/>
+          </a:lnRef>
+          <a:fillRef idx="0">
+            <a:srgbClr val="FFFFFF"/>
+          </a:fillRef>
+          <a:effectRef idx="0">
+            <a:srgbClr val="FFFFFF"/>
+          </a:effectRef>
+          <a:fontRef idx="minor">
+            <a:schemeClr val="tx1"/>
+          </a:fontRef>
+        </p:style>
+      </p:cxnSp>
+      <p:cxnSp>
+        <p:nvCxnSpPr>
+          <p:cNvPr id="74" name="直線コネクタ 73"/>
+          <p:cNvCxnSpPr>
+            <a:endCxn id="6" idx="3"/>
+          </p:cNvCxnSpPr>
+          <p:nvPr/>
+        </p:nvCxnSpPr>
+        <p:spPr>
+          <a:xfrm>
+            <a:off x="7553960" y="2807335"/>
+            <a:ext cx="352425" cy="822960"/>
+          </a:xfrm>
+          <a:prstGeom prst="line">
+            <a:avLst/>
+          </a:prstGeom>
+          <a:ln w="31750" cap="sq" cmpd="dbl">
+            <a:solidFill>
+              <a:srgbClr val="FF0000"/>
+            </a:solidFill>
+            <a:round/>
+          </a:ln>
+        </p:spPr>
+        <p:style>
+          <a:lnRef idx="0">
+            <a:srgbClr val="FFFFFF"/>
+          </a:lnRef>
+          <a:fillRef idx="0">
+            <a:srgbClr val="FFFFFF"/>
+          </a:fillRef>
+          <a:effectRef idx="0">
+            <a:srgbClr val="FFFFFF"/>
+          </a:effectRef>
+          <a:fontRef idx="minor">
+            <a:schemeClr val="tx1"/>
+          </a:fontRef>
+        </p:style>
+      </p:cxnSp>
+      <p:cxnSp>
+        <p:nvCxnSpPr>
+          <p:cNvPr id="75" name="直線コネクタ 74"/>
+          <p:cNvCxnSpPr>
+            <a:endCxn id="8" idx="1"/>
+          </p:cNvCxnSpPr>
+          <p:nvPr/>
+        </p:nvCxnSpPr>
+        <p:spPr>
+          <a:xfrm>
+            <a:off x="1275080" y="4769485"/>
+            <a:ext cx="1080135" cy="34290"/>
+          </a:xfrm>
+          <a:prstGeom prst="line">
+            <a:avLst/>
+          </a:prstGeom>
+          <a:ln w="31750" cap="sq" cmpd="dbl">
+            <a:solidFill>
+              <a:srgbClr val="FF0000"/>
+            </a:solidFill>
+            <a:round/>
+          </a:ln>
+        </p:spPr>
+        <p:style>
+          <a:lnRef idx="0">
+            <a:srgbClr val="FFFFFF"/>
+          </a:lnRef>
+          <a:fillRef idx="0">
+            <a:srgbClr val="FFFFFF"/>
+          </a:fillRef>
+          <a:effectRef idx="0">
+            <a:srgbClr val="FFFFFF"/>
+          </a:effectRef>
+          <a:fontRef idx="minor">
+            <a:schemeClr val="tx1"/>
+          </a:fontRef>
+        </p:style>
+      </p:cxnSp>
+      <p:sp>
+        <p:nvSpPr>
+          <p:cNvPr id="77" name="角丸四角形吹き出し 76"/>
+          <p:cNvSpPr/>
+          <p:nvPr/>
+        </p:nvSpPr>
+        <p:spPr>
+          <a:xfrm>
+            <a:off x="0" y="2579370"/>
+            <a:ext cx="1274445" cy="866140"/>
+          </a:xfrm>
+          <a:prstGeom prst="wedgeRoundRectCallout">
+            <a:avLst>
+              <a:gd name="adj1" fmla="val 86372"/>
+              <a:gd name="adj2" fmla="val 202492"/>
+              <a:gd name="adj3" fmla="val 16667"/>
+            </a:avLst>
+          </a:prstGeom>
+          <a:ln>
+            <a:solidFill>
+              <a:schemeClr val="tx2">
+                <a:lumMod val="50000"/>
+                <a:lumOff val="50000"/>
+              </a:schemeClr>
+            </a:solidFill>
+          </a:ln>
+        </p:spPr>
+        <p:style>
+          <a:lnRef idx="2">
+            <a:schemeClr val="accent1"/>
+          </a:lnRef>
+          <a:fillRef idx="0">
+            <a:srgbClr val="FFFFFF"/>
+          </a:fillRef>
+          <a:effectRef idx="0">
+            <a:srgbClr val="FFFFFF"/>
+          </a:effectRef>
+          <a:fontRef idx="minor">
+            <a:schemeClr val="tx1"/>
+          </a:fontRef>
+        </p:style>
+        <p:txBody>
+          <a:bodyPr rtlCol="0" anchor="ctr"/>
+          <a:p>
+            <a:pPr algn="ctr"/>
+            <a:endParaRPr lang="ja-JP" altLang="en-US"/>
+          </a:p>
+        </p:txBody>
+      </p:sp>
+      <p:sp>
+        <p:nvSpPr>
+          <p:cNvPr id="78" name="角丸四角形吹き出し 77"/>
+          <p:cNvSpPr/>
+          <p:nvPr/>
+        </p:nvSpPr>
+        <p:spPr>
+          <a:xfrm>
+            <a:off x="10473055" y="391795"/>
+            <a:ext cx="1370965" cy="866140"/>
+          </a:xfrm>
+          <a:prstGeom prst="wedgeRoundRectCallout">
+            <a:avLst>
+              <a:gd name="adj1" fmla="val -95622"/>
+              <a:gd name="adj2" fmla="val 114222"/>
+              <a:gd name="adj3" fmla="val 16667"/>
+            </a:avLst>
+          </a:prstGeom>
+          <a:ln>
+            <a:solidFill>
+              <a:schemeClr val="tx2">
+                <a:lumMod val="50000"/>
+                <a:lumOff val="50000"/>
+              </a:schemeClr>
+            </a:solidFill>
+          </a:ln>
+        </p:spPr>
+        <p:style>
+          <a:lnRef idx="2">
+            <a:schemeClr val="accent1"/>
+          </a:lnRef>
+          <a:fillRef idx="0">
+            <a:srgbClr val="FFFFFF"/>
+          </a:fillRef>
+          <a:effectRef idx="0">
+            <a:srgbClr val="FFFFFF"/>
+          </a:effectRef>
+          <a:fontRef idx="minor">
+            <a:schemeClr val="tx1"/>
+          </a:fontRef>
+        </p:style>
+        <p:txBody>
+          <a:bodyPr rtlCol="0" anchor="ctr"/>
+          <a:p>
+            <a:pPr algn="ctr"/>
+            <a:endParaRPr lang="ja-JP" altLang="en-US"/>
+          </a:p>
+        </p:txBody>
+      </p:sp>
+      <p:sp>
+        <p:nvSpPr>
+          <p:cNvPr id="79" name="角丸四角形吹き出し 78"/>
+          <p:cNvSpPr/>
+          <p:nvPr/>
+        </p:nvSpPr>
+        <p:spPr>
+          <a:xfrm>
+            <a:off x="10734675" y="3175635"/>
+            <a:ext cx="1370965" cy="866140"/>
+          </a:xfrm>
+          <a:prstGeom prst="wedgeRoundRectCallout">
+            <a:avLst>
+              <a:gd name="adj1" fmla="val -186127"/>
+              <a:gd name="adj2" fmla="val 25879"/>
+              <a:gd name="adj3" fmla="val 16667"/>
+            </a:avLst>
+          </a:prstGeom>
+          <a:ln>
+            <a:solidFill>
+              <a:schemeClr val="tx2">
+                <a:lumMod val="50000"/>
+                <a:lumOff val="50000"/>
+              </a:schemeClr>
+            </a:solidFill>
+          </a:ln>
+        </p:spPr>
+        <p:style>
+          <a:lnRef idx="2">
+            <a:schemeClr val="accent1"/>
+          </a:lnRef>
+          <a:fillRef idx="0">
+            <a:srgbClr val="FFFFFF"/>
+          </a:fillRef>
+          <a:effectRef idx="0">
+            <a:srgbClr val="FFFFFF"/>
+          </a:effectRef>
+          <a:fontRef idx="minor">
+            <a:schemeClr val="tx1"/>
+          </a:fontRef>
+        </p:style>
+        <p:txBody>
+          <a:bodyPr rtlCol="0" anchor="ctr"/>
+          <a:p>
+            <a:pPr algn="ctr"/>
+            <a:endParaRPr lang="ja-JP" altLang="en-US"/>
+          </a:p>
+        </p:txBody>
+      </p:sp>
+      <p:sp>
+        <p:nvSpPr>
+          <p:cNvPr id="80" name="テキストボックス 79"/>
+          <p:cNvSpPr txBox="1"/>
+          <p:nvPr/>
+        </p:nvSpPr>
+        <p:spPr>
+          <a:xfrm>
+            <a:off x="10473055" y="640715"/>
+            <a:ext cx="1327150" cy="368300"/>
+          </a:xfrm>
+          <a:prstGeom prst="rect">
+            <a:avLst/>
+          </a:prstGeom>
+          <a:noFill/>
+        </p:spPr>
+        <p:txBody>
+          <a:bodyPr wrap="square" rtlCol="0">
+            <a:spAutoFit/>
+          </a:bodyPr>
+          <a:p>
+            <a:r>
+              <a:rPr lang="ja-JP" altLang="en-US"/>
+              <a:t>水たまり</a:t>
+            </a:r>
+            <a:endParaRPr lang="ja-JP" altLang="en-US"/>
+          </a:p>
+        </p:txBody>
+      </p:sp>
+      <p:sp>
+        <p:nvSpPr>
+          <p:cNvPr id="81" name="テキストボックス 80"/>
+          <p:cNvSpPr txBox="1"/>
+          <p:nvPr/>
+        </p:nvSpPr>
+        <p:spPr>
+          <a:xfrm>
+            <a:off x="0" y="2828290"/>
+            <a:ext cx="1327150" cy="368300"/>
+          </a:xfrm>
+          <a:prstGeom prst="rect">
+            <a:avLst/>
+          </a:prstGeom>
+          <a:noFill/>
+        </p:spPr>
+        <p:txBody>
+          <a:bodyPr wrap="square" rtlCol="0">
+            <a:spAutoFit/>
+          </a:bodyPr>
+          <a:p>
+            <a:r>
+              <a:rPr lang="ja-JP" altLang="en-US"/>
+              <a:t>開閉ゲート</a:t>
+            </a:r>
+            <a:endParaRPr lang="ja-JP" altLang="en-US"/>
+          </a:p>
+        </p:txBody>
+      </p:sp>
+      <p:sp>
+        <p:nvSpPr>
+          <p:cNvPr id="82" name="テキストボックス 81"/>
+          <p:cNvSpPr txBox="1"/>
+          <p:nvPr/>
+        </p:nvSpPr>
+        <p:spPr>
+          <a:xfrm>
+            <a:off x="10727055" y="3428365"/>
+            <a:ext cx="1327150" cy="368300"/>
+          </a:xfrm>
+          <a:prstGeom prst="rect">
+            <a:avLst/>
+          </a:prstGeom>
+          <a:noFill/>
+        </p:spPr>
+        <p:txBody>
+          <a:bodyPr wrap="square" rtlCol="0">
+            <a:spAutoFit/>
+          </a:bodyPr>
+          <a:p>
+            <a:r>
+              <a:rPr lang="ja-JP" altLang="en-US"/>
+              <a:t>蜘蛛の巣</a:t>
+            </a:r>
+            <a:endParaRPr lang="ja-JP" altLang="en-US"/>
+          </a:p>
+        </p:txBody>
+      </p:sp>
+    </p:spTree>
   </p:cSld>
   <p:clrMapOvr>
     <a:masterClrMapping/>
@@ -4524,7 +7466,7 @@
     </a:clrScheme>
     <a:fontScheme name="Office">
       <a:majorFont>
-        <a:latin typeface="游ゴシック Light" panose="02110004020202020204"/>
+        <a:latin typeface="游ゴシック Light"/>
         <a:ea typeface=""/>
         <a:cs typeface=""/>
         <a:font script="Jpan" typeface="游ゴシック Light"/>
@@ -4557,26 +7499,9 @@
         <a:font script="Viet" typeface="Times New Roman"/>
         <a:font script="Uigh" typeface="Microsoft Uighur"/>
         <a:font script="Geor" typeface="Sylfaen"/>
-        <a:font script="Armn" typeface="Arial"/>
-        <a:font script="Bugi" typeface="Leelawadee UI"/>
-        <a:font script="Bopo" typeface="Microsoft JhengHei"/>
-        <a:font script="Java" typeface="Javanese Text"/>
-        <a:font script="Lisu" typeface="Segoe UI"/>
-        <a:font script="Mymr" typeface="Myanmar Text"/>
-        <a:font script="Nkoo" typeface="Ebrima"/>
-        <a:font script="Olck" typeface="Nirmala UI"/>
-        <a:font script="Osma" typeface="Ebrima"/>
-        <a:font script="Phag" typeface="Phagspa"/>
-        <a:font script="Syrn" typeface="Estrangelo Edessa"/>
-        <a:font script="Syrj" typeface="Estrangelo Edessa"/>
-        <a:font script="Syre" typeface="Estrangelo Edessa"/>
-        <a:font script="Sora" typeface="Nirmala UI"/>
-        <a:font script="Tale" typeface="Microsoft Tai Le"/>
-        <a:font script="Talu" typeface="Microsoft New Tai Lue"/>
-        <a:font script="Tfng" typeface="Ebrima"/>
       </a:majorFont>
       <a:minorFont>
-        <a:latin typeface="游ゴシック" panose="02110004020202020204"/>
+        <a:latin typeface="游ゴシック"/>
         <a:ea typeface=""/>
         <a:cs typeface=""/>
         <a:font script="Jpan" typeface="游ゴシック"/>
@@ -4609,23 +7534,6 @@
         <a:font script="Viet" typeface="Arial"/>
         <a:font script="Uigh" typeface="Microsoft Uighur"/>
         <a:font script="Geor" typeface="Sylfaen"/>
-        <a:font script="Armn" typeface="Arial"/>
-        <a:font script="Bugi" typeface="Leelawadee UI"/>
-        <a:font script="Bopo" typeface="Microsoft JhengHei"/>
-        <a:font script="Java" typeface="Javanese Text"/>
-        <a:font script="Lisu" typeface="Segoe UI"/>
-        <a:font script="Mymr" typeface="Myanmar Text"/>
-        <a:font script="Nkoo" typeface="Ebrima"/>
-        <a:font script="Olck" typeface="Nirmala UI"/>
-        <a:font script="Osma" typeface="Ebrima"/>
-        <a:font script="Phag" typeface="Phagspa"/>
-        <a:font script="Syrn" typeface="Estrangelo Edessa"/>
-        <a:font script="Syrj" typeface="Estrangelo Edessa"/>
-        <a:font script="Syre" typeface="Estrangelo Edessa"/>
-        <a:font script="Sora" typeface="Nirmala UI"/>
-        <a:font script="Tale" typeface="Microsoft Tai Le"/>
-        <a:font script="Talu" typeface="Microsoft New Tai Lue"/>
-        <a:font script="Tfng" typeface="Ebrima"/>
       </a:minorFont>
     </a:fontScheme>
     <a:fmtScheme name="Office">
@@ -4787,10 +7695,9 @@
       </a:style>
     </a:lnDef>
   </a:objectDefaults>
-  <a:extraClrSchemeLst/>
   <a:extLst>
     <a:ext uri="{05A4C25C-085E-4340-85A3-A5531E510DB2}">
-      <thm15:themeFamily xmlns:thm15="http://schemas.microsoft.com/office/thememl/2012/main" name="Office Theme" id="{2E142A2C-CD16-42D6-873A-C26D2A0506FA}" vid="{1BDDFF52-6CD6-40A5-AB3C-68EB2F1E4D0A}"/>
+      <thm15:themeFamily xmlns:thm15="http://schemas.microsoft.com/office/thememl/2012/main" name="Office Theme" id="{62F939B6-93AF-4DB8-9C6B-D6C7DFDC589F}" vid="{4A3C46E8-61CC-4603-A589-7422A47A8E4A}"/>
     </a:ext>
   </a:extLst>
 </a:theme>
